--- a/templates/posts/october/05-10-2026-mon-ig-teachers-day-option-2-bunting.pptx
+++ b/templates/posts/october/05-10-2026-mon-ig-teachers-day-option-2-bunting.pptx
@@ -7508,7 +7508,7 @@
             </a:pathLst>
           </a:custGeom>
           <a:solidFill>
-            <a:srgbClr val="D39C48"/>
+            <a:srgbClr val="31662F"/>
           </a:solidFill>
           <a:ln>
             <a:noFill/>
@@ -7570,7 +7570,7 @@
             </a:pathLst>
           </a:custGeom>
           <a:solidFill>
-            <a:srgbClr val="31662F"/>
+            <a:srgbClr val="C09D7F"/>
           </a:solidFill>
           <a:ln>
             <a:noFill/>
@@ -7632,7 +7632,7 @@
             </a:pathLst>
           </a:custGeom>
           <a:solidFill>
-            <a:srgbClr val="C09D7F"/>
+            <a:srgbClr val="B1BCB1"/>
           </a:solidFill>
           <a:ln>
             <a:noFill/>
@@ -7694,7 +7694,7 @@
             </a:pathLst>
           </a:custGeom>
           <a:solidFill>
-            <a:srgbClr val="B1BCB1"/>
+            <a:srgbClr val="4C3634"/>
           </a:solidFill>
           <a:ln>
             <a:noFill/>
@@ -7756,7 +7756,7 @@
             </a:pathLst>
           </a:custGeom>
           <a:solidFill>
-            <a:srgbClr val="4C3634"/>
+            <a:srgbClr val="31662F"/>
           </a:solidFill>
           <a:ln>
             <a:noFill/>
@@ -7800,7 +7800,7 @@
             <a:avLst/>
           </a:prstGeom>
           <a:solidFill>
-            <a:srgbClr val="D39C48"/>
+            <a:srgbClr val="4C3634"/>
           </a:solidFill>
           <a:ln>
             <a:noFill/>
@@ -7837,8 +7837,8 @@
         </p:nvSpPr>
         <p:spPr>
           <a:xfrm>
-            <a:off x="4806052" y="2458261"/>
-            <a:ext cx="149176" cy="149176"/>
+            <a:off x="6221786" y="1967416"/>
+            <a:ext cx="87104" cy="87104"/>
           </a:xfrm>
           <a:prstGeom prst="ellipse">
             <a:avLst/>
@@ -8020,7 +8020,7 @@
             <a:avLst/>
           </a:prstGeom>
           <a:solidFill>
-            <a:srgbClr val="D39C48"/>
+            <a:srgbClr val="31662F"/>
           </a:solidFill>
           <a:ln>
             <a:noFill/>
@@ -8057,14 +8057,14 @@
         </p:nvSpPr>
         <p:spPr>
           <a:xfrm>
-            <a:off x="780414" y="2648022"/>
-            <a:ext cx="172014" cy="172014"/>
+            <a:off x="3193182" y="1934538"/>
+            <a:ext cx="176410" cy="176410"/>
           </a:xfrm>
           <a:prstGeom prst="ellipse">
             <a:avLst/>
           </a:prstGeom>
           <a:solidFill>
-            <a:srgbClr val="B1BCB1"/>
+            <a:srgbClr val="4C3634"/>
           </a:solidFill>
           <a:ln>
             <a:noFill/>
@@ -8101,8 +8101,8 @@
         </p:nvSpPr>
         <p:spPr>
           <a:xfrm>
-            <a:off x="4793876" y="2589679"/>
-            <a:ext cx="177802" cy="177802"/>
+            <a:off x="5932689" y="2781449"/>
+            <a:ext cx="126336" cy="126336"/>
           </a:xfrm>
           <a:prstGeom prst="ellipse">
             <a:avLst/>
@@ -8284,7 +8284,7 @@
             <a:avLst/>
           </a:prstGeom>
           <a:solidFill>
-            <a:srgbClr val="D39C48"/>
+            <a:srgbClr val="4C3634"/>
           </a:solidFill>
           <a:ln>
             <a:noFill/>
@@ -8321,8 +8321,8 @@
         </p:nvSpPr>
         <p:spPr>
           <a:xfrm>
-            <a:off x="5842374" y="2461499"/>
-            <a:ext cx="180462" cy="180462"/>
+            <a:off x="5834698" y="2766252"/>
+            <a:ext cx="157179" cy="157179"/>
           </a:xfrm>
           <a:prstGeom prst="ellipse">
             <a:avLst/>
@@ -8416,7 +8416,7 @@
             <a:avLst/>
           </a:prstGeom>
           <a:solidFill>
-            <a:srgbClr val="D39C48"/>
+            <a:srgbClr val="31662F"/>
           </a:solidFill>
           <a:ln>
             <a:noFill/>
@@ -8453,14 +8453,14 @@
         </p:nvSpPr>
         <p:spPr>
           <a:xfrm>
-            <a:off x="5693333" y="2584910"/>
-            <a:ext cx="107845" cy="107845"/>
+            <a:off x="7044124" y="2106096"/>
+            <a:ext cx="172856" cy="172856"/>
           </a:xfrm>
           <a:prstGeom prst="ellipse">
             <a:avLst/>
           </a:prstGeom>
           <a:solidFill>
-            <a:srgbClr val="D39C48"/>
+            <a:srgbClr val="B1BCB1"/>
           </a:solidFill>
           <a:ln>
             <a:noFill/>
@@ -8497,8 +8497,8 @@
         </p:nvSpPr>
         <p:spPr>
           <a:xfrm>
-            <a:off x="2874104" y="2023524"/>
-            <a:ext cx="136226" cy="136226"/>
+            <a:off x="3040935" y="1965446"/>
+            <a:ext cx="175196" cy="175196"/>
           </a:xfrm>
           <a:prstGeom prst="ellipse">
             <a:avLst/>
@@ -8636,7 +8636,7 @@
             <a:avLst/>
           </a:prstGeom>
           <a:solidFill>
-            <a:srgbClr val="D39C48"/>
+            <a:srgbClr val="B1BCB1"/>
           </a:solidFill>
           <a:ln>
             <a:noFill/>
@@ -8673,14 +8673,14 @@
         </p:nvSpPr>
         <p:spPr>
           <a:xfrm>
-            <a:off x="3470291" y="2744062"/>
-            <a:ext cx="188471" cy="188471"/>
+            <a:off x="5522922" y="2783092"/>
+            <a:ext cx="114964" cy="114964"/>
           </a:xfrm>
           <a:prstGeom prst="ellipse">
             <a:avLst/>
           </a:prstGeom>
           <a:solidFill>
-            <a:srgbClr val="D39C48"/>
+            <a:srgbClr val="C09D7F"/>
           </a:solidFill>
           <a:ln>
             <a:noFill/>
@@ -8717,8 +8717,8 @@
         </p:nvSpPr>
         <p:spPr>
           <a:xfrm>
-            <a:off x="2583489" y="1939302"/>
-            <a:ext cx="86482" cy="86482"/>
+            <a:off x="9701581" y="2199960"/>
+            <a:ext cx="93789" cy="93789"/>
           </a:xfrm>
           <a:prstGeom prst="ellipse">
             <a:avLst/>
@@ -8761,13 +8761,101 @@
         </p:nvSpPr>
         <p:spPr>
           <a:xfrm>
-            <a:off x="5979485" y="1934887"/>
-            <a:ext cx="106405" cy="106405"/>
+            <a:off x="9238464" y="2830285"/>
+            <a:ext cx="116278" cy="116278"/>
           </a:xfrm>
           <a:prstGeom prst="ellipse">
             <a:avLst/>
           </a:prstGeom>
           <a:solidFill>
+            <a:srgbClr val="B1BCB1"/>
+          </a:solidFill>
+          <a:ln>
+            <a:noFill/>
+          </a:ln>
+          <a:effectLst/>
+        </p:spPr>
+        <p:style>
+          <a:lnRef idx="1">
+            <a:schemeClr val="accent1"/>
+          </a:lnRef>
+          <a:fillRef idx="3">
+            <a:schemeClr val="accent1"/>
+          </a:fillRef>
+          <a:effectRef idx="2">
+            <a:schemeClr val="accent1"/>
+          </a:effectRef>
+          <a:fontRef idx="minor">
+            <a:schemeClr val="lt1"/>
+          </a:fontRef>
+        </p:style>
+        <p:txBody>
+          <a:bodyPr rtlCol="0" anchor="ctr"/>
+          <a:lstStyle/>
+          <a:p>
+            <a:pPr algn="ctr"/>
+          </a:p>
+        </p:txBody>
+      </p:sp>
+      <p:sp>
+        <p:nvSpPr>
+          <p:cNvPr id="90" name="Oval 89"/>
+          <p:cNvSpPr/>
+          <p:nvPr/>
+        </p:nvSpPr>
+        <p:spPr>
+          <a:xfrm>
+            <a:off x="1839039" y="1945420"/>
+            <a:ext cx="176646" cy="176646"/>
+          </a:xfrm>
+          <a:prstGeom prst="ellipse">
+            <a:avLst/>
+          </a:prstGeom>
+          <a:solidFill>
+            <a:srgbClr val="B1BCB1"/>
+          </a:solidFill>
+          <a:ln>
+            <a:noFill/>
+          </a:ln>
+          <a:effectLst/>
+        </p:spPr>
+        <p:style>
+          <a:lnRef idx="1">
+            <a:schemeClr val="accent1"/>
+          </a:lnRef>
+          <a:fillRef idx="3">
+            <a:schemeClr val="accent1"/>
+          </a:fillRef>
+          <a:effectRef idx="2">
+            <a:schemeClr val="accent1"/>
+          </a:effectRef>
+          <a:fontRef idx="minor">
+            <a:schemeClr val="lt1"/>
+          </a:fontRef>
+        </p:style>
+        <p:txBody>
+          <a:bodyPr rtlCol="0" anchor="ctr"/>
+          <a:lstStyle/>
+          <a:p>
+            <a:pPr algn="ctr"/>
+          </a:p>
+        </p:txBody>
+      </p:sp>
+      <p:sp>
+        <p:nvSpPr>
+          <p:cNvPr id="91" name="Oval 90"/>
+          <p:cNvSpPr/>
+          <p:nvPr/>
+        </p:nvSpPr>
+        <p:spPr>
+          <a:xfrm>
+            <a:off x="3743255" y="2036755"/>
+            <a:ext cx="176010" cy="176010"/>
+          </a:xfrm>
+          <a:prstGeom prst="ellipse">
+            <a:avLst/>
+          </a:prstGeom>
+          <a:solidFill>
             <a:srgbClr val="4C3634"/>
           </a:solidFill>
           <a:ln>
@@ -8799,108 +8887,20 @@
       </p:sp>
       <p:sp>
         <p:nvSpPr>
-          <p:cNvPr id="90" name="Oval 89"/>
-          <p:cNvSpPr/>
-          <p:nvPr/>
-        </p:nvSpPr>
-        <p:spPr>
-          <a:xfrm>
-            <a:off x="3103055" y="2155862"/>
-            <a:ext cx="157991" cy="157991"/>
+          <p:cNvPr id="92" name="Oval 91"/>
+          <p:cNvSpPr/>
+          <p:nvPr/>
+        </p:nvSpPr>
+        <p:spPr>
+          <a:xfrm>
+            <a:off x="4678693" y="2400369"/>
+            <a:ext cx="153188" cy="153188"/>
           </a:xfrm>
           <a:prstGeom prst="ellipse">
             <a:avLst/>
           </a:prstGeom>
           <a:solidFill>
-            <a:srgbClr val="B1BCB1"/>
-          </a:solidFill>
-          <a:ln>
-            <a:noFill/>
-          </a:ln>
-          <a:effectLst/>
-        </p:spPr>
-        <p:style>
-          <a:lnRef idx="1">
-            <a:schemeClr val="accent1"/>
-          </a:lnRef>
-          <a:fillRef idx="3">
-            <a:schemeClr val="accent1"/>
-          </a:fillRef>
-          <a:effectRef idx="2">
-            <a:schemeClr val="accent1"/>
-          </a:effectRef>
-          <a:fontRef idx="minor">
-            <a:schemeClr val="lt1"/>
-          </a:fontRef>
-        </p:style>
-        <p:txBody>
-          <a:bodyPr rtlCol="0" anchor="ctr"/>
-          <a:lstStyle/>
-          <a:p>
-            <a:pPr algn="ctr"/>
-          </a:p>
-        </p:txBody>
-      </p:sp>
-      <p:sp>
-        <p:nvSpPr>
-          <p:cNvPr id="91" name="Oval 90"/>
-          <p:cNvSpPr/>
-          <p:nvPr/>
-        </p:nvSpPr>
-        <p:spPr>
-          <a:xfrm>
-            <a:off x="3310450" y="2818123"/>
-            <a:ext cx="179672" cy="179672"/>
-          </a:xfrm>
-          <a:prstGeom prst="ellipse">
-            <a:avLst/>
-          </a:prstGeom>
-          <a:solidFill>
-            <a:srgbClr val="4C3634"/>
-          </a:solidFill>
-          <a:ln>
-            <a:noFill/>
-          </a:ln>
-          <a:effectLst/>
-        </p:spPr>
-        <p:style>
-          <a:lnRef idx="1">
-            <a:schemeClr val="accent1"/>
-          </a:lnRef>
-          <a:fillRef idx="3">
-            <a:schemeClr val="accent1"/>
-          </a:fillRef>
-          <a:effectRef idx="2">
-            <a:schemeClr val="accent1"/>
-          </a:effectRef>
-          <a:fontRef idx="minor">
-            <a:schemeClr val="lt1"/>
-          </a:fontRef>
-        </p:style>
-        <p:txBody>
-          <a:bodyPr rtlCol="0" anchor="ctr"/>
-          <a:lstStyle/>
-          <a:p>
-            <a:pPr algn="ctr"/>
-          </a:p>
-        </p:txBody>
-      </p:sp>
-      <p:sp>
-        <p:nvSpPr>
-          <p:cNvPr id="92" name="Oval 91"/>
-          <p:cNvSpPr/>
-          <p:nvPr/>
-        </p:nvSpPr>
-        <p:spPr>
-          <a:xfrm>
-            <a:off x="3897784" y="2733571"/>
-            <a:ext cx="126188" cy="126188"/>
-          </a:xfrm>
-          <a:prstGeom prst="ellipse">
-            <a:avLst/>
-          </a:prstGeom>
-          <a:solidFill>
-            <a:srgbClr val="D39C48"/>
+            <a:srgbClr val="31662F"/>
           </a:solidFill>
           <a:ln>
             <a:noFill/>
@@ -9035,11 +9035,11 @@
               </a:lnSpc>
             </a:pPr>
             <a:r>
-              <a:rPr sz="3000" b="0" i="1">
+              <a:rPr sz="3000" b="0" i="0">
                 <a:solidFill>
                   <a:srgbClr val="1A1A1A"/>
                 </a:solidFill>
-                <a:latin typeface="EB Garamond"/>
+                <a:latin typeface="Source Sans 3"/>
               </a:rPr>
               <a:t>Thank you to the mentors who teach our students to see soil.</a:t>
             </a:r>
@@ -9048,7 +9048,7 @@
       </p:sp>
       <p:pic>
         <p:nvPicPr>
-          <p:cNvPr id="96" name="Picture 95" descr="2816174903413684875.jpg"/>
+          <p:cNvPr id="96" name="Picture 95" descr="5400735994492257660.jpg"/>
           <p:cNvPicPr>
             <a:picLocks noChangeAspect="1"/>
           </p:cNvPicPr>
@@ -9072,7 +9072,7 @@
       </p:pic>
       <p:pic>
         <p:nvPicPr>
-          <p:cNvPr id="97" name="Picture 96" descr="3899877844356190033.jpg"/>
+          <p:cNvPr id="97" name="Picture 96" descr="3801524672074236264.jpg"/>
           <p:cNvPicPr>
             <a:picLocks noChangeAspect="1"/>
           </p:cNvPicPr>
@@ -9096,7 +9096,7 @@
       </p:pic>
       <p:pic>
         <p:nvPicPr>
-          <p:cNvPr id="98" name="Picture 97" descr="3051033986522453960.jpg"/>
+          <p:cNvPr id="98" name="Picture 97" descr="3725674984251627259.jpg"/>
           <p:cNvPicPr>
             <a:picLocks noChangeAspect="1"/>
           </p:cNvPicPr>
@@ -9120,7 +9120,7 @@
       </p:pic>
       <p:pic>
         <p:nvPicPr>
-          <p:cNvPr id="99" name="Picture 98" descr="2079225118868372105.jpg"/>
+          <p:cNvPr id="99" name="Picture 98" descr="252843138218541612.jpg"/>
           <p:cNvPicPr>
             <a:picLocks noChangeAspect="1"/>
           </p:cNvPicPr>
@@ -9144,7 +9144,7 @@
       </p:pic>
       <p:pic>
         <p:nvPicPr>
-          <p:cNvPr id="100" name="Picture 99" descr="8090461124433754861.jpg"/>
+          <p:cNvPr id="100" name="Picture 99" descr="7229374217175745115.jpg"/>
           <p:cNvPicPr>
             <a:picLocks noChangeAspect="1"/>
           </p:cNvPicPr>
@@ -9396,7 +9396,7 @@
             <a:avLst/>
           </a:prstGeom>
           <a:solidFill>
-            <a:srgbClr val="D39C48"/>
+            <a:srgbClr val="31662F"/>
           </a:solidFill>
           <a:ln>
             <a:noFill/>
@@ -9433,13 +9433,57 @@
         </p:nvSpPr>
         <p:spPr>
           <a:xfrm>
-            <a:off x="8518120" y="11231770"/>
-            <a:ext cx="92360" cy="92360"/>
+            <a:off x="7607858" y="10711146"/>
+            <a:ext cx="163897" cy="163897"/>
           </a:xfrm>
           <a:prstGeom prst="ellipse">
             <a:avLst/>
           </a:prstGeom>
           <a:solidFill>
+            <a:srgbClr val="31662F"/>
+          </a:solidFill>
+          <a:ln>
+            <a:noFill/>
+          </a:ln>
+          <a:effectLst/>
+        </p:spPr>
+        <p:style>
+          <a:lnRef idx="1">
+            <a:schemeClr val="accent1"/>
+          </a:lnRef>
+          <a:fillRef idx="3">
+            <a:schemeClr val="accent1"/>
+          </a:fillRef>
+          <a:effectRef idx="2">
+            <a:schemeClr val="accent1"/>
+          </a:effectRef>
+          <a:fontRef idx="minor">
+            <a:schemeClr val="lt1"/>
+          </a:fontRef>
+        </p:style>
+        <p:txBody>
+          <a:bodyPr rtlCol="0" anchor="ctr"/>
+          <a:lstStyle/>
+          <a:p>
+            <a:pPr algn="ctr"/>
+          </a:p>
+        </p:txBody>
+      </p:sp>
+      <p:sp>
+        <p:nvSpPr>
+          <p:cNvPr id="108" name="Oval 107"/>
+          <p:cNvSpPr/>
+          <p:nvPr/>
+        </p:nvSpPr>
+        <p:spPr>
+          <a:xfrm>
+            <a:off x="8958989" y="10557952"/>
+            <a:ext cx="109226" cy="109226"/>
+          </a:xfrm>
+          <a:prstGeom prst="ellipse">
+            <a:avLst/>
+          </a:prstGeom>
+          <a:solidFill>
             <a:srgbClr val="4C3634"/>
           </a:solidFill>
           <a:ln>
@@ -9471,19 +9515,195 @@
       </p:sp>
       <p:sp>
         <p:nvSpPr>
-          <p:cNvPr id="108" name="Oval 107"/>
-          <p:cNvSpPr/>
-          <p:nvPr/>
-        </p:nvSpPr>
-        <p:spPr>
-          <a:xfrm>
-            <a:off x="7751473" y="11142857"/>
-            <a:ext cx="182008" cy="182008"/>
+          <p:cNvPr id="109" name="Oval 108"/>
+          <p:cNvSpPr/>
+          <p:nvPr/>
+        </p:nvSpPr>
+        <p:spPr>
+          <a:xfrm>
+            <a:off x="8684747" y="11044544"/>
+            <a:ext cx="181214" cy="181214"/>
           </a:xfrm>
           <a:prstGeom prst="ellipse">
             <a:avLst/>
           </a:prstGeom>
           <a:solidFill>
+            <a:srgbClr val="4C3634"/>
+          </a:solidFill>
+          <a:ln>
+            <a:noFill/>
+          </a:ln>
+          <a:effectLst/>
+        </p:spPr>
+        <p:style>
+          <a:lnRef idx="1">
+            <a:schemeClr val="accent1"/>
+          </a:lnRef>
+          <a:fillRef idx="3">
+            <a:schemeClr val="accent1"/>
+          </a:fillRef>
+          <a:effectRef idx="2">
+            <a:schemeClr val="accent1"/>
+          </a:effectRef>
+          <a:fontRef idx="minor">
+            <a:schemeClr val="lt1"/>
+          </a:fontRef>
+        </p:style>
+        <p:txBody>
+          <a:bodyPr rtlCol="0" anchor="ctr"/>
+          <a:lstStyle/>
+          <a:p>
+            <a:pPr algn="ctr"/>
+          </a:p>
+        </p:txBody>
+      </p:sp>
+      <p:sp>
+        <p:nvSpPr>
+          <p:cNvPr id="110" name="Oval 109"/>
+          <p:cNvSpPr/>
+          <p:nvPr/>
+        </p:nvSpPr>
+        <p:spPr>
+          <a:xfrm>
+            <a:off x="3005715" y="11076203"/>
+            <a:ext cx="106625" cy="106625"/>
+          </a:xfrm>
+          <a:prstGeom prst="ellipse">
+            <a:avLst/>
+          </a:prstGeom>
+          <a:solidFill>
+            <a:srgbClr val="31662F"/>
+          </a:solidFill>
+          <a:ln>
+            <a:noFill/>
+          </a:ln>
+          <a:effectLst/>
+        </p:spPr>
+        <p:style>
+          <a:lnRef idx="1">
+            <a:schemeClr val="accent1"/>
+          </a:lnRef>
+          <a:fillRef idx="3">
+            <a:schemeClr val="accent1"/>
+          </a:fillRef>
+          <a:effectRef idx="2">
+            <a:schemeClr val="accent1"/>
+          </a:effectRef>
+          <a:fontRef idx="minor">
+            <a:schemeClr val="lt1"/>
+          </a:fontRef>
+        </p:style>
+        <p:txBody>
+          <a:bodyPr rtlCol="0" anchor="ctr"/>
+          <a:lstStyle/>
+          <a:p>
+            <a:pPr algn="ctr"/>
+          </a:p>
+        </p:txBody>
+      </p:sp>
+      <p:sp>
+        <p:nvSpPr>
+          <p:cNvPr id="111" name="Oval 110"/>
+          <p:cNvSpPr/>
+          <p:nvPr/>
+        </p:nvSpPr>
+        <p:spPr>
+          <a:xfrm>
+            <a:off x="8589509" y="10429218"/>
+            <a:ext cx="125415" cy="125415"/>
+          </a:xfrm>
+          <a:prstGeom prst="ellipse">
+            <a:avLst/>
+          </a:prstGeom>
+          <a:solidFill>
+            <a:srgbClr val="4C3634"/>
+          </a:solidFill>
+          <a:ln>
+            <a:noFill/>
+          </a:ln>
+          <a:effectLst/>
+        </p:spPr>
+        <p:style>
+          <a:lnRef idx="1">
+            <a:schemeClr val="accent1"/>
+          </a:lnRef>
+          <a:fillRef idx="3">
+            <a:schemeClr val="accent1"/>
+          </a:fillRef>
+          <a:effectRef idx="2">
+            <a:schemeClr val="accent1"/>
+          </a:effectRef>
+          <a:fontRef idx="minor">
+            <a:schemeClr val="lt1"/>
+          </a:fontRef>
+        </p:style>
+        <p:txBody>
+          <a:bodyPr rtlCol="0" anchor="ctr"/>
+          <a:lstStyle/>
+          <a:p>
+            <a:pPr algn="ctr"/>
+          </a:p>
+        </p:txBody>
+      </p:sp>
+      <p:sp>
+        <p:nvSpPr>
+          <p:cNvPr id="112" name="Oval 111"/>
+          <p:cNvSpPr/>
+          <p:nvPr/>
+        </p:nvSpPr>
+        <p:spPr>
+          <a:xfrm>
+            <a:off x="1679828" y="10585189"/>
+            <a:ext cx="162863" cy="162863"/>
+          </a:xfrm>
+          <a:prstGeom prst="ellipse">
+            <a:avLst/>
+          </a:prstGeom>
+          <a:solidFill>
+            <a:srgbClr val="31662F"/>
+          </a:solidFill>
+          <a:ln>
+            <a:noFill/>
+          </a:ln>
+          <a:effectLst/>
+        </p:spPr>
+        <p:style>
+          <a:lnRef idx="1">
+            <a:schemeClr val="accent1"/>
+          </a:lnRef>
+          <a:fillRef idx="3">
+            <a:schemeClr val="accent1"/>
+          </a:fillRef>
+          <a:effectRef idx="2">
+            <a:schemeClr val="accent1"/>
+          </a:effectRef>
+          <a:fontRef idx="minor">
+            <a:schemeClr val="lt1"/>
+          </a:fontRef>
+        </p:style>
+        <p:txBody>
+          <a:bodyPr rtlCol="0" anchor="ctr"/>
+          <a:lstStyle/>
+          <a:p>
+            <a:pPr algn="ctr"/>
+          </a:p>
+        </p:txBody>
+      </p:sp>
+      <p:sp>
+        <p:nvSpPr>
+          <p:cNvPr id="113" name="Oval 112"/>
+          <p:cNvSpPr/>
+          <p:nvPr/>
+        </p:nvSpPr>
+        <p:spPr>
+          <a:xfrm>
+            <a:off x="9379575" y="10385571"/>
+            <a:ext cx="165811" cy="165811"/>
+          </a:xfrm>
+          <a:prstGeom prst="ellipse">
+            <a:avLst/>
+          </a:prstGeom>
+          <a:solidFill>
             <a:srgbClr val="C09D7F"/>
           </a:solidFill>
           <a:ln>
@@ -9515,14 +9735,14 @@
       </p:sp>
       <p:sp>
         <p:nvSpPr>
-          <p:cNvPr id="109" name="Oval 108"/>
-          <p:cNvSpPr/>
-          <p:nvPr/>
-        </p:nvSpPr>
-        <p:spPr>
-          <a:xfrm>
-            <a:off x="6674655" y="11004361"/>
-            <a:ext cx="129914" cy="129914"/>
+          <p:cNvPr id="114" name="Oval 113"/>
+          <p:cNvSpPr/>
+          <p:nvPr/>
+        </p:nvSpPr>
+        <p:spPr>
+          <a:xfrm>
+            <a:off x="8738210" y="10556317"/>
+            <a:ext cx="86589" cy="86589"/>
           </a:xfrm>
           <a:prstGeom prst="ellipse">
             <a:avLst/>
@@ -9559,240 +9779,20 @@
       </p:sp>
       <p:sp>
         <p:nvSpPr>
-          <p:cNvPr id="110" name="Oval 109"/>
-          <p:cNvSpPr/>
-          <p:nvPr/>
-        </p:nvSpPr>
-        <p:spPr>
-          <a:xfrm>
-            <a:off x="7592650" y="11163529"/>
-            <a:ext cx="127272" cy="127272"/>
+          <p:cNvPr id="115" name="Oval 114"/>
+          <p:cNvSpPr/>
+          <p:nvPr/>
+        </p:nvSpPr>
+        <p:spPr>
+          <a:xfrm>
+            <a:off x="1624200" y="11168911"/>
+            <a:ext cx="138196" cy="138196"/>
           </a:xfrm>
           <a:prstGeom prst="ellipse">
             <a:avLst/>
           </a:prstGeom>
           <a:solidFill>
-            <a:srgbClr val="B1BCB1"/>
-          </a:solidFill>
-          <a:ln>
-            <a:noFill/>
-          </a:ln>
-          <a:effectLst/>
-        </p:spPr>
-        <p:style>
-          <a:lnRef idx="1">
-            <a:schemeClr val="accent1"/>
-          </a:lnRef>
-          <a:fillRef idx="3">
-            <a:schemeClr val="accent1"/>
-          </a:fillRef>
-          <a:effectRef idx="2">
-            <a:schemeClr val="accent1"/>
-          </a:effectRef>
-          <a:fontRef idx="minor">
-            <a:schemeClr val="lt1"/>
-          </a:fontRef>
-        </p:style>
-        <p:txBody>
-          <a:bodyPr rtlCol="0" anchor="ctr"/>
-          <a:lstStyle/>
-          <a:p>
-            <a:pPr algn="ctr"/>
-          </a:p>
-        </p:txBody>
-      </p:sp>
-      <p:sp>
-        <p:nvSpPr>
-          <p:cNvPr id="111" name="Oval 110"/>
-          <p:cNvSpPr/>
-          <p:nvPr/>
-        </p:nvSpPr>
-        <p:spPr>
-          <a:xfrm>
-            <a:off x="7937377" y="10553256"/>
-            <a:ext cx="178597" cy="178597"/>
-          </a:xfrm>
-          <a:prstGeom prst="ellipse">
-            <a:avLst/>
-          </a:prstGeom>
-          <a:solidFill>
             <a:srgbClr val="4C3634"/>
-          </a:solidFill>
-          <a:ln>
-            <a:noFill/>
-          </a:ln>
-          <a:effectLst/>
-        </p:spPr>
-        <p:style>
-          <a:lnRef idx="1">
-            <a:schemeClr val="accent1"/>
-          </a:lnRef>
-          <a:fillRef idx="3">
-            <a:schemeClr val="accent1"/>
-          </a:fillRef>
-          <a:effectRef idx="2">
-            <a:schemeClr val="accent1"/>
-          </a:effectRef>
-          <a:fontRef idx="minor">
-            <a:schemeClr val="lt1"/>
-          </a:fontRef>
-        </p:style>
-        <p:txBody>
-          <a:bodyPr rtlCol="0" anchor="ctr"/>
-          <a:lstStyle/>
-          <a:p>
-            <a:pPr algn="ctr"/>
-          </a:p>
-        </p:txBody>
-      </p:sp>
-      <p:sp>
-        <p:nvSpPr>
-          <p:cNvPr id="112" name="Oval 111"/>
-          <p:cNvSpPr/>
-          <p:nvPr/>
-        </p:nvSpPr>
-        <p:spPr>
-          <a:xfrm>
-            <a:off x="892431" y="10706990"/>
-            <a:ext cx="137244" cy="137244"/>
-          </a:xfrm>
-          <a:prstGeom prst="ellipse">
-            <a:avLst/>
-          </a:prstGeom>
-          <a:solidFill>
-            <a:srgbClr val="31662F"/>
-          </a:solidFill>
-          <a:ln>
-            <a:noFill/>
-          </a:ln>
-          <a:effectLst/>
-        </p:spPr>
-        <p:style>
-          <a:lnRef idx="1">
-            <a:schemeClr val="accent1"/>
-          </a:lnRef>
-          <a:fillRef idx="3">
-            <a:schemeClr val="accent1"/>
-          </a:fillRef>
-          <a:effectRef idx="2">
-            <a:schemeClr val="accent1"/>
-          </a:effectRef>
-          <a:fontRef idx="minor">
-            <a:schemeClr val="lt1"/>
-          </a:fontRef>
-        </p:style>
-        <p:txBody>
-          <a:bodyPr rtlCol="0" anchor="ctr"/>
-          <a:lstStyle/>
-          <a:p>
-            <a:pPr algn="ctr"/>
-          </a:p>
-        </p:txBody>
-      </p:sp>
-      <p:sp>
-        <p:nvSpPr>
-          <p:cNvPr id="113" name="Oval 112"/>
-          <p:cNvSpPr/>
-          <p:nvPr/>
-        </p:nvSpPr>
-        <p:spPr>
-          <a:xfrm>
-            <a:off x="2590787" y="11013386"/>
-            <a:ext cx="174860" cy="174860"/>
-          </a:xfrm>
-          <a:prstGeom prst="ellipse">
-            <a:avLst/>
-          </a:prstGeom>
-          <a:solidFill>
-            <a:srgbClr val="D39C48"/>
-          </a:solidFill>
-          <a:ln>
-            <a:noFill/>
-          </a:ln>
-          <a:effectLst/>
-        </p:spPr>
-        <p:style>
-          <a:lnRef idx="1">
-            <a:schemeClr val="accent1"/>
-          </a:lnRef>
-          <a:fillRef idx="3">
-            <a:schemeClr val="accent1"/>
-          </a:fillRef>
-          <a:effectRef idx="2">
-            <a:schemeClr val="accent1"/>
-          </a:effectRef>
-          <a:fontRef idx="minor">
-            <a:schemeClr val="lt1"/>
-          </a:fontRef>
-        </p:style>
-        <p:txBody>
-          <a:bodyPr rtlCol="0" anchor="ctr"/>
-          <a:lstStyle/>
-          <a:p>
-            <a:pPr algn="ctr"/>
-          </a:p>
-        </p:txBody>
-      </p:sp>
-      <p:sp>
-        <p:nvSpPr>
-          <p:cNvPr id="114" name="Oval 113"/>
-          <p:cNvSpPr/>
-          <p:nvPr/>
-        </p:nvSpPr>
-        <p:spPr>
-          <a:xfrm>
-            <a:off x="417167" y="11037500"/>
-            <a:ext cx="106435" cy="106435"/>
-          </a:xfrm>
-          <a:prstGeom prst="ellipse">
-            <a:avLst/>
-          </a:prstGeom>
-          <a:solidFill>
-            <a:srgbClr val="C09D7F"/>
-          </a:solidFill>
-          <a:ln>
-            <a:noFill/>
-          </a:ln>
-          <a:effectLst/>
-        </p:spPr>
-        <p:style>
-          <a:lnRef idx="1">
-            <a:schemeClr val="accent1"/>
-          </a:lnRef>
-          <a:fillRef idx="3">
-            <a:schemeClr val="accent1"/>
-          </a:fillRef>
-          <a:effectRef idx="2">
-            <a:schemeClr val="accent1"/>
-          </a:effectRef>
-          <a:fontRef idx="minor">
-            <a:schemeClr val="lt1"/>
-          </a:fontRef>
-        </p:style>
-        <p:txBody>
-          <a:bodyPr rtlCol="0" anchor="ctr"/>
-          <a:lstStyle/>
-          <a:p>
-            <a:pPr algn="ctr"/>
-          </a:p>
-        </p:txBody>
-      </p:sp>
-      <p:sp>
-        <p:nvSpPr>
-          <p:cNvPr id="115" name="Oval 114"/>
-          <p:cNvSpPr/>
-          <p:nvPr/>
-        </p:nvSpPr>
-        <p:spPr>
-          <a:xfrm>
-            <a:off x="3463407" y="11147324"/>
-            <a:ext cx="99679" cy="99679"/>
-          </a:xfrm>
-          <a:prstGeom prst="ellipse">
-            <a:avLst/>
-          </a:prstGeom>
-          <a:solidFill>
-            <a:srgbClr val="31662F"/>
           </a:solidFill>
           <a:ln>
             <a:noFill/>
@@ -13792,7 +13792,7 @@
             </a:pathLst>
           </a:custGeom>
           <a:solidFill>
-            <a:srgbClr val="D39C48"/>
+            <a:srgbClr val="31662F"/>
           </a:solidFill>
           <a:ln>
             <a:noFill/>
@@ -13854,7 +13854,7 @@
             </a:pathLst>
           </a:custGeom>
           <a:solidFill>
-            <a:srgbClr val="31662F"/>
+            <a:srgbClr val="C09D7F"/>
           </a:solidFill>
           <a:ln>
             <a:noFill/>
@@ -13916,7 +13916,7 @@
             </a:pathLst>
           </a:custGeom>
           <a:solidFill>
-            <a:srgbClr val="C09D7F"/>
+            <a:srgbClr val="B1BCB1"/>
           </a:solidFill>
           <a:ln>
             <a:noFill/>
@@ -13978,7 +13978,7 @@
             </a:pathLst>
           </a:custGeom>
           <a:solidFill>
-            <a:srgbClr val="B1BCB1"/>
+            <a:srgbClr val="4C3634"/>
           </a:solidFill>
           <a:ln>
             <a:noFill/>
@@ -14040,7 +14040,7 @@
             </a:pathLst>
           </a:custGeom>
           <a:solidFill>
-            <a:srgbClr val="4C3634"/>
+            <a:srgbClr val="31662F"/>
           </a:solidFill>
           <a:ln>
             <a:noFill/>
@@ -14102,7 +14102,7 @@
             </a:pathLst>
           </a:custGeom>
           <a:solidFill>
-            <a:srgbClr val="D39C48"/>
+            <a:srgbClr val="C09D7F"/>
           </a:solidFill>
           <a:ln>
             <a:noFill/>
@@ -14164,7 +14164,7 @@
             </a:pathLst>
           </a:custGeom>
           <a:solidFill>
-            <a:srgbClr val="31662F"/>
+            <a:srgbClr val="B1BCB1"/>
           </a:solidFill>
           <a:ln>
             <a:noFill/>
@@ -14195,7 +14195,7 @@
       </p:sp>
       <p:pic>
         <p:nvPicPr>
-          <p:cNvPr id="69" name="Picture 68" descr="8292637725921643480.jpg"/>
+          <p:cNvPr id="69" name="Picture 68" descr="894524731619023401.jpg"/>
           <p:cNvPicPr>
             <a:picLocks noChangeAspect="1"/>
           </p:cNvPicPr>
@@ -14209,24 +14209,70 @@
         </p:blipFill>
         <p:spPr>
           <a:xfrm>
-            <a:off x="957262" y="1809750"/>
-            <a:ext cx="1771650" cy="1771650"/>
-          </a:xfrm>
-          <a:prstGeom prst="ellipse">
+            <a:off x="457200" y="2190750"/>
+            <a:ext cx="2286000" cy="2286000"/>
+          </a:xfrm>
+          <a:prstGeom prst="rect">
             <a:avLst/>
           </a:prstGeom>
         </p:spPr>
       </p:pic>
       <p:sp>
         <p:nvSpPr>
-          <p:cNvPr id="70" name="TextBox 69"/>
+          <p:cNvPr id="70" name="Rectangle 69"/>
+          <p:cNvSpPr/>
+          <p:nvPr/>
+        </p:nvSpPr>
+        <p:spPr>
+          <a:xfrm>
+            <a:off x="457200" y="4057650"/>
+            <a:ext cx="2286000" cy="419100"/>
+          </a:xfrm>
+          <a:prstGeom prst="rect">
+            <a:avLst/>
+          </a:prstGeom>
+          <a:solidFill>
+            <a:srgbClr val="F3F1EA">
+              <a:alpha val="88000"/>
+            </a:srgbClr>
+          </a:solidFill>
+          <a:ln>
+            <a:noFill/>
+          </a:ln>
+          <a:effectLst/>
+        </p:spPr>
+        <p:style>
+          <a:lnRef idx="1">
+            <a:schemeClr val="accent1"/>
+          </a:lnRef>
+          <a:fillRef idx="3">
+            <a:schemeClr val="accent1"/>
+          </a:fillRef>
+          <a:effectRef idx="2">
+            <a:schemeClr val="accent1"/>
+          </a:effectRef>
+          <a:fontRef idx="minor">
+            <a:schemeClr val="lt1"/>
+          </a:fontRef>
+        </p:style>
+        <p:txBody>
+          <a:bodyPr rtlCol="0" anchor="ctr"/>
+          <a:lstStyle/>
+          <a:p>
+            <a:pPr algn="ctr"/>
+          </a:p>
+        </p:txBody>
+      </p:sp>
+      <p:sp>
+        <p:nvSpPr>
+          <p:cNvPr id="71" name="TextBox 70"/>
           <p:cNvSpPr txBox="1"/>
           <p:nvPr/>
         </p:nvSpPr>
         <p:spPr>
           <a:xfrm>
-            <a:off x="728662" y="3657600"/>
-            <a:ext cx="2228850" cy="285750"/>
+            <a:off x="514350" y="4057650"/>
+            <a:ext cx="2171700" cy="419100"/>
           </a:xfrm>
           <a:prstGeom prst="rect">
             <a:avLst/>
@@ -14234,7 +14280,7 @@
           <a:noFill/>
         </p:spPr>
         <p:txBody>
-          <a:bodyPr wrap="square" lIns="0" rIns="0" tIns="0" bIns="0" anchor="t">
+          <a:bodyPr wrap="square" lIns="0" rIns="0" tIns="0" bIns="0" anchor="ctr">
             <a:spAutoFit/>
           </a:bodyPr>
           <a:lstStyle/>
@@ -14245,7 +14291,7 @@
               </a:lnSpc>
             </a:pPr>
             <a:r>
-              <a:rPr sz="1700" b="1" i="0">
+              <a:rPr sz="1500" b="1" i="0">
                 <a:solidFill>
                   <a:srgbClr val="31662F"/>
                 </a:solidFill>
@@ -14258,7 +14304,7 @@
       </p:sp>
       <p:pic>
         <p:nvPicPr>
-          <p:cNvPr id="71" name="Picture 70" descr="5732349698021716200.jpg"/>
+          <p:cNvPr id="72" name="Picture 71" descr="7427239733233723794.jpg"/>
           <p:cNvPicPr>
             <a:picLocks noChangeAspect="1"/>
           </p:cNvPicPr>
@@ -14272,24 +14318,70 @@
         </p:blipFill>
         <p:spPr>
           <a:xfrm>
-            <a:off x="3157537" y="1809750"/>
-            <a:ext cx="1771650" cy="1771650"/>
-          </a:xfrm>
-          <a:prstGeom prst="ellipse">
+            <a:off x="2819400" y="2190750"/>
+            <a:ext cx="2286000" cy="2286000"/>
+          </a:xfrm>
+          <a:prstGeom prst="rect">
             <a:avLst/>
           </a:prstGeom>
         </p:spPr>
       </p:pic>
       <p:sp>
         <p:nvSpPr>
-          <p:cNvPr id="72" name="TextBox 71"/>
+          <p:cNvPr id="73" name="Rectangle 72"/>
+          <p:cNvSpPr/>
+          <p:nvPr/>
+        </p:nvSpPr>
+        <p:spPr>
+          <a:xfrm>
+            <a:off x="2819400" y="4057650"/>
+            <a:ext cx="2286000" cy="419100"/>
+          </a:xfrm>
+          <a:prstGeom prst="rect">
+            <a:avLst/>
+          </a:prstGeom>
+          <a:solidFill>
+            <a:srgbClr val="F3F1EA">
+              <a:alpha val="88000"/>
+            </a:srgbClr>
+          </a:solidFill>
+          <a:ln>
+            <a:noFill/>
+          </a:ln>
+          <a:effectLst/>
+        </p:spPr>
+        <p:style>
+          <a:lnRef idx="1">
+            <a:schemeClr val="accent1"/>
+          </a:lnRef>
+          <a:fillRef idx="3">
+            <a:schemeClr val="accent1"/>
+          </a:fillRef>
+          <a:effectRef idx="2">
+            <a:schemeClr val="accent1"/>
+          </a:effectRef>
+          <a:fontRef idx="minor">
+            <a:schemeClr val="lt1"/>
+          </a:fontRef>
+        </p:style>
+        <p:txBody>
+          <a:bodyPr rtlCol="0" anchor="ctr"/>
+          <a:lstStyle/>
+          <a:p>
+            <a:pPr algn="ctr"/>
+          </a:p>
+        </p:txBody>
+      </p:sp>
+      <p:sp>
+        <p:nvSpPr>
+          <p:cNvPr id="74" name="TextBox 73"/>
           <p:cNvSpPr txBox="1"/>
           <p:nvPr/>
         </p:nvSpPr>
         <p:spPr>
           <a:xfrm>
-            <a:off x="2928937" y="3657600"/>
-            <a:ext cx="2228850" cy="285750"/>
+            <a:off x="2876550" y="4057650"/>
+            <a:ext cx="2171700" cy="419100"/>
           </a:xfrm>
           <a:prstGeom prst="rect">
             <a:avLst/>
@@ -14297,7 +14389,7 @@
           <a:noFill/>
         </p:spPr>
         <p:txBody>
-          <a:bodyPr wrap="square" lIns="0" rIns="0" tIns="0" bIns="0" anchor="t">
+          <a:bodyPr wrap="square" lIns="0" rIns="0" tIns="0" bIns="0" anchor="ctr">
             <a:spAutoFit/>
           </a:bodyPr>
           <a:lstStyle/>
@@ -14308,7 +14400,7 @@
               </a:lnSpc>
             </a:pPr>
             <a:r>
-              <a:rPr sz="1700" b="1" i="0">
+              <a:rPr sz="1500" b="1" i="0">
                 <a:solidFill>
                   <a:srgbClr val="31662F"/>
                 </a:solidFill>
@@ -14321,7 +14413,7 @@
       </p:sp>
       <p:pic>
         <p:nvPicPr>
-          <p:cNvPr id="73" name="Picture 72" descr="733144165188241905.jpg"/>
+          <p:cNvPr id="75" name="Picture 74" descr="6023360388099870640.jpg"/>
           <p:cNvPicPr>
             <a:picLocks noChangeAspect="1"/>
           </p:cNvPicPr>
@@ -14335,24 +14427,70 @@
         </p:blipFill>
         <p:spPr>
           <a:xfrm>
-            <a:off x="5357812" y="1809750"/>
-            <a:ext cx="1771650" cy="1771650"/>
-          </a:xfrm>
-          <a:prstGeom prst="ellipse">
+            <a:off x="5181600" y="2190750"/>
+            <a:ext cx="2286000" cy="2286000"/>
+          </a:xfrm>
+          <a:prstGeom prst="rect">
             <a:avLst/>
           </a:prstGeom>
         </p:spPr>
       </p:pic>
       <p:sp>
         <p:nvSpPr>
-          <p:cNvPr id="74" name="TextBox 73"/>
+          <p:cNvPr id="76" name="Rectangle 75"/>
+          <p:cNvSpPr/>
+          <p:nvPr/>
+        </p:nvSpPr>
+        <p:spPr>
+          <a:xfrm>
+            <a:off x="5181600" y="4057650"/>
+            <a:ext cx="2286000" cy="419100"/>
+          </a:xfrm>
+          <a:prstGeom prst="rect">
+            <a:avLst/>
+          </a:prstGeom>
+          <a:solidFill>
+            <a:srgbClr val="F3F1EA">
+              <a:alpha val="88000"/>
+            </a:srgbClr>
+          </a:solidFill>
+          <a:ln>
+            <a:noFill/>
+          </a:ln>
+          <a:effectLst/>
+        </p:spPr>
+        <p:style>
+          <a:lnRef idx="1">
+            <a:schemeClr val="accent1"/>
+          </a:lnRef>
+          <a:fillRef idx="3">
+            <a:schemeClr val="accent1"/>
+          </a:fillRef>
+          <a:effectRef idx="2">
+            <a:schemeClr val="accent1"/>
+          </a:effectRef>
+          <a:fontRef idx="minor">
+            <a:schemeClr val="lt1"/>
+          </a:fontRef>
+        </p:style>
+        <p:txBody>
+          <a:bodyPr rtlCol="0" anchor="ctr"/>
+          <a:lstStyle/>
+          <a:p>
+            <a:pPr algn="ctr"/>
+          </a:p>
+        </p:txBody>
+      </p:sp>
+      <p:sp>
+        <p:nvSpPr>
+          <p:cNvPr id="77" name="TextBox 76"/>
           <p:cNvSpPr txBox="1"/>
           <p:nvPr/>
         </p:nvSpPr>
         <p:spPr>
           <a:xfrm>
-            <a:off x="5129212" y="3657600"/>
-            <a:ext cx="2228850" cy="285750"/>
+            <a:off x="5238750" y="4057650"/>
+            <a:ext cx="2171700" cy="419100"/>
           </a:xfrm>
           <a:prstGeom prst="rect">
             <a:avLst/>
@@ -14360,7 +14498,7 @@
           <a:noFill/>
         </p:spPr>
         <p:txBody>
-          <a:bodyPr wrap="square" lIns="0" rIns="0" tIns="0" bIns="0" anchor="t">
+          <a:bodyPr wrap="square" lIns="0" rIns="0" tIns="0" bIns="0" anchor="ctr">
             <a:spAutoFit/>
           </a:bodyPr>
           <a:lstStyle/>
@@ -14371,7 +14509,7 @@
               </a:lnSpc>
             </a:pPr>
             <a:r>
-              <a:rPr sz="1700" b="1" i="0">
+              <a:rPr sz="1500" b="1" i="0">
                 <a:solidFill>
                   <a:srgbClr val="31662F"/>
                 </a:solidFill>
@@ -14384,7 +14522,7 @@
       </p:sp>
       <p:pic>
         <p:nvPicPr>
-          <p:cNvPr id="75" name="Picture 74" descr="5683289555110150828.jpg"/>
+          <p:cNvPr id="78" name="Picture 77" descr="8080359357829165426.jpg"/>
           <p:cNvPicPr>
             <a:picLocks noChangeAspect="1"/>
           </p:cNvPicPr>
@@ -14398,24 +14536,70 @@
         </p:blipFill>
         <p:spPr>
           <a:xfrm>
-            <a:off x="7558087" y="1809750"/>
-            <a:ext cx="1771650" cy="1771650"/>
-          </a:xfrm>
-          <a:prstGeom prst="ellipse">
+            <a:off x="7543800" y="2190750"/>
+            <a:ext cx="2286000" cy="2286000"/>
+          </a:xfrm>
+          <a:prstGeom prst="rect">
             <a:avLst/>
           </a:prstGeom>
         </p:spPr>
       </p:pic>
       <p:sp>
         <p:nvSpPr>
-          <p:cNvPr id="76" name="TextBox 75"/>
+          <p:cNvPr id="79" name="Rectangle 78"/>
+          <p:cNvSpPr/>
+          <p:nvPr/>
+        </p:nvSpPr>
+        <p:spPr>
+          <a:xfrm>
+            <a:off x="7543800" y="4057650"/>
+            <a:ext cx="2286000" cy="419100"/>
+          </a:xfrm>
+          <a:prstGeom prst="rect">
+            <a:avLst/>
+          </a:prstGeom>
+          <a:solidFill>
+            <a:srgbClr val="F3F1EA">
+              <a:alpha val="88000"/>
+            </a:srgbClr>
+          </a:solidFill>
+          <a:ln>
+            <a:noFill/>
+          </a:ln>
+          <a:effectLst/>
+        </p:spPr>
+        <p:style>
+          <a:lnRef idx="1">
+            <a:schemeClr val="accent1"/>
+          </a:lnRef>
+          <a:fillRef idx="3">
+            <a:schemeClr val="accent1"/>
+          </a:fillRef>
+          <a:effectRef idx="2">
+            <a:schemeClr val="accent1"/>
+          </a:effectRef>
+          <a:fontRef idx="minor">
+            <a:schemeClr val="lt1"/>
+          </a:fontRef>
+        </p:style>
+        <p:txBody>
+          <a:bodyPr rtlCol="0" anchor="ctr"/>
+          <a:lstStyle/>
+          <a:p>
+            <a:pPr algn="ctr"/>
+          </a:p>
+        </p:txBody>
+      </p:sp>
+      <p:sp>
+        <p:nvSpPr>
+          <p:cNvPr id="80" name="TextBox 79"/>
           <p:cNvSpPr txBox="1"/>
           <p:nvPr/>
         </p:nvSpPr>
         <p:spPr>
           <a:xfrm>
-            <a:off x="7329487" y="3657600"/>
-            <a:ext cx="2228850" cy="285750"/>
+            <a:off x="7600950" y="4057650"/>
+            <a:ext cx="2171700" cy="419100"/>
           </a:xfrm>
           <a:prstGeom prst="rect">
             <a:avLst/>
@@ -14423,7 +14607,7 @@
           <a:noFill/>
         </p:spPr>
         <p:txBody>
-          <a:bodyPr wrap="square" lIns="0" rIns="0" tIns="0" bIns="0" anchor="t">
+          <a:bodyPr wrap="square" lIns="0" rIns="0" tIns="0" bIns="0" anchor="ctr">
             <a:spAutoFit/>
           </a:bodyPr>
           <a:lstStyle/>
@@ -14434,7 +14618,7 @@
               </a:lnSpc>
             </a:pPr>
             <a:r>
-              <a:rPr sz="1700" b="1" i="0">
+              <a:rPr sz="1500" b="1" i="0">
                 <a:solidFill>
                   <a:srgbClr val="31662F"/>
                 </a:solidFill>
@@ -14447,7 +14631,7 @@
       </p:sp>
       <p:pic>
         <p:nvPicPr>
-          <p:cNvPr id="77" name="Picture 76" descr="3010472654050716234.jpg"/>
+          <p:cNvPr id="81" name="Picture 80" descr="1974356426881197837.jpg"/>
           <p:cNvPicPr>
             <a:picLocks noChangeAspect="1"/>
           </p:cNvPicPr>
@@ -14461,24 +14645,70 @@
         </p:blipFill>
         <p:spPr>
           <a:xfrm>
-            <a:off x="957262" y="4476750"/>
-            <a:ext cx="1771650" cy="1771650"/>
-          </a:xfrm>
-          <a:prstGeom prst="ellipse">
+            <a:off x="457200" y="4552950"/>
+            <a:ext cx="2286000" cy="2286000"/>
+          </a:xfrm>
+          <a:prstGeom prst="rect">
             <a:avLst/>
           </a:prstGeom>
         </p:spPr>
       </p:pic>
       <p:sp>
         <p:nvSpPr>
-          <p:cNvPr id="78" name="TextBox 77"/>
+          <p:cNvPr id="82" name="Rectangle 81"/>
+          <p:cNvSpPr/>
+          <p:nvPr/>
+        </p:nvSpPr>
+        <p:spPr>
+          <a:xfrm>
+            <a:off x="457200" y="6419850"/>
+            <a:ext cx="2286000" cy="419100"/>
+          </a:xfrm>
+          <a:prstGeom prst="rect">
+            <a:avLst/>
+          </a:prstGeom>
+          <a:solidFill>
+            <a:srgbClr val="F3F1EA">
+              <a:alpha val="88000"/>
+            </a:srgbClr>
+          </a:solidFill>
+          <a:ln>
+            <a:noFill/>
+          </a:ln>
+          <a:effectLst/>
+        </p:spPr>
+        <p:style>
+          <a:lnRef idx="1">
+            <a:schemeClr val="accent1"/>
+          </a:lnRef>
+          <a:fillRef idx="3">
+            <a:schemeClr val="accent1"/>
+          </a:fillRef>
+          <a:effectRef idx="2">
+            <a:schemeClr val="accent1"/>
+          </a:effectRef>
+          <a:fontRef idx="minor">
+            <a:schemeClr val="lt1"/>
+          </a:fontRef>
+        </p:style>
+        <p:txBody>
+          <a:bodyPr rtlCol="0" anchor="ctr"/>
+          <a:lstStyle/>
+          <a:p>
+            <a:pPr algn="ctr"/>
+          </a:p>
+        </p:txBody>
+      </p:sp>
+      <p:sp>
+        <p:nvSpPr>
+          <p:cNvPr id="83" name="TextBox 82"/>
           <p:cNvSpPr txBox="1"/>
           <p:nvPr/>
         </p:nvSpPr>
         <p:spPr>
           <a:xfrm>
-            <a:off x="728662" y="6324600"/>
-            <a:ext cx="2228850" cy="285750"/>
+            <a:off x="514350" y="6419850"/>
+            <a:ext cx="2171700" cy="419100"/>
           </a:xfrm>
           <a:prstGeom prst="rect">
             <a:avLst/>
@@ -14486,7 +14716,7 @@
           <a:noFill/>
         </p:spPr>
         <p:txBody>
-          <a:bodyPr wrap="square" lIns="0" rIns="0" tIns="0" bIns="0" anchor="t">
+          <a:bodyPr wrap="square" lIns="0" rIns="0" tIns="0" bIns="0" anchor="ctr">
             <a:spAutoFit/>
           </a:bodyPr>
           <a:lstStyle/>
@@ -14497,7 +14727,7 @@
               </a:lnSpc>
             </a:pPr>
             <a:r>
-              <a:rPr sz="1700" b="1" i="0">
+              <a:rPr sz="1500" b="1" i="0">
                 <a:solidFill>
                   <a:srgbClr val="31662F"/>
                 </a:solidFill>
@@ -14510,7 +14740,7 @@
       </p:sp>
       <p:pic>
         <p:nvPicPr>
-          <p:cNvPr id="79" name="Picture 78" descr="8791358054545940456.jpg"/>
+          <p:cNvPr id="84" name="Picture 83" descr="3027816981463207685.jpg"/>
           <p:cNvPicPr>
             <a:picLocks noChangeAspect="1"/>
           </p:cNvPicPr>
@@ -14524,24 +14754,70 @@
         </p:blipFill>
         <p:spPr>
           <a:xfrm>
-            <a:off x="3157537" y="4476750"/>
-            <a:ext cx="1771650" cy="1771650"/>
-          </a:xfrm>
-          <a:prstGeom prst="ellipse">
+            <a:off x="2819400" y="4552950"/>
+            <a:ext cx="2286000" cy="2286000"/>
+          </a:xfrm>
+          <a:prstGeom prst="rect">
             <a:avLst/>
           </a:prstGeom>
         </p:spPr>
       </p:pic>
       <p:sp>
         <p:nvSpPr>
-          <p:cNvPr id="80" name="TextBox 79"/>
+          <p:cNvPr id="85" name="Rectangle 84"/>
+          <p:cNvSpPr/>
+          <p:nvPr/>
+        </p:nvSpPr>
+        <p:spPr>
+          <a:xfrm>
+            <a:off x="2819400" y="6419850"/>
+            <a:ext cx="2286000" cy="419100"/>
+          </a:xfrm>
+          <a:prstGeom prst="rect">
+            <a:avLst/>
+          </a:prstGeom>
+          <a:solidFill>
+            <a:srgbClr val="F3F1EA">
+              <a:alpha val="88000"/>
+            </a:srgbClr>
+          </a:solidFill>
+          <a:ln>
+            <a:noFill/>
+          </a:ln>
+          <a:effectLst/>
+        </p:spPr>
+        <p:style>
+          <a:lnRef idx="1">
+            <a:schemeClr val="accent1"/>
+          </a:lnRef>
+          <a:fillRef idx="3">
+            <a:schemeClr val="accent1"/>
+          </a:fillRef>
+          <a:effectRef idx="2">
+            <a:schemeClr val="accent1"/>
+          </a:effectRef>
+          <a:fontRef idx="minor">
+            <a:schemeClr val="lt1"/>
+          </a:fontRef>
+        </p:style>
+        <p:txBody>
+          <a:bodyPr rtlCol="0" anchor="ctr"/>
+          <a:lstStyle/>
+          <a:p>
+            <a:pPr algn="ctr"/>
+          </a:p>
+        </p:txBody>
+      </p:sp>
+      <p:sp>
+        <p:nvSpPr>
+          <p:cNvPr id="86" name="TextBox 85"/>
           <p:cNvSpPr txBox="1"/>
           <p:nvPr/>
         </p:nvSpPr>
         <p:spPr>
           <a:xfrm>
-            <a:off x="2928937" y="6324600"/>
-            <a:ext cx="2228850" cy="285750"/>
+            <a:off x="2876550" y="6419850"/>
+            <a:ext cx="2171700" cy="419100"/>
           </a:xfrm>
           <a:prstGeom prst="rect">
             <a:avLst/>
@@ -14549,7 +14825,7 @@
           <a:noFill/>
         </p:spPr>
         <p:txBody>
-          <a:bodyPr wrap="square" lIns="0" rIns="0" tIns="0" bIns="0" anchor="t">
+          <a:bodyPr wrap="square" lIns="0" rIns="0" tIns="0" bIns="0" anchor="ctr">
             <a:spAutoFit/>
           </a:bodyPr>
           <a:lstStyle/>
@@ -14560,7 +14836,7 @@
               </a:lnSpc>
             </a:pPr>
             <a:r>
-              <a:rPr sz="1700" b="1" i="0">
+              <a:rPr sz="1500" b="1" i="0">
                 <a:solidFill>
                   <a:srgbClr val="31662F"/>
                 </a:solidFill>
@@ -14573,7 +14849,7 @@
       </p:sp>
       <p:pic>
         <p:nvPicPr>
-          <p:cNvPr id="81" name="Picture 80" descr="661759691990722633.jpg"/>
+          <p:cNvPr id="87" name="Picture 86" descr="6422877592201863816.jpg"/>
           <p:cNvPicPr>
             <a:picLocks noChangeAspect="1"/>
           </p:cNvPicPr>
@@ -14587,24 +14863,70 @@
         </p:blipFill>
         <p:spPr>
           <a:xfrm>
-            <a:off x="5357812" y="4476750"/>
-            <a:ext cx="1771650" cy="1771650"/>
-          </a:xfrm>
-          <a:prstGeom prst="ellipse">
+            <a:off x="5181600" y="4552950"/>
+            <a:ext cx="2286000" cy="2286000"/>
+          </a:xfrm>
+          <a:prstGeom prst="rect">
             <a:avLst/>
           </a:prstGeom>
         </p:spPr>
       </p:pic>
       <p:sp>
         <p:nvSpPr>
-          <p:cNvPr id="82" name="TextBox 81"/>
+          <p:cNvPr id="88" name="Rectangle 87"/>
+          <p:cNvSpPr/>
+          <p:nvPr/>
+        </p:nvSpPr>
+        <p:spPr>
+          <a:xfrm>
+            <a:off x="5181600" y="6419850"/>
+            <a:ext cx="2286000" cy="419100"/>
+          </a:xfrm>
+          <a:prstGeom prst="rect">
+            <a:avLst/>
+          </a:prstGeom>
+          <a:solidFill>
+            <a:srgbClr val="F3F1EA">
+              <a:alpha val="88000"/>
+            </a:srgbClr>
+          </a:solidFill>
+          <a:ln>
+            <a:noFill/>
+          </a:ln>
+          <a:effectLst/>
+        </p:spPr>
+        <p:style>
+          <a:lnRef idx="1">
+            <a:schemeClr val="accent1"/>
+          </a:lnRef>
+          <a:fillRef idx="3">
+            <a:schemeClr val="accent1"/>
+          </a:fillRef>
+          <a:effectRef idx="2">
+            <a:schemeClr val="accent1"/>
+          </a:effectRef>
+          <a:fontRef idx="minor">
+            <a:schemeClr val="lt1"/>
+          </a:fontRef>
+        </p:style>
+        <p:txBody>
+          <a:bodyPr rtlCol="0" anchor="ctr"/>
+          <a:lstStyle/>
+          <a:p>
+            <a:pPr algn="ctr"/>
+          </a:p>
+        </p:txBody>
+      </p:sp>
+      <p:sp>
+        <p:nvSpPr>
+          <p:cNvPr id="89" name="TextBox 88"/>
           <p:cNvSpPr txBox="1"/>
           <p:nvPr/>
         </p:nvSpPr>
         <p:spPr>
           <a:xfrm>
-            <a:off x="5129212" y="6324600"/>
-            <a:ext cx="2228850" cy="285750"/>
+            <a:off x="5238750" y="6419850"/>
+            <a:ext cx="2171700" cy="419100"/>
           </a:xfrm>
           <a:prstGeom prst="rect">
             <a:avLst/>
@@ -14612,7 +14934,7 @@
           <a:noFill/>
         </p:spPr>
         <p:txBody>
-          <a:bodyPr wrap="square" lIns="0" rIns="0" tIns="0" bIns="0" anchor="t">
+          <a:bodyPr wrap="square" lIns="0" rIns="0" tIns="0" bIns="0" anchor="ctr">
             <a:spAutoFit/>
           </a:bodyPr>
           <a:lstStyle/>
@@ -14623,7 +14945,7 @@
               </a:lnSpc>
             </a:pPr>
             <a:r>
-              <a:rPr sz="1700" b="1" i="0">
+              <a:rPr sz="1500" b="1" i="0">
                 <a:solidFill>
                   <a:srgbClr val="31662F"/>
                 </a:solidFill>
@@ -14636,7 +14958,7 @@
       </p:sp>
       <p:pic>
         <p:nvPicPr>
-          <p:cNvPr id="83" name="Picture 82" descr="7387804828078656469.jpg"/>
+          <p:cNvPr id="90" name="Picture 89" descr="5196354255928742527.jpg"/>
           <p:cNvPicPr>
             <a:picLocks noChangeAspect="1"/>
           </p:cNvPicPr>
@@ -14650,24 +14972,70 @@
         </p:blipFill>
         <p:spPr>
           <a:xfrm>
-            <a:off x="7558087" y="4476750"/>
-            <a:ext cx="1771650" cy="1771650"/>
-          </a:xfrm>
-          <a:prstGeom prst="ellipse">
+            <a:off x="7543800" y="4552950"/>
+            <a:ext cx="2286000" cy="2286000"/>
+          </a:xfrm>
+          <a:prstGeom prst="rect">
             <a:avLst/>
           </a:prstGeom>
         </p:spPr>
       </p:pic>
       <p:sp>
         <p:nvSpPr>
-          <p:cNvPr id="84" name="TextBox 83"/>
+          <p:cNvPr id="91" name="Rectangle 90"/>
+          <p:cNvSpPr/>
+          <p:nvPr/>
+        </p:nvSpPr>
+        <p:spPr>
+          <a:xfrm>
+            <a:off x="7543800" y="6419850"/>
+            <a:ext cx="2286000" cy="419100"/>
+          </a:xfrm>
+          <a:prstGeom prst="rect">
+            <a:avLst/>
+          </a:prstGeom>
+          <a:solidFill>
+            <a:srgbClr val="F3F1EA">
+              <a:alpha val="88000"/>
+            </a:srgbClr>
+          </a:solidFill>
+          <a:ln>
+            <a:noFill/>
+          </a:ln>
+          <a:effectLst/>
+        </p:spPr>
+        <p:style>
+          <a:lnRef idx="1">
+            <a:schemeClr val="accent1"/>
+          </a:lnRef>
+          <a:fillRef idx="3">
+            <a:schemeClr val="accent1"/>
+          </a:fillRef>
+          <a:effectRef idx="2">
+            <a:schemeClr val="accent1"/>
+          </a:effectRef>
+          <a:fontRef idx="minor">
+            <a:schemeClr val="lt1"/>
+          </a:fontRef>
+        </p:style>
+        <p:txBody>
+          <a:bodyPr rtlCol="0" anchor="ctr"/>
+          <a:lstStyle/>
+          <a:p>
+            <a:pPr algn="ctr"/>
+          </a:p>
+        </p:txBody>
+      </p:sp>
+      <p:sp>
+        <p:nvSpPr>
+          <p:cNvPr id="92" name="TextBox 91"/>
           <p:cNvSpPr txBox="1"/>
           <p:nvPr/>
         </p:nvSpPr>
         <p:spPr>
           <a:xfrm>
-            <a:off x="7329487" y="6324600"/>
-            <a:ext cx="2228850" cy="285750"/>
+            <a:off x="7600950" y="6419850"/>
+            <a:ext cx="2171700" cy="419100"/>
           </a:xfrm>
           <a:prstGeom prst="rect">
             <a:avLst/>
@@ -14675,7 +15043,7 @@
           <a:noFill/>
         </p:spPr>
         <p:txBody>
-          <a:bodyPr wrap="square" lIns="0" rIns="0" tIns="0" bIns="0" anchor="t">
+          <a:bodyPr wrap="square" lIns="0" rIns="0" tIns="0" bIns="0" anchor="ctr">
             <a:spAutoFit/>
           </a:bodyPr>
           <a:lstStyle/>
@@ -14686,7 +15054,7 @@
               </a:lnSpc>
             </a:pPr>
             <a:r>
-              <a:rPr sz="1700" b="1" i="0">
+              <a:rPr sz="1500" b="1" i="0">
                 <a:solidFill>
                   <a:srgbClr val="31662F"/>
                 </a:solidFill>
@@ -14699,7 +15067,7 @@
       </p:sp>
       <p:pic>
         <p:nvPicPr>
-          <p:cNvPr id="85" name="Picture 84" descr="2961866993138332423.jpg"/>
+          <p:cNvPr id="93" name="Picture 92" descr="1839049045767413403.jpg"/>
           <p:cNvPicPr>
             <a:picLocks noChangeAspect="1"/>
           </p:cNvPicPr>
@@ -14713,24 +15081,70 @@
         </p:blipFill>
         <p:spPr>
           <a:xfrm>
-            <a:off x="957262" y="7143750"/>
-            <a:ext cx="1771650" cy="1771650"/>
-          </a:xfrm>
-          <a:prstGeom prst="ellipse">
+            <a:off x="457200" y="6915150"/>
+            <a:ext cx="2286000" cy="2286000"/>
+          </a:xfrm>
+          <a:prstGeom prst="rect">
             <a:avLst/>
           </a:prstGeom>
         </p:spPr>
       </p:pic>
       <p:sp>
         <p:nvSpPr>
-          <p:cNvPr id="86" name="TextBox 85"/>
+          <p:cNvPr id="94" name="Rectangle 93"/>
+          <p:cNvSpPr/>
+          <p:nvPr/>
+        </p:nvSpPr>
+        <p:spPr>
+          <a:xfrm>
+            <a:off x="457200" y="8782050"/>
+            <a:ext cx="2286000" cy="419100"/>
+          </a:xfrm>
+          <a:prstGeom prst="rect">
+            <a:avLst/>
+          </a:prstGeom>
+          <a:solidFill>
+            <a:srgbClr val="F3F1EA">
+              <a:alpha val="88000"/>
+            </a:srgbClr>
+          </a:solidFill>
+          <a:ln>
+            <a:noFill/>
+          </a:ln>
+          <a:effectLst/>
+        </p:spPr>
+        <p:style>
+          <a:lnRef idx="1">
+            <a:schemeClr val="accent1"/>
+          </a:lnRef>
+          <a:fillRef idx="3">
+            <a:schemeClr val="accent1"/>
+          </a:fillRef>
+          <a:effectRef idx="2">
+            <a:schemeClr val="accent1"/>
+          </a:effectRef>
+          <a:fontRef idx="minor">
+            <a:schemeClr val="lt1"/>
+          </a:fontRef>
+        </p:style>
+        <p:txBody>
+          <a:bodyPr rtlCol="0" anchor="ctr"/>
+          <a:lstStyle/>
+          <a:p>
+            <a:pPr algn="ctr"/>
+          </a:p>
+        </p:txBody>
+      </p:sp>
+      <p:sp>
+        <p:nvSpPr>
+          <p:cNvPr id="95" name="TextBox 94"/>
           <p:cNvSpPr txBox="1"/>
           <p:nvPr/>
         </p:nvSpPr>
         <p:spPr>
           <a:xfrm>
-            <a:off x="728662" y="8991600"/>
-            <a:ext cx="2228850" cy="285750"/>
+            <a:off x="514350" y="8782050"/>
+            <a:ext cx="2171700" cy="419100"/>
           </a:xfrm>
           <a:prstGeom prst="rect">
             <a:avLst/>
@@ -14738,7 +15152,7 @@
           <a:noFill/>
         </p:spPr>
         <p:txBody>
-          <a:bodyPr wrap="square" lIns="0" rIns="0" tIns="0" bIns="0" anchor="t">
+          <a:bodyPr wrap="square" lIns="0" rIns="0" tIns="0" bIns="0" anchor="ctr">
             <a:spAutoFit/>
           </a:bodyPr>
           <a:lstStyle/>
@@ -14749,7 +15163,7 @@
               </a:lnSpc>
             </a:pPr>
             <a:r>
-              <a:rPr sz="1700" b="1" i="0">
+              <a:rPr sz="1500" b="1" i="0">
                 <a:solidFill>
                   <a:srgbClr val="31662F"/>
                 </a:solidFill>
@@ -14762,7 +15176,7 @@
       </p:sp>
       <p:pic>
         <p:nvPicPr>
-          <p:cNvPr id="87" name="Picture 86" descr="6809488685346442368.jpg"/>
+          <p:cNvPr id="96" name="Picture 95" descr="3635735852169036292.jpg"/>
           <p:cNvPicPr>
             <a:picLocks noChangeAspect="1"/>
           </p:cNvPicPr>
@@ -14776,24 +15190,70 @@
         </p:blipFill>
         <p:spPr>
           <a:xfrm>
-            <a:off x="3157537" y="7143750"/>
-            <a:ext cx="1771650" cy="1771650"/>
-          </a:xfrm>
-          <a:prstGeom prst="ellipse">
+            <a:off x="2819400" y="6915150"/>
+            <a:ext cx="2286000" cy="2286000"/>
+          </a:xfrm>
+          <a:prstGeom prst="rect">
             <a:avLst/>
           </a:prstGeom>
         </p:spPr>
       </p:pic>
       <p:sp>
         <p:nvSpPr>
-          <p:cNvPr id="88" name="TextBox 87"/>
+          <p:cNvPr id="97" name="Rectangle 96"/>
+          <p:cNvSpPr/>
+          <p:nvPr/>
+        </p:nvSpPr>
+        <p:spPr>
+          <a:xfrm>
+            <a:off x="2819400" y="8782050"/>
+            <a:ext cx="2286000" cy="419100"/>
+          </a:xfrm>
+          <a:prstGeom prst="rect">
+            <a:avLst/>
+          </a:prstGeom>
+          <a:solidFill>
+            <a:srgbClr val="F3F1EA">
+              <a:alpha val="88000"/>
+            </a:srgbClr>
+          </a:solidFill>
+          <a:ln>
+            <a:noFill/>
+          </a:ln>
+          <a:effectLst/>
+        </p:spPr>
+        <p:style>
+          <a:lnRef idx="1">
+            <a:schemeClr val="accent1"/>
+          </a:lnRef>
+          <a:fillRef idx="3">
+            <a:schemeClr val="accent1"/>
+          </a:fillRef>
+          <a:effectRef idx="2">
+            <a:schemeClr val="accent1"/>
+          </a:effectRef>
+          <a:fontRef idx="minor">
+            <a:schemeClr val="lt1"/>
+          </a:fontRef>
+        </p:style>
+        <p:txBody>
+          <a:bodyPr rtlCol="0" anchor="ctr"/>
+          <a:lstStyle/>
+          <a:p>
+            <a:pPr algn="ctr"/>
+          </a:p>
+        </p:txBody>
+      </p:sp>
+      <p:sp>
+        <p:nvSpPr>
+          <p:cNvPr id="98" name="TextBox 97"/>
           <p:cNvSpPr txBox="1"/>
           <p:nvPr/>
         </p:nvSpPr>
         <p:spPr>
           <a:xfrm>
-            <a:off x="2928937" y="8991600"/>
-            <a:ext cx="2228850" cy="285750"/>
+            <a:off x="2876550" y="8782050"/>
+            <a:ext cx="2171700" cy="419100"/>
           </a:xfrm>
           <a:prstGeom prst="rect">
             <a:avLst/>
@@ -14801,7 +15261,7 @@
           <a:noFill/>
         </p:spPr>
         <p:txBody>
-          <a:bodyPr wrap="square" lIns="0" rIns="0" tIns="0" bIns="0" anchor="t">
+          <a:bodyPr wrap="square" lIns="0" rIns="0" tIns="0" bIns="0" anchor="ctr">
             <a:spAutoFit/>
           </a:bodyPr>
           <a:lstStyle/>
@@ -14812,7 +15272,7 @@
               </a:lnSpc>
             </a:pPr>
             <a:r>
-              <a:rPr sz="1700" b="1" i="0">
+              <a:rPr sz="1500" b="1" i="0">
                 <a:solidFill>
                   <a:srgbClr val="31662F"/>
                 </a:solidFill>
@@ -14825,7 +15285,7 @@
       </p:sp>
       <p:pic>
         <p:nvPicPr>
-          <p:cNvPr id="89" name="Picture 88" descr="5937392508917972994.jpg"/>
+          <p:cNvPr id="99" name="Picture 98" descr="5747755529844054742.jpg"/>
           <p:cNvPicPr>
             <a:picLocks noChangeAspect="1"/>
           </p:cNvPicPr>
@@ -14839,24 +15299,70 @@
         </p:blipFill>
         <p:spPr>
           <a:xfrm>
-            <a:off x="5357812" y="7143750"/>
-            <a:ext cx="1771650" cy="1771650"/>
-          </a:xfrm>
-          <a:prstGeom prst="ellipse">
+            <a:off x="5181600" y="6915150"/>
+            <a:ext cx="2286000" cy="2286000"/>
+          </a:xfrm>
+          <a:prstGeom prst="rect">
             <a:avLst/>
           </a:prstGeom>
         </p:spPr>
       </p:pic>
       <p:sp>
         <p:nvSpPr>
-          <p:cNvPr id="90" name="TextBox 89"/>
+          <p:cNvPr id="100" name="Rectangle 99"/>
+          <p:cNvSpPr/>
+          <p:nvPr/>
+        </p:nvSpPr>
+        <p:spPr>
+          <a:xfrm>
+            <a:off x="5181600" y="8782050"/>
+            <a:ext cx="2286000" cy="419100"/>
+          </a:xfrm>
+          <a:prstGeom prst="rect">
+            <a:avLst/>
+          </a:prstGeom>
+          <a:solidFill>
+            <a:srgbClr val="F3F1EA">
+              <a:alpha val="88000"/>
+            </a:srgbClr>
+          </a:solidFill>
+          <a:ln>
+            <a:noFill/>
+          </a:ln>
+          <a:effectLst/>
+        </p:spPr>
+        <p:style>
+          <a:lnRef idx="1">
+            <a:schemeClr val="accent1"/>
+          </a:lnRef>
+          <a:fillRef idx="3">
+            <a:schemeClr val="accent1"/>
+          </a:fillRef>
+          <a:effectRef idx="2">
+            <a:schemeClr val="accent1"/>
+          </a:effectRef>
+          <a:fontRef idx="minor">
+            <a:schemeClr val="lt1"/>
+          </a:fontRef>
+        </p:style>
+        <p:txBody>
+          <a:bodyPr rtlCol="0" anchor="ctr"/>
+          <a:lstStyle/>
+          <a:p>
+            <a:pPr algn="ctr"/>
+          </a:p>
+        </p:txBody>
+      </p:sp>
+      <p:sp>
+        <p:nvSpPr>
+          <p:cNvPr id="101" name="TextBox 100"/>
           <p:cNvSpPr txBox="1"/>
           <p:nvPr/>
         </p:nvSpPr>
         <p:spPr>
           <a:xfrm>
-            <a:off x="5129212" y="8991600"/>
-            <a:ext cx="2228850" cy="285750"/>
+            <a:off x="5238750" y="8782050"/>
+            <a:ext cx="2171700" cy="419100"/>
           </a:xfrm>
           <a:prstGeom prst="rect">
             <a:avLst/>
@@ -14864,7 +15370,7 @@
           <a:noFill/>
         </p:spPr>
         <p:txBody>
-          <a:bodyPr wrap="square" lIns="0" rIns="0" tIns="0" bIns="0" anchor="t">
+          <a:bodyPr wrap="square" lIns="0" rIns="0" tIns="0" bIns="0" anchor="ctr">
             <a:spAutoFit/>
           </a:bodyPr>
           <a:lstStyle/>
@@ -14875,7 +15381,7 @@
               </a:lnSpc>
             </a:pPr>
             <a:r>
-              <a:rPr sz="1700" b="1" i="0">
+              <a:rPr sz="1500" b="1" i="0">
                 <a:solidFill>
                   <a:srgbClr val="31662F"/>
                 </a:solidFill>
@@ -14888,7 +15394,7 @@
       </p:sp>
       <p:pic>
         <p:nvPicPr>
-          <p:cNvPr id="91" name="Picture 90" descr="7827157666468322458.jpg"/>
+          <p:cNvPr id="102" name="Picture 101" descr="8399190351064505002.jpg"/>
           <p:cNvPicPr>
             <a:picLocks noChangeAspect="1"/>
           </p:cNvPicPr>
@@ -14902,24 +15408,70 @@
         </p:blipFill>
         <p:spPr>
           <a:xfrm>
-            <a:off x="7558087" y="7143750"/>
-            <a:ext cx="1771650" cy="1771650"/>
-          </a:xfrm>
-          <a:prstGeom prst="ellipse">
+            <a:off x="7543800" y="6915150"/>
+            <a:ext cx="2286000" cy="2286000"/>
+          </a:xfrm>
+          <a:prstGeom prst="rect">
             <a:avLst/>
           </a:prstGeom>
         </p:spPr>
       </p:pic>
       <p:sp>
         <p:nvSpPr>
-          <p:cNvPr id="92" name="TextBox 91"/>
+          <p:cNvPr id="103" name="Rectangle 102"/>
+          <p:cNvSpPr/>
+          <p:nvPr/>
+        </p:nvSpPr>
+        <p:spPr>
+          <a:xfrm>
+            <a:off x="7543800" y="8782050"/>
+            <a:ext cx="2286000" cy="419100"/>
+          </a:xfrm>
+          <a:prstGeom prst="rect">
+            <a:avLst/>
+          </a:prstGeom>
+          <a:solidFill>
+            <a:srgbClr val="F3F1EA">
+              <a:alpha val="88000"/>
+            </a:srgbClr>
+          </a:solidFill>
+          <a:ln>
+            <a:noFill/>
+          </a:ln>
+          <a:effectLst/>
+        </p:spPr>
+        <p:style>
+          <a:lnRef idx="1">
+            <a:schemeClr val="accent1"/>
+          </a:lnRef>
+          <a:fillRef idx="3">
+            <a:schemeClr val="accent1"/>
+          </a:fillRef>
+          <a:effectRef idx="2">
+            <a:schemeClr val="accent1"/>
+          </a:effectRef>
+          <a:fontRef idx="minor">
+            <a:schemeClr val="lt1"/>
+          </a:fontRef>
+        </p:style>
+        <p:txBody>
+          <a:bodyPr rtlCol="0" anchor="ctr"/>
+          <a:lstStyle/>
+          <a:p>
+            <a:pPr algn="ctr"/>
+          </a:p>
+        </p:txBody>
+      </p:sp>
+      <p:sp>
+        <p:nvSpPr>
+          <p:cNvPr id="104" name="TextBox 103"/>
           <p:cNvSpPr txBox="1"/>
           <p:nvPr/>
         </p:nvSpPr>
         <p:spPr>
           <a:xfrm>
-            <a:off x="7329487" y="8991600"/>
-            <a:ext cx="2228850" cy="285750"/>
+            <a:off x="7600950" y="8782050"/>
+            <a:ext cx="2171700" cy="419100"/>
           </a:xfrm>
           <a:prstGeom prst="rect">
             <a:avLst/>
@@ -14927,7 +15479,7 @@
           <a:noFill/>
         </p:spPr>
         <p:txBody>
-          <a:bodyPr wrap="square" lIns="0" rIns="0" tIns="0" bIns="0" anchor="t">
+          <a:bodyPr wrap="square" lIns="0" rIns="0" tIns="0" bIns="0" anchor="ctr">
             <a:spAutoFit/>
           </a:bodyPr>
           <a:lstStyle/>
@@ -14938,7 +15490,7 @@
               </a:lnSpc>
             </a:pPr>
             <a:r>
-              <a:rPr sz="1700" b="1" i="0">
+              <a:rPr sz="1500" b="1" i="0">
                 <a:solidFill>
                   <a:srgbClr val="31662F"/>
                 </a:solidFill>
@@ -14951,7 +15503,7 @@
       </p:sp>
       <p:pic>
         <p:nvPicPr>
-          <p:cNvPr id="93" name="Picture 92" descr="5699392483089344317.jpg"/>
+          <p:cNvPr id="105" name="Picture 104" descr="5842563647999390999.jpg"/>
           <p:cNvPicPr>
             <a:picLocks noChangeAspect="1"/>
           </p:cNvPicPr>
@@ -14965,24 +15517,70 @@
         </p:blipFill>
         <p:spPr>
           <a:xfrm>
-            <a:off x="3157537" y="9810750"/>
-            <a:ext cx="1771650" cy="1771650"/>
-          </a:xfrm>
-          <a:prstGeom prst="ellipse">
+            <a:off x="457200" y="9277350"/>
+            <a:ext cx="2286000" cy="2286000"/>
+          </a:xfrm>
+          <a:prstGeom prst="rect">
             <a:avLst/>
           </a:prstGeom>
         </p:spPr>
       </p:pic>
       <p:sp>
         <p:nvSpPr>
-          <p:cNvPr id="94" name="TextBox 93"/>
+          <p:cNvPr id="106" name="Rectangle 105"/>
+          <p:cNvSpPr/>
+          <p:nvPr/>
+        </p:nvSpPr>
+        <p:spPr>
+          <a:xfrm>
+            <a:off x="457200" y="11144250"/>
+            <a:ext cx="2286000" cy="419100"/>
+          </a:xfrm>
+          <a:prstGeom prst="rect">
+            <a:avLst/>
+          </a:prstGeom>
+          <a:solidFill>
+            <a:srgbClr val="F3F1EA">
+              <a:alpha val="88000"/>
+            </a:srgbClr>
+          </a:solidFill>
+          <a:ln>
+            <a:noFill/>
+          </a:ln>
+          <a:effectLst/>
+        </p:spPr>
+        <p:style>
+          <a:lnRef idx="1">
+            <a:schemeClr val="accent1"/>
+          </a:lnRef>
+          <a:fillRef idx="3">
+            <a:schemeClr val="accent1"/>
+          </a:fillRef>
+          <a:effectRef idx="2">
+            <a:schemeClr val="accent1"/>
+          </a:effectRef>
+          <a:fontRef idx="minor">
+            <a:schemeClr val="lt1"/>
+          </a:fontRef>
+        </p:style>
+        <p:txBody>
+          <a:bodyPr rtlCol="0" anchor="ctr"/>
+          <a:lstStyle/>
+          <a:p>
+            <a:pPr algn="ctr"/>
+          </a:p>
+        </p:txBody>
+      </p:sp>
+      <p:sp>
+        <p:nvSpPr>
+          <p:cNvPr id="107" name="TextBox 106"/>
           <p:cNvSpPr txBox="1"/>
           <p:nvPr/>
         </p:nvSpPr>
         <p:spPr>
           <a:xfrm>
-            <a:off x="2928937" y="11658600"/>
-            <a:ext cx="2228850" cy="285750"/>
+            <a:off x="514350" y="11144250"/>
+            <a:ext cx="2171700" cy="419100"/>
           </a:xfrm>
           <a:prstGeom prst="rect">
             <a:avLst/>
@@ -14990,7 +15588,7 @@
           <a:noFill/>
         </p:spPr>
         <p:txBody>
-          <a:bodyPr wrap="square" lIns="0" rIns="0" tIns="0" bIns="0" anchor="t">
+          <a:bodyPr wrap="square" lIns="0" rIns="0" tIns="0" bIns="0" anchor="ctr">
             <a:spAutoFit/>
           </a:bodyPr>
           <a:lstStyle/>
@@ -15001,7 +15599,7 @@
               </a:lnSpc>
             </a:pPr>
             <a:r>
-              <a:rPr sz="1700" b="1" i="0">
+              <a:rPr sz="1500" b="1" i="0">
                 <a:solidFill>
                   <a:srgbClr val="31662F"/>
                 </a:solidFill>
@@ -15014,7 +15612,7 @@
       </p:sp>
       <p:pic>
         <p:nvPicPr>
-          <p:cNvPr id="95" name="Picture 94" descr="4970384966462082499.jpg"/>
+          <p:cNvPr id="108" name="Picture 107" descr="1503839733146406453.jpg"/>
           <p:cNvPicPr>
             <a:picLocks noChangeAspect="1"/>
           </p:cNvPicPr>
@@ -15028,24 +15626,70 @@
         </p:blipFill>
         <p:spPr>
           <a:xfrm>
-            <a:off x="5357812" y="9810750"/>
-            <a:ext cx="1771650" cy="1771650"/>
-          </a:xfrm>
-          <a:prstGeom prst="ellipse">
+            <a:off x="2819400" y="9277350"/>
+            <a:ext cx="2286000" cy="2286000"/>
+          </a:xfrm>
+          <a:prstGeom prst="rect">
             <a:avLst/>
           </a:prstGeom>
         </p:spPr>
       </p:pic>
       <p:sp>
         <p:nvSpPr>
-          <p:cNvPr id="96" name="TextBox 95"/>
+          <p:cNvPr id="109" name="Rectangle 108"/>
+          <p:cNvSpPr/>
+          <p:nvPr/>
+        </p:nvSpPr>
+        <p:spPr>
+          <a:xfrm>
+            <a:off x="2819400" y="11144250"/>
+            <a:ext cx="2286000" cy="419100"/>
+          </a:xfrm>
+          <a:prstGeom prst="rect">
+            <a:avLst/>
+          </a:prstGeom>
+          <a:solidFill>
+            <a:srgbClr val="F3F1EA">
+              <a:alpha val="88000"/>
+            </a:srgbClr>
+          </a:solidFill>
+          <a:ln>
+            <a:noFill/>
+          </a:ln>
+          <a:effectLst/>
+        </p:spPr>
+        <p:style>
+          <a:lnRef idx="1">
+            <a:schemeClr val="accent1"/>
+          </a:lnRef>
+          <a:fillRef idx="3">
+            <a:schemeClr val="accent1"/>
+          </a:fillRef>
+          <a:effectRef idx="2">
+            <a:schemeClr val="accent1"/>
+          </a:effectRef>
+          <a:fontRef idx="minor">
+            <a:schemeClr val="lt1"/>
+          </a:fontRef>
+        </p:style>
+        <p:txBody>
+          <a:bodyPr rtlCol="0" anchor="ctr"/>
+          <a:lstStyle/>
+          <a:p>
+            <a:pPr algn="ctr"/>
+          </a:p>
+        </p:txBody>
+      </p:sp>
+      <p:sp>
+        <p:nvSpPr>
+          <p:cNvPr id="110" name="TextBox 109"/>
           <p:cNvSpPr txBox="1"/>
           <p:nvPr/>
         </p:nvSpPr>
         <p:spPr>
           <a:xfrm>
-            <a:off x="5129212" y="11658600"/>
-            <a:ext cx="2228850" cy="285750"/>
+            <a:off x="2876550" y="11144250"/>
+            <a:ext cx="2171700" cy="419100"/>
           </a:xfrm>
           <a:prstGeom prst="rect">
             <a:avLst/>
@@ -15053,7 +15697,7 @@
           <a:noFill/>
         </p:spPr>
         <p:txBody>
-          <a:bodyPr wrap="square" lIns="0" rIns="0" tIns="0" bIns="0" anchor="t">
+          <a:bodyPr wrap="square" lIns="0" rIns="0" tIns="0" bIns="0" anchor="ctr">
             <a:spAutoFit/>
           </a:bodyPr>
           <a:lstStyle/>
@@ -15064,7 +15708,7 @@
               </a:lnSpc>
             </a:pPr>
             <a:r>
-              <a:rPr sz="1700" b="1" i="0">
+              <a:rPr sz="1500" b="1" i="0">
                 <a:solidFill>
                   <a:srgbClr val="31662F"/>
                 </a:solidFill>
@@ -15077,7 +15721,158 @@
       </p:sp>
       <p:sp>
         <p:nvSpPr>
-          <p:cNvPr id="97" name="TextBox 96"/>
+          <p:cNvPr id="111" name="Rectangle 110"/>
+          <p:cNvSpPr/>
+          <p:nvPr/>
+        </p:nvSpPr>
+        <p:spPr>
+          <a:xfrm>
+            <a:off x="5181600" y="9277350"/>
+            <a:ext cx="2286000" cy="2286000"/>
+          </a:xfrm>
+          <a:prstGeom prst="rect">
+            <a:avLst/>
+          </a:prstGeom>
+          <a:solidFill>
+            <a:srgbClr val="31662F"/>
+          </a:solidFill>
+          <a:ln>
+            <a:noFill/>
+          </a:ln>
+          <a:effectLst/>
+        </p:spPr>
+        <p:style>
+          <a:lnRef idx="1">
+            <a:schemeClr val="accent1"/>
+          </a:lnRef>
+          <a:fillRef idx="3">
+            <a:schemeClr val="accent1"/>
+          </a:fillRef>
+          <a:effectRef idx="2">
+            <a:schemeClr val="accent1"/>
+          </a:effectRef>
+          <a:fontRef idx="minor">
+            <a:schemeClr val="lt1"/>
+          </a:fontRef>
+        </p:style>
+        <p:txBody>
+          <a:bodyPr rtlCol="0" anchor="ctr"/>
+          <a:lstStyle/>
+          <a:p>
+            <a:pPr algn="ctr"/>
+          </a:p>
+        </p:txBody>
+      </p:sp>
+      <p:sp>
+        <p:nvSpPr>
+          <p:cNvPr id="112" name="TextBox 111"/>
+          <p:cNvSpPr txBox="1"/>
+          <p:nvPr/>
+        </p:nvSpPr>
+        <p:spPr>
+          <a:xfrm>
+            <a:off x="5353050" y="9277350"/>
+            <a:ext cx="1943100" cy="2286000"/>
+          </a:xfrm>
+          <a:prstGeom prst="rect">
+            <a:avLst/>
+          </a:prstGeom>
+          <a:noFill/>
+        </p:spPr>
+        <p:txBody>
+          <a:bodyPr wrap="square" lIns="0" rIns="0" tIns="0" bIns="0" anchor="ctr">
+            <a:spAutoFit/>
+          </a:bodyPr>
+          <a:lstStyle/>
+          <a:p>
+            <a:pPr algn="ctr">
+              <a:lnSpc>
+                <a:spcPct val="105000"/>
+              </a:lnSpc>
+            </a:pPr>
+            <a:r>
+              <a:rPr sz="2400" b="1" i="0">
+                <a:solidFill>
+                  <a:srgbClr val="F3F1EA"/>
+                </a:solidFill>
+                <a:latin typeface="Montserrat"/>
+              </a:rPr>
+              <a:t>Thank you, mentors!</a:t>
+            </a:r>
+          </a:p>
+        </p:txBody>
+      </p:sp>
+      <p:sp>
+        <p:nvSpPr>
+          <p:cNvPr id="113" name="Rectangle 112"/>
+          <p:cNvSpPr/>
+          <p:nvPr/>
+        </p:nvSpPr>
+        <p:spPr>
+          <a:xfrm>
+            <a:off x="7543800" y="9277350"/>
+            <a:ext cx="2286000" cy="2286000"/>
+          </a:xfrm>
+          <a:prstGeom prst="rect">
+            <a:avLst/>
+          </a:prstGeom>
+          <a:solidFill>
+            <a:srgbClr val="C09D7F"/>
+          </a:solidFill>
+          <a:ln>
+            <a:noFill/>
+          </a:ln>
+          <a:effectLst/>
+        </p:spPr>
+        <p:style>
+          <a:lnRef idx="1">
+            <a:schemeClr val="accent1"/>
+          </a:lnRef>
+          <a:fillRef idx="3">
+            <a:schemeClr val="accent1"/>
+          </a:fillRef>
+          <a:effectRef idx="2">
+            <a:schemeClr val="accent1"/>
+          </a:effectRef>
+          <a:fontRef idx="minor">
+            <a:schemeClr val="lt1"/>
+          </a:fontRef>
+        </p:style>
+        <p:txBody>
+          <a:bodyPr rtlCol="0" anchor="ctr"/>
+          <a:lstStyle/>
+          <a:p>
+            <a:pPr algn="ctr"/>
+          </a:p>
+        </p:txBody>
+      </p:sp>
+      <p:pic>
+        <p:nvPicPr>
+          <p:cNvPr id="114" name="Picture 113" descr="foundation-logo-white.png"/>
+          <p:cNvPicPr>
+            <a:picLocks noChangeAspect="1"/>
+          </p:cNvPicPr>
+          <p:nvPr/>
+        </p:nvPicPr>
+        <p:blipFill>
+          <a:blip r:embed="rId17"/>
+          <a:stretch>
+            <a:fillRect/>
+          </a:stretch>
+        </p:blipFill>
+        <p:spPr>
+          <a:xfrm>
+            <a:off x="8020050" y="9820903"/>
+            <a:ext cx="1333500" cy="1198893"/>
+          </a:xfrm>
+          <a:prstGeom prst="rect">
+            <a:avLst/>
+          </a:prstGeom>
+        </p:spPr>
+      </p:pic>
+      <p:sp>
+        <p:nvSpPr>
+          <p:cNvPr id="115" name="TextBox 114"/>
           <p:cNvSpPr txBox="1"/>
           <p:nvPr/>
         </p:nvSpPr>

--- a/templates/posts/october/05-10-2026-mon-ig-teachers-day-option-2-bunting.pptx
+++ b/templates/posts/october/05-10-2026-mon-ig-teachers-day-option-2-bunting.pptx
@@ -503,7 +503,7 @@
           <a:lstStyle/>
           <a:p>
             <a:r>
-              <a:t>Option 2, slide 1: drawn bunting and confetti (PowerPoint shapes), five mentor faces. Mentor photos: Linnea's Drive folder (5 Oct 2026) and assets/mentors-teachers-day/; written consent per the folder README.</a:t>
+              <a:t>Option 2, slide 1: drawn bunting and confetti (PowerPoint shapes). Mentor photos: Linnea's Drive folder (5 Oct 2026) and assets/mentors-teachers-day/; written consent per the folder README.</a:t>
             </a:r>
           </a:p>
         </p:txBody>
@@ -9046,129 +9046,1329 @@
           </a:p>
         </p:txBody>
       </p:sp>
-      <p:pic>
-        <p:nvPicPr>
-          <p:cNvPr id="96" name="Picture 95" descr="5400735994492257660.jpg"/>
-          <p:cNvPicPr>
-            <a:picLocks noChangeAspect="1"/>
-          </p:cNvPicPr>
-          <p:nvPr/>
-        </p:nvPicPr>
-        <p:blipFill>
-          <a:blip r:embed="rId3"/>
-          <a:stretch>
-            <a:fillRect/>
-          </a:stretch>
-        </p:blipFill>
-        <p:spPr>
-          <a:xfrm>
-            <a:off x="714375" y="7810500"/>
-            <a:ext cx="1619250" cy="1619250"/>
+      <p:sp>
+        <p:nvSpPr>
+          <p:cNvPr id="96" name="Oval 95"/>
+          <p:cNvSpPr/>
+          <p:nvPr/>
+        </p:nvSpPr>
+        <p:spPr>
+          <a:xfrm>
+            <a:off x="1920720" y="8743505"/>
+            <a:ext cx="152257" cy="152257"/>
           </a:xfrm>
           <a:prstGeom prst="ellipse">
             <a:avLst/>
           </a:prstGeom>
-        </p:spPr>
-      </p:pic>
-      <p:pic>
-        <p:nvPicPr>
-          <p:cNvPr id="97" name="Picture 96" descr="3801524672074236264.jpg"/>
-          <p:cNvPicPr>
-            <a:picLocks noChangeAspect="1"/>
-          </p:cNvPicPr>
-          <p:nvPr/>
-        </p:nvPicPr>
-        <p:blipFill>
-          <a:blip r:embed="rId4"/>
-          <a:stretch>
-            <a:fillRect/>
-          </a:stretch>
-        </p:blipFill>
-        <p:spPr>
-          <a:xfrm>
-            <a:off x="2524125" y="7810500"/>
-            <a:ext cx="1619250" cy="1619250"/>
+          <a:solidFill>
+            <a:srgbClr val="4C3634"/>
+          </a:solidFill>
+          <a:ln>
+            <a:noFill/>
+          </a:ln>
+          <a:effectLst/>
+        </p:spPr>
+        <p:style>
+          <a:lnRef idx="1">
+            <a:schemeClr val="accent1"/>
+          </a:lnRef>
+          <a:fillRef idx="3">
+            <a:schemeClr val="accent1"/>
+          </a:fillRef>
+          <a:effectRef idx="2">
+            <a:schemeClr val="accent1"/>
+          </a:effectRef>
+          <a:fontRef idx="minor">
+            <a:schemeClr val="lt1"/>
+          </a:fontRef>
+        </p:style>
+        <p:txBody>
+          <a:bodyPr rtlCol="0" anchor="ctr"/>
+          <a:lstStyle/>
+          <a:p>
+            <a:pPr algn="ctr"/>
+          </a:p>
+        </p:txBody>
+      </p:sp>
+      <p:sp>
+        <p:nvSpPr>
+          <p:cNvPr id="97" name="Oval 96"/>
+          <p:cNvSpPr/>
+          <p:nvPr/>
+        </p:nvSpPr>
+        <p:spPr>
+          <a:xfrm>
+            <a:off x="8252583" y="9314918"/>
+            <a:ext cx="135456" cy="135456"/>
           </a:xfrm>
           <a:prstGeom prst="ellipse">
             <a:avLst/>
           </a:prstGeom>
-        </p:spPr>
-      </p:pic>
-      <p:pic>
-        <p:nvPicPr>
-          <p:cNvPr id="98" name="Picture 97" descr="3725674984251627259.jpg"/>
-          <p:cNvPicPr>
-            <a:picLocks noChangeAspect="1"/>
-          </p:cNvPicPr>
-          <p:nvPr/>
-        </p:nvPicPr>
-        <p:blipFill>
-          <a:blip r:embed="rId5"/>
-          <a:stretch>
-            <a:fillRect/>
-          </a:stretch>
-        </p:blipFill>
-        <p:spPr>
-          <a:xfrm>
-            <a:off x="4333875" y="7810500"/>
-            <a:ext cx="1619250" cy="1619250"/>
+          <a:solidFill>
+            <a:srgbClr val="C09D7F"/>
+          </a:solidFill>
+          <a:ln>
+            <a:noFill/>
+          </a:ln>
+          <a:effectLst/>
+        </p:spPr>
+        <p:style>
+          <a:lnRef idx="1">
+            <a:schemeClr val="accent1"/>
+          </a:lnRef>
+          <a:fillRef idx="3">
+            <a:schemeClr val="accent1"/>
+          </a:fillRef>
+          <a:effectRef idx="2">
+            <a:schemeClr val="accent1"/>
+          </a:effectRef>
+          <a:fontRef idx="minor">
+            <a:schemeClr val="lt1"/>
+          </a:fontRef>
+        </p:style>
+        <p:txBody>
+          <a:bodyPr rtlCol="0" anchor="ctr"/>
+          <a:lstStyle/>
+          <a:p>
+            <a:pPr algn="ctr"/>
+          </a:p>
+        </p:txBody>
+      </p:sp>
+      <p:sp>
+        <p:nvSpPr>
+          <p:cNvPr id="98" name="Oval 97"/>
+          <p:cNvSpPr/>
+          <p:nvPr/>
+        </p:nvSpPr>
+        <p:spPr>
+          <a:xfrm>
+            <a:off x="5095708" y="7879187"/>
+            <a:ext cx="86058" cy="86058"/>
           </a:xfrm>
           <a:prstGeom prst="ellipse">
             <a:avLst/>
           </a:prstGeom>
-        </p:spPr>
-      </p:pic>
-      <p:pic>
-        <p:nvPicPr>
-          <p:cNvPr id="99" name="Picture 98" descr="252843138218541612.jpg"/>
-          <p:cNvPicPr>
-            <a:picLocks noChangeAspect="1"/>
-          </p:cNvPicPr>
-          <p:nvPr/>
-        </p:nvPicPr>
-        <p:blipFill>
-          <a:blip r:embed="rId6"/>
-          <a:stretch>
-            <a:fillRect/>
-          </a:stretch>
-        </p:blipFill>
-        <p:spPr>
-          <a:xfrm>
-            <a:off x="6143625" y="7810500"/>
-            <a:ext cx="1619250" cy="1619250"/>
+          <a:solidFill>
+            <a:srgbClr val="B1BCB1"/>
+          </a:solidFill>
+          <a:ln>
+            <a:noFill/>
+          </a:ln>
+          <a:effectLst/>
+        </p:spPr>
+        <p:style>
+          <a:lnRef idx="1">
+            <a:schemeClr val="accent1"/>
+          </a:lnRef>
+          <a:fillRef idx="3">
+            <a:schemeClr val="accent1"/>
+          </a:fillRef>
+          <a:effectRef idx="2">
+            <a:schemeClr val="accent1"/>
+          </a:effectRef>
+          <a:fontRef idx="minor">
+            <a:schemeClr val="lt1"/>
+          </a:fontRef>
+        </p:style>
+        <p:txBody>
+          <a:bodyPr rtlCol="0" anchor="ctr"/>
+          <a:lstStyle/>
+          <a:p>
+            <a:pPr algn="ctr"/>
+          </a:p>
+        </p:txBody>
+      </p:sp>
+      <p:sp>
+        <p:nvSpPr>
+          <p:cNvPr id="99" name="Oval 98"/>
+          <p:cNvSpPr/>
+          <p:nvPr/>
+        </p:nvSpPr>
+        <p:spPr>
+          <a:xfrm>
+            <a:off x="9088017" y="8245204"/>
+            <a:ext cx="100909" cy="100909"/>
           </a:xfrm>
           <a:prstGeom prst="ellipse">
             <a:avLst/>
           </a:prstGeom>
-        </p:spPr>
-      </p:pic>
-      <p:pic>
-        <p:nvPicPr>
-          <p:cNvPr id="100" name="Picture 99" descr="7229374217175745115.jpg"/>
-          <p:cNvPicPr>
-            <a:picLocks noChangeAspect="1"/>
-          </p:cNvPicPr>
-          <p:nvPr/>
-        </p:nvPicPr>
-        <p:blipFill>
-          <a:blip r:embed="rId7"/>
-          <a:stretch>
-            <a:fillRect/>
-          </a:stretch>
-        </p:blipFill>
-        <p:spPr>
-          <a:xfrm>
-            <a:off x="7953375" y="7810500"/>
-            <a:ext cx="1619250" cy="1619250"/>
+          <a:solidFill>
+            <a:srgbClr val="C09D7F"/>
+          </a:solidFill>
+          <a:ln>
+            <a:noFill/>
+          </a:ln>
+          <a:effectLst/>
+        </p:spPr>
+        <p:style>
+          <a:lnRef idx="1">
+            <a:schemeClr val="accent1"/>
+          </a:lnRef>
+          <a:fillRef idx="3">
+            <a:schemeClr val="accent1"/>
+          </a:fillRef>
+          <a:effectRef idx="2">
+            <a:schemeClr val="accent1"/>
+          </a:effectRef>
+          <a:fontRef idx="minor">
+            <a:schemeClr val="lt1"/>
+          </a:fontRef>
+        </p:style>
+        <p:txBody>
+          <a:bodyPr rtlCol="0" anchor="ctr"/>
+          <a:lstStyle/>
+          <a:p>
+            <a:pPr algn="ctr"/>
+          </a:p>
+        </p:txBody>
+      </p:sp>
+      <p:sp>
+        <p:nvSpPr>
+          <p:cNvPr id="100" name="Oval 99"/>
+          <p:cNvSpPr/>
+          <p:nvPr/>
+        </p:nvSpPr>
+        <p:spPr>
+          <a:xfrm>
+            <a:off x="8982695" y="8751414"/>
+            <a:ext cx="131496" cy="131496"/>
           </a:xfrm>
           <a:prstGeom prst="ellipse">
             <a:avLst/>
           </a:prstGeom>
-        </p:spPr>
-      </p:pic>
-      <p:sp>
-        <p:nvSpPr>
-          <p:cNvPr id="101" name="TextBox 100"/>
+          <a:solidFill>
+            <a:srgbClr val="4C3634"/>
+          </a:solidFill>
+          <a:ln>
+            <a:noFill/>
+          </a:ln>
+          <a:effectLst/>
+        </p:spPr>
+        <p:style>
+          <a:lnRef idx="1">
+            <a:schemeClr val="accent1"/>
+          </a:lnRef>
+          <a:fillRef idx="3">
+            <a:schemeClr val="accent1"/>
+          </a:fillRef>
+          <a:effectRef idx="2">
+            <a:schemeClr val="accent1"/>
+          </a:effectRef>
+          <a:fontRef idx="minor">
+            <a:schemeClr val="lt1"/>
+          </a:fontRef>
+        </p:style>
+        <p:txBody>
+          <a:bodyPr rtlCol="0" anchor="ctr"/>
+          <a:lstStyle/>
+          <a:p>
+            <a:pPr algn="ctr"/>
+          </a:p>
+        </p:txBody>
+      </p:sp>
+      <p:sp>
+        <p:nvSpPr>
+          <p:cNvPr id="101" name="Oval 100"/>
+          <p:cNvSpPr/>
+          <p:nvPr/>
+        </p:nvSpPr>
+        <p:spPr>
+          <a:xfrm>
+            <a:off x="6130026" y="7494403"/>
+            <a:ext cx="120188" cy="120188"/>
+          </a:xfrm>
+          <a:prstGeom prst="ellipse">
+            <a:avLst/>
+          </a:prstGeom>
+          <a:solidFill>
+            <a:srgbClr val="4C3634"/>
+          </a:solidFill>
+          <a:ln>
+            <a:noFill/>
+          </a:ln>
+          <a:effectLst/>
+        </p:spPr>
+        <p:style>
+          <a:lnRef idx="1">
+            <a:schemeClr val="accent1"/>
+          </a:lnRef>
+          <a:fillRef idx="3">
+            <a:schemeClr val="accent1"/>
+          </a:fillRef>
+          <a:effectRef idx="2">
+            <a:schemeClr val="accent1"/>
+          </a:effectRef>
+          <a:fontRef idx="minor">
+            <a:schemeClr val="lt1"/>
+          </a:fontRef>
+        </p:style>
+        <p:txBody>
+          <a:bodyPr rtlCol="0" anchor="ctr"/>
+          <a:lstStyle/>
+          <a:p>
+            <a:pPr algn="ctr"/>
+          </a:p>
+        </p:txBody>
+      </p:sp>
+      <p:sp>
+        <p:nvSpPr>
+          <p:cNvPr id="102" name="Oval 101"/>
+          <p:cNvSpPr/>
+          <p:nvPr/>
+        </p:nvSpPr>
+        <p:spPr>
+          <a:xfrm>
+            <a:off x="6858353" y="8665494"/>
+            <a:ext cx="183994" cy="183994"/>
+          </a:xfrm>
+          <a:prstGeom prst="ellipse">
+            <a:avLst/>
+          </a:prstGeom>
+          <a:solidFill>
+            <a:srgbClr val="31662F"/>
+          </a:solidFill>
+          <a:ln>
+            <a:noFill/>
+          </a:ln>
+          <a:effectLst/>
+        </p:spPr>
+        <p:style>
+          <a:lnRef idx="1">
+            <a:schemeClr val="accent1"/>
+          </a:lnRef>
+          <a:fillRef idx="3">
+            <a:schemeClr val="accent1"/>
+          </a:fillRef>
+          <a:effectRef idx="2">
+            <a:schemeClr val="accent1"/>
+          </a:effectRef>
+          <a:fontRef idx="minor">
+            <a:schemeClr val="lt1"/>
+          </a:fontRef>
+        </p:style>
+        <p:txBody>
+          <a:bodyPr rtlCol="0" anchor="ctr"/>
+          <a:lstStyle/>
+          <a:p>
+            <a:pPr algn="ctr"/>
+          </a:p>
+        </p:txBody>
+      </p:sp>
+      <p:sp>
+        <p:nvSpPr>
+          <p:cNvPr id="103" name="Oval 102"/>
+          <p:cNvSpPr/>
+          <p:nvPr/>
+        </p:nvSpPr>
+        <p:spPr>
+          <a:xfrm>
+            <a:off x="1826102" y="8986855"/>
+            <a:ext cx="98808" cy="98808"/>
+          </a:xfrm>
+          <a:prstGeom prst="ellipse">
+            <a:avLst/>
+          </a:prstGeom>
+          <a:solidFill>
+            <a:srgbClr val="31662F"/>
+          </a:solidFill>
+          <a:ln>
+            <a:noFill/>
+          </a:ln>
+          <a:effectLst/>
+        </p:spPr>
+        <p:style>
+          <a:lnRef idx="1">
+            <a:schemeClr val="accent1"/>
+          </a:lnRef>
+          <a:fillRef idx="3">
+            <a:schemeClr val="accent1"/>
+          </a:fillRef>
+          <a:effectRef idx="2">
+            <a:schemeClr val="accent1"/>
+          </a:effectRef>
+          <a:fontRef idx="minor">
+            <a:schemeClr val="lt1"/>
+          </a:fontRef>
+        </p:style>
+        <p:txBody>
+          <a:bodyPr rtlCol="0" anchor="ctr"/>
+          <a:lstStyle/>
+          <a:p>
+            <a:pPr algn="ctr"/>
+          </a:p>
+        </p:txBody>
+      </p:sp>
+      <p:sp>
+        <p:nvSpPr>
+          <p:cNvPr id="104" name="Oval 103"/>
+          <p:cNvSpPr/>
+          <p:nvPr/>
+        </p:nvSpPr>
+        <p:spPr>
+          <a:xfrm>
+            <a:off x="4610719" y="8481065"/>
+            <a:ext cx="121654" cy="121654"/>
+          </a:xfrm>
+          <a:prstGeom prst="ellipse">
+            <a:avLst/>
+          </a:prstGeom>
+          <a:solidFill>
+            <a:srgbClr val="4C3634"/>
+          </a:solidFill>
+          <a:ln>
+            <a:noFill/>
+          </a:ln>
+          <a:effectLst/>
+        </p:spPr>
+        <p:style>
+          <a:lnRef idx="1">
+            <a:schemeClr val="accent1"/>
+          </a:lnRef>
+          <a:fillRef idx="3">
+            <a:schemeClr val="accent1"/>
+          </a:fillRef>
+          <a:effectRef idx="2">
+            <a:schemeClr val="accent1"/>
+          </a:effectRef>
+          <a:fontRef idx="minor">
+            <a:schemeClr val="lt1"/>
+          </a:fontRef>
+        </p:style>
+        <p:txBody>
+          <a:bodyPr rtlCol="0" anchor="ctr"/>
+          <a:lstStyle/>
+          <a:p>
+            <a:pPr algn="ctr"/>
+          </a:p>
+        </p:txBody>
+      </p:sp>
+      <p:sp>
+        <p:nvSpPr>
+          <p:cNvPr id="105" name="Oval 104"/>
+          <p:cNvSpPr/>
+          <p:nvPr/>
+        </p:nvSpPr>
+        <p:spPr>
+          <a:xfrm>
+            <a:off x="1791420" y="8696530"/>
+            <a:ext cx="134963" cy="134963"/>
+          </a:xfrm>
+          <a:prstGeom prst="ellipse">
+            <a:avLst/>
+          </a:prstGeom>
+          <a:solidFill>
+            <a:srgbClr val="C09D7F"/>
+          </a:solidFill>
+          <a:ln>
+            <a:noFill/>
+          </a:ln>
+          <a:effectLst/>
+        </p:spPr>
+        <p:style>
+          <a:lnRef idx="1">
+            <a:schemeClr val="accent1"/>
+          </a:lnRef>
+          <a:fillRef idx="3">
+            <a:schemeClr val="accent1"/>
+          </a:fillRef>
+          <a:effectRef idx="2">
+            <a:schemeClr val="accent1"/>
+          </a:effectRef>
+          <a:fontRef idx="minor">
+            <a:schemeClr val="lt1"/>
+          </a:fontRef>
+        </p:style>
+        <p:txBody>
+          <a:bodyPr rtlCol="0" anchor="ctr"/>
+          <a:lstStyle/>
+          <a:p>
+            <a:pPr algn="ctr"/>
+          </a:p>
+        </p:txBody>
+      </p:sp>
+      <p:sp>
+        <p:nvSpPr>
+          <p:cNvPr id="106" name="Oval 105"/>
+          <p:cNvSpPr/>
+          <p:nvPr/>
+        </p:nvSpPr>
+        <p:spPr>
+          <a:xfrm>
+            <a:off x="1077571" y="7805503"/>
+            <a:ext cx="156321" cy="156321"/>
+          </a:xfrm>
+          <a:prstGeom prst="ellipse">
+            <a:avLst/>
+          </a:prstGeom>
+          <a:solidFill>
+            <a:srgbClr val="31662F"/>
+          </a:solidFill>
+          <a:ln>
+            <a:noFill/>
+          </a:ln>
+          <a:effectLst/>
+        </p:spPr>
+        <p:style>
+          <a:lnRef idx="1">
+            <a:schemeClr val="accent1"/>
+          </a:lnRef>
+          <a:fillRef idx="3">
+            <a:schemeClr val="accent1"/>
+          </a:fillRef>
+          <a:effectRef idx="2">
+            <a:schemeClr val="accent1"/>
+          </a:effectRef>
+          <a:fontRef idx="minor">
+            <a:schemeClr val="lt1"/>
+          </a:fontRef>
+        </p:style>
+        <p:txBody>
+          <a:bodyPr rtlCol="0" anchor="ctr"/>
+          <a:lstStyle/>
+          <a:p>
+            <a:pPr algn="ctr"/>
+          </a:p>
+        </p:txBody>
+      </p:sp>
+      <p:sp>
+        <p:nvSpPr>
+          <p:cNvPr id="107" name="Oval 106"/>
+          <p:cNvSpPr/>
+          <p:nvPr/>
+        </p:nvSpPr>
+        <p:spPr>
+          <a:xfrm>
+            <a:off x="1524269" y="8336899"/>
+            <a:ext cx="172375" cy="172375"/>
+          </a:xfrm>
+          <a:prstGeom prst="ellipse">
+            <a:avLst/>
+          </a:prstGeom>
+          <a:solidFill>
+            <a:srgbClr val="C09D7F"/>
+          </a:solidFill>
+          <a:ln>
+            <a:noFill/>
+          </a:ln>
+          <a:effectLst/>
+        </p:spPr>
+        <p:style>
+          <a:lnRef idx="1">
+            <a:schemeClr val="accent1"/>
+          </a:lnRef>
+          <a:fillRef idx="3">
+            <a:schemeClr val="accent1"/>
+          </a:fillRef>
+          <a:effectRef idx="2">
+            <a:schemeClr val="accent1"/>
+          </a:effectRef>
+          <a:fontRef idx="minor">
+            <a:schemeClr val="lt1"/>
+          </a:fontRef>
+        </p:style>
+        <p:txBody>
+          <a:bodyPr rtlCol="0" anchor="ctr"/>
+          <a:lstStyle/>
+          <a:p>
+            <a:pPr algn="ctr"/>
+          </a:p>
+        </p:txBody>
+      </p:sp>
+      <p:sp>
+        <p:nvSpPr>
+          <p:cNvPr id="108" name="Oval 107"/>
+          <p:cNvSpPr/>
+          <p:nvPr/>
+        </p:nvSpPr>
+        <p:spPr>
+          <a:xfrm>
+            <a:off x="3566222" y="7707917"/>
+            <a:ext cx="141865" cy="141865"/>
+          </a:xfrm>
+          <a:prstGeom prst="ellipse">
+            <a:avLst/>
+          </a:prstGeom>
+          <a:solidFill>
+            <a:srgbClr val="B1BCB1"/>
+          </a:solidFill>
+          <a:ln>
+            <a:noFill/>
+          </a:ln>
+          <a:effectLst/>
+        </p:spPr>
+        <p:style>
+          <a:lnRef idx="1">
+            <a:schemeClr val="accent1"/>
+          </a:lnRef>
+          <a:fillRef idx="3">
+            <a:schemeClr val="accent1"/>
+          </a:fillRef>
+          <a:effectRef idx="2">
+            <a:schemeClr val="accent1"/>
+          </a:effectRef>
+          <a:fontRef idx="minor">
+            <a:schemeClr val="lt1"/>
+          </a:fontRef>
+        </p:style>
+        <p:txBody>
+          <a:bodyPr rtlCol="0" anchor="ctr"/>
+          <a:lstStyle/>
+          <a:p>
+            <a:pPr algn="ctr"/>
+          </a:p>
+        </p:txBody>
+      </p:sp>
+      <p:sp>
+        <p:nvSpPr>
+          <p:cNvPr id="109" name="Oval 108"/>
+          <p:cNvSpPr/>
+          <p:nvPr/>
+        </p:nvSpPr>
+        <p:spPr>
+          <a:xfrm>
+            <a:off x="3790151" y="8289267"/>
+            <a:ext cx="126144" cy="126144"/>
+          </a:xfrm>
+          <a:prstGeom prst="ellipse">
+            <a:avLst/>
+          </a:prstGeom>
+          <a:solidFill>
+            <a:srgbClr val="4C3634"/>
+          </a:solidFill>
+          <a:ln>
+            <a:noFill/>
+          </a:ln>
+          <a:effectLst/>
+        </p:spPr>
+        <p:style>
+          <a:lnRef idx="1">
+            <a:schemeClr val="accent1"/>
+          </a:lnRef>
+          <a:fillRef idx="3">
+            <a:schemeClr val="accent1"/>
+          </a:fillRef>
+          <a:effectRef idx="2">
+            <a:schemeClr val="accent1"/>
+          </a:effectRef>
+          <a:fontRef idx="minor">
+            <a:schemeClr val="lt1"/>
+          </a:fontRef>
+        </p:style>
+        <p:txBody>
+          <a:bodyPr rtlCol="0" anchor="ctr"/>
+          <a:lstStyle/>
+          <a:p>
+            <a:pPr algn="ctr"/>
+          </a:p>
+        </p:txBody>
+      </p:sp>
+      <p:sp>
+        <p:nvSpPr>
+          <p:cNvPr id="110" name="Oval 109"/>
+          <p:cNvSpPr/>
+          <p:nvPr/>
+        </p:nvSpPr>
+        <p:spPr>
+          <a:xfrm>
+            <a:off x="3989654" y="7480621"/>
+            <a:ext cx="95496" cy="95496"/>
+          </a:xfrm>
+          <a:prstGeom prst="ellipse">
+            <a:avLst/>
+          </a:prstGeom>
+          <a:solidFill>
+            <a:srgbClr val="4C3634"/>
+          </a:solidFill>
+          <a:ln>
+            <a:noFill/>
+          </a:ln>
+          <a:effectLst/>
+        </p:spPr>
+        <p:style>
+          <a:lnRef idx="1">
+            <a:schemeClr val="accent1"/>
+          </a:lnRef>
+          <a:fillRef idx="3">
+            <a:schemeClr val="accent1"/>
+          </a:fillRef>
+          <a:effectRef idx="2">
+            <a:schemeClr val="accent1"/>
+          </a:effectRef>
+          <a:fontRef idx="minor">
+            <a:schemeClr val="lt1"/>
+          </a:fontRef>
+        </p:style>
+        <p:txBody>
+          <a:bodyPr rtlCol="0" anchor="ctr"/>
+          <a:lstStyle/>
+          <a:p>
+            <a:pPr algn="ctr"/>
+          </a:p>
+        </p:txBody>
+      </p:sp>
+      <p:sp>
+        <p:nvSpPr>
+          <p:cNvPr id="111" name="Oval 110"/>
+          <p:cNvSpPr/>
+          <p:nvPr/>
+        </p:nvSpPr>
+        <p:spPr>
+          <a:xfrm>
+            <a:off x="407435" y="7563072"/>
+            <a:ext cx="148524" cy="148524"/>
+          </a:xfrm>
+          <a:prstGeom prst="ellipse">
+            <a:avLst/>
+          </a:prstGeom>
+          <a:solidFill>
+            <a:srgbClr val="C09D7F"/>
+          </a:solidFill>
+          <a:ln>
+            <a:noFill/>
+          </a:ln>
+          <a:effectLst/>
+        </p:spPr>
+        <p:style>
+          <a:lnRef idx="1">
+            <a:schemeClr val="accent1"/>
+          </a:lnRef>
+          <a:fillRef idx="3">
+            <a:schemeClr val="accent1"/>
+          </a:fillRef>
+          <a:effectRef idx="2">
+            <a:schemeClr val="accent1"/>
+          </a:effectRef>
+          <a:fontRef idx="minor">
+            <a:schemeClr val="lt1"/>
+          </a:fontRef>
+        </p:style>
+        <p:txBody>
+          <a:bodyPr rtlCol="0" anchor="ctr"/>
+          <a:lstStyle/>
+          <a:p>
+            <a:pPr algn="ctr"/>
+          </a:p>
+        </p:txBody>
+      </p:sp>
+      <p:sp>
+        <p:nvSpPr>
+          <p:cNvPr id="112" name="Oval 111"/>
+          <p:cNvSpPr/>
+          <p:nvPr/>
+        </p:nvSpPr>
+        <p:spPr>
+          <a:xfrm>
+            <a:off x="5715838" y="8036511"/>
+            <a:ext cx="188403" cy="188403"/>
+          </a:xfrm>
+          <a:prstGeom prst="ellipse">
+            <a:avLst/>
+          </a:prstGeom>
+          <a:solidFill>
+            <a:srgbClr val="31662F"/>
+          </a:solidFill>
+          <a:ln>
+            <a:noFill/>
+          </a:ln>
+          <a:effectLst/>
+        </p:spPr>
+        <p:style>
+          <a:lnRef idx="1">
+            <a:schemeClr val="accent1"/>
+          </a:lnRef>
+          <a:fillRef idx="3">
+            <a:schemeClr val="accent1"/>
+          </a:fillRef>
+          <a:effectRef idx="2">
+            <a:schemeClr val="accent1"/>
+          </a:effectRef>
+          <a:fontRef idx="minor">
+            <a:schemeClr val="lt1"/>
+          </a:fontRef>
+        </p:style>
+        <p:txBody>
+          <a:bodyPr rtlCol="0" anchor="ctr"/>
+          <a:lstStyle/>
+          <a:p>
+            <a:pPr algn="ctr"/>
+          </a:p>
+        </p:txBody>
+      </p:sp>
+      <p:sp>
+        <p:nvSpPr>
+          <p:cNvPr id="113" name="Oval 112"/>
+          <p:cNvSpPr/>
+          <p:nvPr/>
+        </p:nvSpPr>
+        <p:spPr>
+          <a:xfrm>
+            <a:off x="2067532" y="7753524"/>
+            <a:ext cx="122208" cy="122208"/>
+          </a:xfrm>
+          <a:prstGeom prst="ellipse">
+            <a:avLst/>
+          </a:prstGeom>
+          <a:solidFill>
+            <a:srgbClr val="B1BCB1"/>
+          </a:solidFill>
+          <a:ln>
+            <a:noFill/>
+          </a:ln>
+          <a:effectLst/>
+        </p:spPr>
+        <p:style>
+          <a:lnRef idx="1">
+            <a:schemeClr val="accent1"/>
+          </a:lnRef>
+          <a:fillRef idx="3">
+            <a:schemeClr val="accent1"/>
+          </a:fillRef>
+          <a:effectRef idx="2">
+            <a:schemeClr val="accent1"/>
+          </a:effectRef>
+          <a:fontRef idx="minor">
+            <a:schemeClr val="lt1"/>
+          </a:fontRef>
+        </p:style>
+        <p:txBody>
+          <a:bodyPr rtlCol="0" anchor="ctr"/>
+          <a:lstStyle/>
+          <a:p>
+            <a:pPr algn="ctr"/>
+          </a:p>
+        </p:txBody>
+      </p:sp>
+      <p:sp>
+        <p:nvSpPr>
+          <p:cNvPr id="114" name="Oval 113"/>
+          <p:cNvSpPr/>
+          <p:nvPr/>
+        </p:nvSpPr>
+        <p:spPr>
+          <a:xfrm>
+            <a:off x="3616462" y="8567235"/>
+            <a:ext cx="117850" cy="117850"/>
+          </a:xfrm>
+          <a:prstGeom prst="ellipse">
+            <a:avLst/>
+          </a:prstGeom>
+          <a:solidFill>
+            <a:srgbClr val="31662F"/>
+          </a:solidFill>
+          <a:ln>
+            <a:noFill/>
+          </a:ln>
+          <a:effectLst/>
+        </p:spPr>
+        <p:style>
+          <a:lnRef idx="1">
+            <a:schemeClr val="accent1"/>
+          </a:lnRef>
+          <a:fillRef idx="3">
+            <a:schemeClr val="accent1"/>
+          </a:fillRef>
+          <a:effectRef idx="2">
+            <a:schemeClr val="accent1"/>
+          </a:effectRef>
+          <a:fontRef idx="minor">
+            <a:schemeClr val="lt1"/>
+          </a:fontRef>
+        </p:style>
+        <p:txBody>
+          <a:bodyPr rtlCol="0" anchor="ctr"/>
+          <a:lstStyle/>
+          <a:p>
+            <a:pPr algn="ctr"/>
+          </a:p>
+        </p:txBody>
+      </p:sp>
+      <p:sp>
+        <p:nvSpPr>
+          <p:cNvPr id="115" name="Oval 114"/>
+          <p:cNvSpPr/>
+          <p:nvPr/>
+        </p:nvSpPr>
+        <p:spPr>
+          <a:xfrm>
+            <a:off x="1955659" y="9188062"/>
+            <a:ext cx="103957" cy="103957"/>
+          </a:xfrm>
+          <a:prstGeom prst="ellipse">
+            <a:avLst/>
+          </a:prstGeom>
+          <a:solidFill>
+            <a:srgbClr val="4C3634"/>
+          </a:solidFill>
+          <a:ln>
+            <a:noFill/>
+          </a:ln>
+          <a:effectLst/>
+        </p:spPr>
+        <p:style>
+          <a:lnRef idx="1">
+            <a:schemeClr val="accent1"/>
+          </a:lnRef>
+          <a:fillRef idx="3">
+            <a:schemeClr val="accent1"/>
+          </a:fillRef>
+          <a:effectRef idx="2">
+            <a:schemeClr val="accent1"/>
+          </a:effectRef>
+          <a:fontRef idx="minor">
+            <a:schemeClr val="lt1"/>
+          </a:fontRef>
+        </p:style>
+        <p:txBody>
+          <a:bodyPr rtlCol="0" anchor="ctr"/>
+          <a:lstStyle/>
+          <a:p>
+            <a:pPr algn="ctr"/>
+          </a:p>
+        </p:txBody>
+      </p:sp>
+      <p:sp>
+        <p:nvSpPr>
+          <p:cNvPr id="116" name="Oval 115"/>
+          <p:cNvSpPr/>
+          <p:nvPr/>
+        </p:nvSpPr>
+        <p:spPr>
+          <a:xfrm>
+            <a:off x="3880275" y="8731285"/>
+            <a:ext cx="156542" cy="156542"/>
+          </a:xfrm>
+          <a:prstGeom prst="ellipse">
+            <a:avLst/>
+          </a:prstGeom>
+          <a:solidFill>
+            <a:srgbClr val="C09D7F"/>
+          </a:solidFill>
+          <a:ln>
+            <a:noFill/>
+          </a:ln>
+          <a:effectLst/>
+        </p:spPr>
+        <p:style>
+          <a:lnRef idx="1">
+            <a:schemeClr val="accent1"/>
+          </a:lnRef>
+          <a:fillRef idx="3">
+            <a:schemeClr val="accent1"/>
+          </a:fillRef>
+          <a:effectRef idx="2">
+            <a:schemeClr val="accent1"/>
+          </a:effectRef>
+          <a:fontRef idx="minor">
+            <a:schemeClr val="lt1"/>
+          </a:fontRef>
+        </p:style>
+        <p:txBody>
+          <a:bodyPr rtlCol="0" anchor="ctr"/>
+          <a:lstStyle/>
+          <a:p>
+            <a:pPr algn="ctr"/>
+          </a:p>
+        </p:txBody>
+      </p:sp>
+      <p:sp>
+        <p:nvSpPr>
+          <p:cNvPr id="117" name="Oval 116"/>
+          <p:cNvSpPr/>
+          <p:nvPr/>
+        </p:nvSpPr>
+        <p:spPr>
+          <a:xfrm>
+            <a:off x="4180278" y="9313753"/>
+            <a:ext cx="186458" cy="186458"/>
+          </a:xfrm>
+          <a:prstGeom prst="ellipse">
+            <a:avLst/>
+          </a:prstGeom>
+          <a:solidFill>
+            <a:srgbClr val="31662F"/>
+          </a:solidFill>
+          <a:ln>
+            <a:noFill/>
+          </a:ln>
+          <a:effectLst/>
+        </p:spPr>
+        <p:style>
+          <a:lnRef idx="1">
+            <a:schemeClr val="accent1"/>
+          </a:lnRef>
+          <a:fillRef idx="3">
+            <a:schemeClr val="accent1"/>
+          </a:fillRef>
+          <a:effectRef idx="2">
+            <a:schemeClr val="accent1"/>
+          </a:effectRef>
+          <a:fontRef idx="minor">
+            <a:schemeClr val="lt1"/>
+          </a:fontRef>
+        </p:style>
+        <p:txBody>
+          <a:bodyPr rtlCol="0" anchor="ctr"/>
+          <a:lstStyle/>
+          <a:p>
+            <a:pPr algn="ctr"/>
+          </a:p>
+        </p:txBody>
+      </p:sp>
+      <p:sp>
+        <p:nvSpPr>
+          <p:cNvPr id="118" name="Oval 117"/>
+          <p:cNvSpPr/>
+          <p:nvPr/>
+        </p:nvSpPr>
+        <p:spPr>
+          <a:xfrm>
+            <a:off x="8624947" y="8364687"/>
+            <a:ext cx="125074" cy="125074"/>
+          </a:xfrm>
+          <a:prstGeom prst="ellipse">
+            <a:avLst/>
+          </a:prstGeom>
+          <a:solidFill>
+            <a:srgbClr val="C09D7F"/>
+          </a:solidFill>
+          <a:ln>
+            <a:noFill/>
+          </a:ln>
+          <a:effectLst/>
+        </p:spPr>
+        <p:style>
+          <a:lnRef idx="1">
+            <a:schemeClr val="accent1"/>
+          </a:lnRef>
+          <a:fillRef idx="3">
+            <a:schemeClr val="accent1"/>
+          </a:fillRef>
+          <a:effectRef idx="2">
+            <a:schemeClr val="accent1"/>
+          </a:effectRef>
+          <a:fontRef idx="minor">
+            <a:schemeClr val="lt1"/>
+          </a:fontRef>
+        </p:style>
+        <p:txBody>
+          <a:bodyPr rtlCol="0" anchor="ctr"/>
+          <a:lstStyle/>
+          <a:p>
+            <a:pPr algn="ctr"/>
+          </a:p>
+        </p:txBody>
+      </p:sp>
+      <p:sp>
+        <p:nvSpPr>
+          <p:cNvPr id="119" name="Oval 118"/>
+          <p:cNvSpPr/>
+          <p:nvPr/>
+        </p:nvSpPr>
+        <p:spPr>
+          <a:xfrm>
+            <a:off x="9120775" y="7897886"/>
+            <a:ext cx="144589" cy="144589"/>
+          </a:xfrm>
+          <a:prstGeom prst="ellipse">
+            <a:avLst/>
+          </a:prstGeom>
+          <a:solidFill>
+            <a:srgbClr val="4C3634"/>
+          </a:solidFill>
+          <a:ln>
+            <a:noFill/>
+          </a:ln>
+          <a:effectLst/>
+        </p:spPr>
+        <p:style>
+          <a:lnRef idx="1">
+            <a:schemeClr val="accent1"/>
+          </a:lnRef>
+          <a:fillRef idx="3">
+            <a:schemeClr val="accent1"/>
+          </a:fillRef>
+          <a:effectRef idx="2">
+            <a:schemeClr val="accent1"/>
+          </a:effectRef>
+          <a:fontRef idx="minor">
+            <a:schemeClr val="lt1"/>
+          </a:fontRef>
+        </p:style>
+        <p:txBody>
+          <a:bodyPr rtlCol="0" anchor="ctr"/>
+          <a:lstStyle/>
+          <a:p>
+            <a:pPr algn="ctr"/>
+          </a:p>
+        </p:txBody>
+      </p:sp>
+      <p:sp>
+        <p:nvSpPr>
+          <p:cNvPr id="120" name="Oval 119"/>
+          <p:cNvSpPr/>
+          <p:nvPr/>
+        </p:nvSpPr>
+        <p:spPr>
+          <a:xfrm>
+            <a:off x="7897902" y="8903811"/>
+            <a:ext cx="136349" cy="136349"/>
+          </a:xfrm>
+          <a:prstGeom prst="ellipse">
+            <a:avLst/>
+          </a:prstGeom>
+          <a:solidFill>
+            <a:srgbClr val="B1BCB1"/>
+          </a:solidFill>
+          <a:ln>
+            <a:noFill/>
+          </a:ln>
+          <a:effectLst/>
+        </p:spPr>
+        <p:style>
+          <a:lnRef idx="1">
+            <a:schemeClr val="accent1"/>
+          </a:lnRef>
+          <a:fillRef idx="3">
+            <a:schemeClr val="accent1"/>
+          </a:fillRef>
+          <a:effectRef idx="2">
+            <a:schemeClr val="accent1"/>
+          </a:effectRef>
+          <a:fontRef idx="minor">
+            <a:schemeClr val="lt1"/>
+          </a:fontRef>
+        </p:style>
+        <p:txBody>
+          <a:bodyPr rtlCol="0" anchor="ctr"/>
+          <a:lstStyle/>
+          <a:p>
+            <a:pPr algn="ctr"/>
+          </a:p>
+        </p:txBody>
+      </p:sp>
+      <p:sp>
+        <p:nvSpPr>
+          <p:cNvPr id="121" name="Oval 120"/>
+          <p:cNvSpPr/>
+          <p:nvPr/>
+        </p:nvSpPr>
+        <p:spPr>
+          <a:xfrm>
+            <a:off x="868014" y="7920945"/>
+            <a:ext cx="116096" cy="116096"/>
+          </a:xfrm>
+          <a:prstGeom prst="ellipse">
+            <a:avLst/>
+          </a:prstGeom>
+          <a:solidFill>
+            <a:srgbClr val="4C3634"/>
+          </a:solidFill>
+          <a:ln>
+            <a:noFill/>
+          </a:ln>
+          <a:effectLst/>
+        </p:spPr>
+        <p:style>
+          <a:lnRef idx="1">
+            <a:schemeClr val="accent1"/>
+          </a:lnRef>
+          <a:fillRef idx="3">
+            <a:schemeClr val="accent1"/>
+          </a:fillRef>
+          <a:effectRef idx="2">
+            <a:schemeClr val="accent1"/>
+          </a:effectRef>
+          <a:fontRef idx="minor">
+            <a:schemeClr val="lt1"/>
+          </a:fontRef>
+        </p:style>
+        <p:txBody>
+          <a:bodyPr rtlCol="0" anchor="ctr"/>
+          <a:lstStyle/>
+          <a:p>
+            <a:pPr algn="ctr"/>
+          </a:p>
+        </p:txBody>
+      </p:sp>
+      <p:sp>
+        <p:nvSpPr>
+          <p:cNvPr id="122" name="Oval 121"/>
+          <p:cNvSpPr/>
+          <p:nvPr/>
+        </p:nvSpPr>
+        <p:spPr>
+          <a:xfrm>
+            <a:off x="2701505" y="8181070"/>
+            <a:ext cx="176919" cy="176919"/>
+          </a:xfrm>
+          <a:prstGeom prst="ellipse">
+            <a:avLst/>
+          </a:prstGeom>
+          <a:solidFill>
+            <a:srgbClr val="C09D7F"/>
+          </a:solidFill>
+          <a:ln>
+            <a:noFill/>
+          </a:ln>
+          <a:effectLst/>
+        </p:spPr>
+        <p:style>
+          <a:lnRef idx="1">
+            <a:schemeClr val="accent1"/>
+          </a:lnRef>
+          <a:fillRef idx="3">
+            <a:schemeClr val="accent1"/>
+          </a:fillRef>
+          <a:effectRef idx="2">
+            <a:schemeClr val="accent1"/>
+          </a:effectRef>
+          <a:fontRef idx="minor">
+            <a:schemeClr val="lt1"/>
+          </a:fontRef>
+        </p:style>
+        <p:txBody>
+          <a:bodyPr rtlCol="0" anchor="ctr"/>
+          <a:lstStyle/>
+          <a:p>
+            <a:pPr algn="ctr"/>
+          </a:p>
+        </p:txBody>
+      </p:sp>
+      <p:sp>
+        <p:nvSpPr>
+          <p:cNvPr id="123" name="Oval 122"/>
+          <p:cNvSpPr/>
+          <p:nvPr/>
+        </p:nvSpPr>
+        <p:spPr>
+          <a:xfrm>
+            <a:off x="9560986" y="8850339"/>
+            <a:ext cx="135909" cy="135909"/>
+          </a:xfrm>
+          <a:prstGeom prst="ellipse">
+            <a:avLst/>
+          </a:prstGeom>
+          <a:solidFill>
+            <a:srgbClr val="B1BCB1"/>
+          </a:solidFill>
+          <a:ln>
+            <a:noFill/>
+          </a:ln>
+          <a:effectLst/>
+        </p:spPr>
+        <p:style>
+          <a:lnRef idx="1">
+            <a:schemeClr val="accent1"/>
+          </a:lnRef>
+          <a:fillRef idx="3">
+            <a:schemeClr val="accent1"/>
+          </a:fillRef>
+          <a:effectRef idx="2">
+            <a:schemeClr val="accent1"/>
+          </a:effectRef>
+          <a:fontRef idx="minor">
+            <a:schemeClr val="lt1"/>
+          </a:fontRef>
+        </p:style>
+        <p:txBody>
+          <a:bodyPr rtlCol="0" anchor="ctr"/>
+          <a:lstStyle/>
+          <a:p>
+            <a:pPr algn="ctr"/>
+          </a:p>
+        </p:txBody>
+      </p:sp>
+      <p:sp>
+        <p:nvSpPr>
+          <p:cNvPr id="124" name="Oval 123"/>
+          <p:cNvSpPr/>
+          <p:nvPr/>
+        </p:nvSpPr>
+        <p:spPr>
+          <a:xfrm>
+            <a:off x="1683990" y="8668226"/>
+            <a:ext cx="181221" cy="181221"/>
+          </a:xfrm>
+          <a:prstGeom prst="ellipse">
+            <a:avLst/>
+          </a:prstGeom>
+          <a:solidFill>
+            <a:srgbClr val="4C3634"/>
+          </a:solidFill>
+          <a:ln>
+            <a:noFill/>
+          </a:ln>
+          <a:effectLst/>
+        </p:spPr>
+        <p:style>
+          <a:lnRef idx="1">
+            <a:schemeClr val="accent1"/>
+          </a:lnRef>
+          <a:fillRef idx="3">
+            <a:schemeClr val="accent1"/>
+          </a:fillRef>
+          <a:effectRef idx="2">
+            <a:schemeClr val="accent1"/>
+          </a:effectRef>
+          <a:fontRef idx="minor">
+            <a:schemeClr val="lt1"/>
+          </a:fontRef>
+        </p:style>
+        <p:txBody>
+          <a:bodyPr rtlCol="0" anchor="ctr"/>
+          <a:lstStyle/>
+          <a:p>
+            <a:pPr algn="ctr"/>
+          </a:p>
+        </p:txBody>
+      </p:sp>
+      <p:sp>
+        <p:nvSpPr>
+          <p:cNvPr id="125" name="Oval 124"/>
+          <p:cNvSpPr/>
+          <p:nvPr/>
+        </p:nvSpPr>
+        <p:spPr>
+          <a:xfrm>
+            <a:off x="645161" y="7833534"/>
+            <a:ext cx="173554" cy="173554"/>
+          </a:xfrm>
+          <a:prstGeom prst="ellipse">
+            <a:avLst/>
+          </a:prstGeom>
+          <a:solidFill>
+            <a:srgbClr val="C09D7F"/>
+          </a:solidFill>
+          <a:ln>
+            <a:noFill/>
+          </a:ln>
+          <a:effectLst/>
+        </p:spPr>
+        <p:style>
+          <a:lnRef idx="1">
+            <a:schemeClr val="accent1"/>
+          </a:lnRef>
+          <a:fillRef idx="3">
+            <a:schemeClr val="accent1"/>
+          </a:fillRef>
+          <a:effectRef idx="2">
+            <a:schemeClr val="accent1"/>
+          </a:effectRef>
+          <a:fontRef idx="minor">
+            <a:schemeClr val="lt1"/>
+          </a:fontRef>
+        </p:style>
+        <p:txBody>
+          <a:bodyPr rtlCol="0" anchor="ctr"/>
+          <a:lstStyle/>
+          <a:p>
+            <a:pPr algn="ctr"/>
+          </a:p>
+        </p:txBody>
+      </p:sp>
+      <p:sp>
+        <p:nvSpPr>
+          <p:cNvPr id="126" name="TextBox 125"/>
           <p:cNvSpPr txBox="1"/>
           <p:nvPr/>
         </p:nvSpPr>
@@ -9205,632 +10405,16 @@
           </a:p>
         </p:txBody>
       </p:sp>
-      <p:sp>
-        <p:nvSpPr>
-          <p:cNvPr id="102" name="Oval 101"/>
-          <p:cNvSpPr/>
-          <p:nvPr/>
-        </p:nvSpPr>
-        <p:spPr>
-          <a:xfrm>
-            <a:off x="4702942" y="10702271"/>
-            <a:ext cx="100240" cy="100240"/>
-          </a:xfrm>
-          <a:prstGeom prst="ellipse">
-            <a:avLst/>
-          </a:prstGeom>
-          <a:solidFill>
-            <a:srgbClr val="31662F"/>
-          </a:solidFill>
-          <a:ln>
-            <a:noFill/>
-          </a:ln>
-          <a:effectLst/>
-        </p:spPr>
-        <p:style>
-          <a:lnRef idx="1">
-            <a:schemeClr val="accent1"/>
-          </a:lnRef>
-          <a:fillRef idx="3">
-            <a:schemeClr val="accent1"/>
-          </a:fillRef>
-          <a:effectRef idx="2">
-            <a:schemeClr val="accent1"/>
-          </a:effectRef>
-          <a:fontRef idx="minor">
-            <a:schemeClr val="lt1"/>
-          </a:fontRef>
-        </p:style>
-        <p:txBody>
-          <a:bodyPr rtlCol="0" anchor="ctr"/>
-          <a:lstStyle/>
-          <a:p>
-            <a:pPr algn="ctr"/>
-          </a:p>
-        </p:txBody>
-      </p:sp>
-      <p:sp>
-        <p:nvSpPr>
-          <p:cNvPr id="103" name="Oval 102"/>
-          <p:cNvSpPr/>
-          <p:nvPr/>
-        </p:nvSpPr>
-        <p:spPr>
-          <a:xfrm>
-            <a:off x="3539099" y="10779775"/>
-            <a:ext cx="149082" cy="149082"/>
-          </a:xfrm>
-          <a:prstGeom prst="ellipse">
-            <a:avLst/>
-          </a:prstGeom>
-          <a:solidFill>
-            <a:srgbClr val="B1BCB1"/>
-          </a:solidFill>
-          <a:ln>
-            <a:noFill/>
-          </a:ln>
-          <a:effectLst/>
-        </p:spPr>
-        <p:style>
-          <a:lnRef idx="1">
-            <a:schemeClr val="accent1"/>
-          </a:lnRef>
-          <a:fillRef idx="3">
-            <a:schemeClr val="accent1"/>
-          </a:fillRef>
-          <a:effectRef idx="2">
-            <a:schemeClr val="accent1"/>
-          </a:effectRef>
-          <a:fontRef idx="minor">
-            <a:schemeClr val="lt1"/>
-          </a:fontRef>
-        </p:style>
-        <p:txBody>
-          <a:bodyPr rtlCol="0" anchor="ctr"/>
-          <a:lstStyle/>
-          <a:p>
-            <a:pPr algn="ctr"/>
-          </a:p>
-        </p:txBody>
-      </p:sp>
-      <p:sp>
-        <p:nvSpPr>
-          <p:cNvPr id="104" name="Oval 103"/>
-          <p:cNvSpPr/>
-          <p:nvPr/>
-        </p:nvSpPr>
-        <p:spPr>
-          <a:xfrm>
-            <a:off x="5554837" y="10910873"/>
-            <a:ext cx="90009" cy="90009"/>
-          </a:xfrm>
-          <a:prstGeom prst="ellipse">
-            <a:avLst/>
-          </a:prstGeom>
-          <a:solidFill>
-            <a:srgbClr val="4C3634"/>
-          </a:solidFill>
-          <a:ln>
-            <a:noFill/>
-          </a:ln>
-          <a:effectLst/>
-        </p:spPr>
-        <p:style>
-          <a:lnRef idx="1">
-            <a:schemeClr val="accent1"/>
-          </a:lnRef>
-          <a:fillRef idx="3">
-            <a:schemeClr val="accent1"/>
-          </a:fillRef>
-          <a:effectRef idx="2">
-            <a:schemeClr val="accent1"/>
-          </a:effectRef>
-          <a:fontRef idx="minor">
-            <a:schemeClr val="lt1"/>
-          </a:fontRef>
-        </p:style>
-        <p:txBody>
-          <a:bodyPr rtlCol="0" anchor="ctr"/>
-          <a:lstStyle/>
-          <a:p>
-            <a:pPr algn="ctr"/>
-          </a:p>
-        </p:txBody>
-      </p:sp>
-      <p:sp>
-        <p:nvSpPr>
-          <p:cNvPr id="105" name="Oval 104"/>
-          <p:cNvSpPr/>
-          <p:nvPr/>
-        </p:nvSpPr>
-        <p:spPr>
-          <a:xfrm>
-            <a:off x="1962396" y="11193393"/>
-            <a:ext cx="185394" cy="185394"/>
-          </a:xfrm>
-          <a:prstGeom prst="ellipse">
-            <a:avLst/>
-          </a:prstGeom>
-          <a:solidFill>
-            <a:srgbClr val="4C3634"/>
-          </a:solidFill>
-          <a:ln>
-            <a:noFill/>
-          </a:ln>
-          <a:effectLst/>
-        </p:spPr>
-        <p:style>
-          <a:lnRef idx="1">
-            <a:schemeClr val="accent1"/>
-          </a:lnRef>
-          <a:fillRef idx="3">
-            <a:schemeClr val="accent1"/>
-          </a:fillRef>
-          <a:effectRef idx="2">
-            <a:schemeClr val="accent1"/>
-          </a:effectRef>
-          <a:fontRef idx="minor">
-            <a:schemeClr val="lt1"/>
-          </a:fontRef>
-        </p:style>
-        <p:txBody>
-          <a:bodyPr rtlCol="0" anchor="ctr"/>
-          <a:lstStyle/>
-          <a:p>
-            <a:pPr algn="ctr"/>
-          </a:p>
-        </p:txBody>
-      </p:sp>
-      <p:sp>
-        <p:nvSpPr>
-          <p:cNvPr id="106" name="Oval 105"/>
-          <p:cNvSpPr/>
-          <p:nvPr/>
-        </p:nvSpPr>
-        <p:spPr>
-          <a:xfrm>
-            <a:off x="1847983" y="10586285"/>
-            <a:ext cx="97349" cy="97349"/>
-          </a:xfrm>
-          <a:prstGeom prst="ellipse">
-            <a:avLst/>
-          </a:prstGeom>
-          <a:solidFill>
-            <a:srgbClr val="31662F"/>
-          </a:solidFill>
-          <a:ln>
-            <a:noFill/>
-          </a:ln>
-          <a:effectLst/>
-        </p:spPr>
-        <p:style>
-          <a:lnRef idx="1">
-            <a:schemeClr val="accent1"/>
-          </a:lnRef>
-          <a:fillRef idx="3">
-            <a:schemeClr val="accent1"/>
-          </a:fillRef>
-          <a:effectRef idx="2">
-            <a:schemeClr val="accent1"/>
-          </a:effectRef>
-          <a:fontRef idx="minor">
-            <a:schemeClr val="lt1"/>
-          </a:fontRef>
-        </p:style>
-        <p:txBody>
-          <a:bodyPr rtlCol="0" anchor="ctr"/>
-          <a:lstStyle/>
-          <a:p>
-            <a:pPr algn="ctr"/>
-          </a:p>
-        </p:txBody>
-      </p:sp>
-      <p:sp>
-        <p:nvSpPr>
-          <p:cNvPr id="107" name="Oval 106"/>
-          <p:cNvSpPr/>
-          <p:nvPr/>
-        </p:nvSpPr>
-        <p:spPr>
-          <a:xfrm>
-            <a:off x="7607858" y="10711146"/>
-            <a:ext cx="163897" cy="163897"/>
-          </a:xfrm>
-          <a:prstGeom prst="ellipse">
-            <a:avLst/>
-          </a:prstGeom>
-          <a:solidFill>
-            <a:srgbClr val="31662F"/>
-          </a:solidFill>
-          <a:ln>
-            <a:noFill/>
-          </a:ln>
-          <a:effectLst/>
-        </p:spPr>
-        <p:style>
-          <a:lnRef idx="1">
-            <a:schemeClr val="accent1"/>
-          </a:lnRef>
-          <a:fillRef idx="3">
-            <a:schemeClr val="accent1"/>
-          </a:fillRef>
-          <a:effectRef idx="2">
-            <a:schemeClr val="accent1"/>
-          </a:effectRef>
-          <a:fontRef idx="minor">
-            <a:schemeClr val="lt1"/>
-          </a:fontRef>
-        </p:style>
-        <p:txBody>
-          <a:bodyPr rtlCol="0" anchor="ctr"/>
-          <a:lstStyle/>
-          <a:p>
-            <a:pPr algn="ctr"/>
-          </a:p>
-        </p:txBody>
-      </p:sp>
-      <p:sp>
-        <p:nvSpPr>
-          <p:cNvPr id="108" name="Oval 107"/>
-          <p:cNvSpPr/>
-          <p:nvPr/>
-        </p:nvSpPr>
-        <p:spPr>
-          <a:xfrm>
-            <a:off x="8958989" y="10557952"/>
-            <a:ext cx="109226" cy="109226"/>
-          </a:xfrm>
-          <a:prstGeom prst="ellipse">
-            <a:avLst/>
-          </a:prstGeom>
-          <a:solidFill>
-            <a:srgbClr val="4C3634"/>
-          </a:solidFill>
-          <a:ln>
-            <a:noFill/>
-          </a:ln>
-          <a:effectLst/>
-        </p:spPr>
-        <p:style>
-          <a:lnRef idx="1">
-            <a:schemeClr val="accent1"/>
-          </a:lnRef>
-          <a:fillRef idx="3">
-            <a:schemeClr val="accent1"/>
-          </a:fillRef>
-          <a:effectRef idx="2">
-            <a:schemeClr val="accent1"/>
-          </a:effectRef>
-          <a:fontRef idx="minor">
-            <a:schemeClr val="lt1"/>
-          </a:fontRef>
-        </p:style>
-        <p:txBody>
-          <a:bodyPr rtlCol="0" anchor="ctr"/>
-          <a:lstStyle/>
-          <a:p>
-            <a:pPr algn="ctr"/>
-          </a:p>
-        </p:txBody>
-      </p:sp>
-      <p:sp>
-        <p:nvSpPr>
-          <p:cNvPr id="109" name="Oval 108"/>
-          <p:cNvSpPr/>
-          <p:nvPr/>
-        </p:nvSpPr>
-        <p:spPr>
-          <a:xfrm>
-            <a:off x="8684747" y="11044544"/>
-            <a:ext cx="181214" cy="181214"/>
-          </a:xfrm>
-          <a:prstGeom prst="ellipse">
-            <a:avLst/>
-          </a:prstGeom>
-          <a:solidFill>
-            <a:srgbClr val="4C3634"/>
-          </a:solidFill>
-          <a:ln>
-            <a:noFill/>
-          </a:ln>
-          <a:effectLst/>
-        </p:spPr>
-        <p:style>
-          <a:lnRef idx="1">
-            <a:schemeClr val="accent1"/>
-          </a:lnRef>
-          <a:fillRef idx="3">
-            <a:schemeClr val="accent1"/>
-          </a:fillRef>
-          <a:effectRef idx="2">
-            <a:schemeClr val="accent1"/>
-          </a:effectRef>
-          <a:fontRef idx="minor">
-            <a:schemeClr val="lt1"/>
-          </a:fontRef>
-        </p:style>
-        <p:txBody>
-          <a:bodyPr rtlCol="0" anchor="ctr"/>
-          <a:lstStyle/>
-          <a:p>
-            <a:pPr algn="ctr"/>
-          </a:p>
-        </p:txBody>
-      </p:sp>
-      <p:sp>
-        <p:nvSpPr>
-          <p:cNvPr id="110" name="Oval 109"/>
-          <p:cNvSpPr/>
-          <p:nvPr/>
-        </p:nvSpPr>
-        <p:spPr>
-          <a:xfrm>
-            <a:off x="3005715" y="11076203"/>
-            <a:ext cx="106625" cy="106625"/>
-          </a:xfrm>
-          <a:prstGeom prst="ellipse">
-            <a:avLst/>
-          </a:prstGeom>
-          <a:solidFill>
-            <a:srgbClr val="31662F"/>
-          </a:solidFill>
-          <a:ln>
-            <a:noFill/>
-          </a:ln>
-          <a:effectLst/>
-        </p:spPr>
-        <p:style>
-          <a:lnRef idx="1">
-            <a:schemeClr val="accent1"/>
-          </a:lnRef>
-          <a:fillRef idx="3">
-            <a:schemeClr val="accent1"/>
-          </a:fillRef>
-          <a:effectRef idx="2">
-            <a:schemeClr val="accent1"/>
-          </a:effectRef>
-          <a:fontRef idx="minor">
-            <a:schemeClr val="lt1"/>
-          </a:fontRef>
-        </p:style>
-        <p:txBody>
-          <a:bodyPr rtlCol="0" anchor="ctr"/>
-          <a:lstStyle/>
-          <a:p>
-            <a:pPr algn="ctr"/>
-          </a:p>
-        </p:txBody>
-      </p:sp>
-      <p:sp>
-        <p:nvSpPr>
-          <p:cNvPr id="111" name="Oval 110"/>
-          <p:cNvSpPr/>
-          <p:nvPr/>
-        </p:nvSpPr>
-        <p:spPr>
-          <a:xfrm>
-            <a:off x="8589509" y="10429218"/>
-            <a:ext cx="125415" cy="125415"/>
-          </a:xfrm>
-          <a:prstGeom prst="ellipse">
-            <a:avLst/>
-          </a:prstGeom>
-          <a:solidFill>
-            <a:srgbClr val="4C3634"/>
-          </a:solidFill>
-          <a:ln>
-            <a:noFill/>
-          </a:ln>
-          <a:effectLst/>
-        </p:spPr>
-        <p:style>
-          <a:lnRef idx="1">
-            <a:schemeClr val="accent1"/>
-          </a:lnRef>
-          <a:fillRef idx="3">
-            <a:schemeClr val="accent1"/>
-          </a:fillRef>
-          <a:effectRef idx="2">
-            <a:schemeClr val="accent1"/>
-          </a:effectRef>
-          <a:fontRef idx="minor">
-            <a:schemeClr val="lt1"/>
-          </a:fontRef>
-        </p:style>
-        <p:txBody>
-          <a:bodyPr rtlCol="0" anchor="ctr"/>
-          <a:lstStyle/>
-          <a:p>
-            <a:pPr algn="ctr"/>
-          </a:p>
-        </p:txBody>
-      </p:sp>
-      <p:sp>
-        <p:nvSpPr>
-          <p:cNvPr id="112" name="Oval 111"/>
-          <p:cNvSpPr/>
-          <p:nvPr/>
-        </p:nvSpPr>
-        <p:spPr>
-          <a:xfrm>
-            <a:off x="1679828" y="10585189"/>
-            <a:ext cx="162863" cy="162863"/>
-          </a:xfrm>
-          <a:prstGeom prst="ellipse">
-            <a:avLst/>
-          </a:prstGeom>
-          <a:solidFill>
-            <a:srgbClr val="31662F"/>
-          </a:solidFill>
-          <a:ln>
-            <a:noFill/>
-          </a:ln>
-          <a:effectLst/>
-        </p:spPr>
-        <p:style>
-          <a:lnRef idx="1">
-            <a:schemeClr val="accent1"/>
-          </a:lnRef>
-          <a:fillRef idx="3">
-            <a:schemeClr val="accent1"/>
-          </a:fillRef>
-          <a:effectRef idx="2">
-            <a:schemeClr val="accent1"/>
-          </a:effectRef>
-          <a:fontRef idx="minor">
-            <a:schemeClr val="lt1"/>
-          </a:fontRef>
-        </p:style>
-        <p:txBody>
-          <a:bodyPr rtlCol="0" anchor="ctr"/>
-          <a:lstStyle/>
-          <a:p>
-            <a:pPr algn="ctr"/>
-          </a:p>
-        </p:txBody>
-      </p:sp>
-      <p:sp>
-        <p:nvSpPr>
-          <p:cNvPr id="113" name="Oval 112"/>
-          <p:cNvSpPr/>
-          <p:nvPr/>
-        </p:nvSpPr>
-        <p:spPr>
-          <a:xfrm>
-            <a:off x="9379575" y="10385571"/>
-            <a:ext cx="165811" cy="165811"/>
-          </a:xfrm>
-          <a:prstGeom prst="ellipse">
-            <a:avLst/>
-          </a:prstGeom>
-          <a:solidFill>
-            <a:srgbClr val="C09D7F"/>
-          </a:solidFill>
-          <a:ln>
-            <a:noFill/>
-          </a:ln>
-          <a:effectLst/>
-        </p:spPr>
-        <p:style>
-          <a:lnRef idx="1">
-            <a:schemeClr val="accent1"/>
-          </a:lnRef>
-          <a:fillRef idx="3">
-            <a:schemeClr val="accent1"/>
-          </a:fillRef>
-          <a:effectRef idx="2">
-            <a:schemeClr val="accent1"/>
-          </a:effectRef>
-          <a:fontRef idx="minor">
-            <a:schemeClr val="lt1"/>
-          </a:fontRef>
-        </p:style>
-        <p:txBody>
-          <a:bodyPr rtlCol="0" anchor="ctr"/>
-          <a:lstStyle/>
-          <a:p>
-            <a:pPr algn="ctr"/>
-          </a:p>
-        </p:txBody>
-      </p:sp>
-      <p:sp>
-        <p:nvSpPr>
-          <p:cNvPr id="114" name="Oval 113"/>
-          <p:cNvSpPr/>
-          <p:nvPr/>
-        </p:nvSpPr>
-        <p:spPr>
-          <a:xfrm>
-            <a:off x="8738210" y="10556317"/>
-            <a:ext cx="86589" cy="86589"/>
-          </a:xfrm>
-          <a:prstGeom prst="ellipse">
-            <a:avLst/>
-          </a:prstGeom>
-          <a:solidFill>
-            <a:srgbClr val="31662F"/>
-          </a:solidFill>
-          <a:ln>
-            <a:noFill/>
-          </a:ln>
-          <a:effectLst/>
-        </p:spPr>
-        <p:style>
-          <a:lnRef idx="1">
-            <a:schemeClr val="accent1"/>
-          </a:lnRef>
-          <a:fillRef idx="3">
-            <a:schemeClr val="accent1"/>
-          </a:fillRef>
-          <a:effectRef idx="2">
-            <a:schemeClr val="accent1"/>
-          </a:effectRef>
-          <a:fontRef idx="minor">
-            <a:schemeClr val="lt1"/>
-          </a:fontRef>
-        </p:style>
-        <p:txBody>
-          <a:bodyPr rtlCol="0" anchor="ctr"/>
-          <a:lstStyle/>
-          <a:p>
-            <a:pPr algn="ctr"/>
-          </a:p>
-        </p:txBody>
-      </p:sp>
-      <p:sp>
-        <p:nvSpPr>
-          <p:cNvPr id="115" name="Oval 114"/>
-          <p:cNvSpPr/>
-          <p:nvPr/>
-        </p:nvSpPr>
-        <p:spPr>
-          <a:xfrm>
-            <a:off x="1624200" y="11168911"/>
-            <a:ext cx="138196" cy="138196"/>
-          </a:xfrm>
-          <a:prstGeom prst="ellipse">
-            <a:avLst/>
-          </a:prstGeom>
-          <a:solidFill>
-            <a:srgbClr val="4C3634"/>
-          </a:solidFill>
-          <a:ln>
-            <a:noFill/>
-          </a:ln>
-          <a:effectLst/>
-        </p:spPr>
-        <p:style>
-          <a:lnRef idx="1">
-            <a:schemeClr val="accent1"/>
-          </a:lnRef>
-          <a:fillRef idx="3">
-            <a:schemeClr val="accent1"/>
-          </a:fillRef>
-          <a:effectRef idx="2">
-            <a:schemeClr val="accent1"/>
-          </a:effectRef>
-          <a:fontRef idx="minor">
-            <a:schemeClr val="lt1"/>
-          </a:fontRef>
-        </p:style>
-        <p:txBody>
-          <a:bodyPr rtlCol="0" anchor="ctr"/>
-          <a:lstStyle/>
-          <a:p>
-            <a:pPr algn="ctr"/>
-          </a:p>
-        </p:txBody>
-      </p:sp>
       <p:pic>
         <p:nvPicPr>
-          <p:cNvPr id="116" name="Picture 115" descr="foundation-logo-color.png"/>
+          <p:cNvPr id="127" name="Picture 126" descr="foundation-logo-color.png"/>
           <p:cNvPicPr>
             <a:picLocks noChangeAspect="1"/>
           </p:cNvPicPr>
           <p:nvPr/>
         </p:nvPicPr>
         <p:blipFill>
-          <a:blip r:embed="rId8"/>
+          <a:blip r:embed="rId3"/>
           <a:stretch>
             <a:fillRect/>
           </a:stretch>
@@ -14195,7 +14779,7 @@
       </p:sp>
       <p:pic>
         <p:nvPicPr>
-          <p:cNvPr id="69" name="Picture 68" descr="894524731619023401.jpg"/>
+          <p:cNvPr id="69" name="Picture 68" descr="2434527820232444417.jpg"/>
           <p:cNvPicPr>
             <a:picLocks noChangeAspect="1"/>
           </p:cNvPicPr>
@@ -14304,7 +14888,7 @@
       </p:sp>
       <p:pic>
         <p:nvPicPr>
-          <p:cNvPr id="72" name="Picture 71" descr="7427239733233723794.jpg"/>
+          <p:cNvPr id="72" name="Picture 71" descr="1000714845004509693.jpg"/>
           <p:cNvPicPr>
             <a:picLocks noChangeAspect="1"/>
           </p:cNvPicPr>
@@ -14413,7 +14997,7 @@
       </p:sp>
       <p:pic>
         <p:nvPicPr>
-          <p:cNvPr id="75" name="Picture 74" descr="6023360388099870640.jpg"/>
+          <p:cNvPr id="75" name="Picture 74" descr="4555583047526390395.jpg"/>
           <p:cNvPicPr>
             <a:picLocks noChangeAspect="1"/>
           </p:cNvPicPr>
@@ -14522,7 +15106,7 @@
       </p:sp>
       <p:pic>
         <p:nvPicPr>
-          <p:cNvPr id="78" name="Picture 77" descr="8080359357829165426.jpg"/>
+          <p:cNvPr id="78" name="Picture 77" descr="3404798177016875823.jpg"/>
           <p:cNvPicPr>
             <a:picLocks noChangeAspect="1"/>
           </p:cNvPicPr>
@@ -14631,7 +15215,7 @@
       </p:sp>
       <p:pic>
         <p:nvPicPr>
-          <p:cNvPr id="81" name="Picture 80" descr="1974356426881197837.jpg"/>
+          <p:cNvPr id="81" name="Picture 80" descr="2211596369159362971.jpg"/>
           <p:cNvPicPr>
             <a:picLocks noChangeAspect="1"/>
           </p:cNvPicPr>
@@ -14740,7 +15324,7 @@
       </p:sp>
       <p:pic>
         <p:nvPicPr>
-          <p:cNvPr id="84" name="Picture 83" descr="3027816981463207685.jpg"/>
+          <p:cNvPr id="84" name="Picture 83" descr="4958046341648927289.jpg"/>
           <p:cNvPicPr>
             <a:picLocks noChangeAspect="1"/>
           </p:cNvPicPr>
@@ -14849,7 +15433,7 @@
       </p:sp>
       <p:pic>
         <p:nvPicPr>
-          <p:cNvPr id="87" name="Picture 86" descr="6422877592201863816.jpg"/>
+          <p:cNvPr id="87" name="Picture 86" descr="8688420958633461341.jpg"/>
           <p:cNvPicPr>
             <a:picLocks noChangeAspect="1"/>
           </p:cNvPicPr>
@@ -14958,7 +15542,7 @@
       </p:sp>
       <p:pic>
         <p:nvPicPr>
-          <p:cNvPr id="90" name="Picture 89" descr="5196354255928742527.jpg"/>
+          <p:cNvPr id="90" name="Picture 89" descr="4546600180924043180.jpg"/>
           <p:cNvPicPr>
             <a:picLocks noChangeAspect="1"/>
           </p:cNvPicPr>
@@ -15067,7 +15651,7 @@
       </p:sp>
       <p:pic>
         <p:nvPicPr>
-          <p:cNvPr id="93" name="Picture 92" descr="1839049045767413403.jpg"/>
+          <p:cNvPr id="93" name="Picture 92" descr="1419517534166441101.jpg"/>
           <p:cNvPicPr>
             <a:picLocks noChangeAspect="1"/>
           </p:cNvPicPr>
@@ -15176,7 +15760,7 @@
       </p:sp>
       <p:pic>
         <p:nvPicPr>
-          <p:cNvPr id="96" name="Picture 95" descr="3635735852169036292.jpg"/>
+          <p:cNvPr id="96" name="Picture 95" descr="376603766941083699.jpg"/>
           <p:cNvPicPr>
             <a:picLocks noChangeAspect="1"/>
           </p:cNvPicPr>
@@ -15285,7 +15869,7 @@
       </p:sp>
       <p:pic>
         <p:nvPicPr>
-          <p:cNvPr id="99" name="Picture 98" descr="5747755529844054742.jpg"/>
+          <p:cNvPr id="99" name="Picture 98" descr="2247470644392744674.jpg"/>
           <p:cNvPicPr>
             <a:picLocks noChangeAspect="1"/>
           </p:cNvPicPr>
@@ -15394,7 +15978,7 @@
       </p:sp>
       <p:pic>
         <p:nvPicPr>
-          <p:cNvPr id="102" name="Picture 101" descr="8399190351064505002.jpg"/>
+          <p:cNvPr id="102" name="Picture 101" descr="9158947755014907440.jpg"/>
           <p:cNvPicPr>
             <a:picLocks noChangeAspect="1"/>
           </p:cNvPicPr>
@@ -15503,7 +16087,7 @@
       </p:sp>
       <p:pic>
         <p:nvPicPr>
-          <p:cNvPr id="105" name="Picture 104" descr="5842563647999390999.jpg"/>
+          <p:cNvPr id="105" name="Picture 104" descr="175810135765887123.jpg"/>
           <p:cNvPicPr>
             <a:picLocks noChangeAspect="1"/>
           </p:cNvPicPr>
@@ -15612,7 +16196,7 @@
       </p:sp>
       <p:pic>
         <p:nvPicPr>
-          <p:cNvPr id="108" name="Picture 107" descr="1503839733146406453.jpg"/>
+          <p:cNvPr id="108" name="Picture 107" descr="8454356666220585455.jpg"/>
           <p:cNvPicPr>
             <a:picLocks noChangeAspect="1"/>
           </p:cNvPicPr>

--- a/templates/posts/october/05-10-2026-mon-ig-teachers-day-option-2-bunting.pptx
+++ b/templates/posts/october/05-10-2026-mon-ig-teachers-day-option-2-bunting.pptx
@@ -34505,7 +34505,7 @@
       </p:sp>
       <p:pic>
         <p:nvPicPr>
-          <p:cNvPr id="69" name="Picture 68" descr="2270990918217472394.jpg"/>
+          <p:cNvPr id="69" name="Picture 68" descr="9036284228287914251.jpg"/>
           <p:cNvPicPr>
             <a:picLocks noChangeAspect="1"/>
           </p:cNvPicPr>
@@ -34614,7 +34614,7 @@
       </p:sp>
       <p:pic>
         <p:nvPicPr>
-          <p:cNvPr id="72" name="Picture 71" descr="7392069005057952215.jpg"/>
+          <p:cNvPr id="72" name="Picture 71" descr="7264490724320908151.jpg"/>
           <p:cNvPicPr>
             <a:picLocks noChangeAspect="1"/>
           </p:cNvPicPr>
@@ -34723,7 +34723,7 @@
       </p:sp>
       <p:pic>
         <p:nvPicPr>
-          <p:cNvPr id="75" name="Picture 74" descr="2120264185869255123.jpg"/>
+          <p:cNvPr id="75" name="Picture 74" descr="9106841745323230857.jpg"/>
           <p:cNvPicPr>
             <a:picLocks noChangeAspect="1"/>
           </p:cNvPicPr>
@@ -34832,7 +34832,7 @@
       </p:sp>
       <p:pic>
         <p:nvPicPr>
-          <p:cNvPr id="78" name="Picture 77" descr="9218185789869299862.jpg"/>
+          <p:cNvPr id="78" name="Picture 77" descr="6445759230204725191.jpg"/>
           <p:cNvPicPr>
             <a:picLocks noChangeAspect="1"/>
           </p:cNvPicPr>
@@ -34941,7 +34941,7 @@
       </p:sp>
       <p:pic>
         <p:nvPicPr>
-          <p:cNvPr id="81" name="Picture 80" descr="764028230434961015.jpg"/>
+          <p:cNvPr id="81" name="Picture 80" descr="8803819581641044895.jpg"/>
           <p:cNvPicPr>
             <a:picLocks noChangeAspect="1"/>
           </p:cNvPicPr>
@@ -35050,7 +35050,7 @@
       </p:sp>
       <p:pic>
         <p:nvPicPr>
-          <p:cNvPr id="84" name="Picture 83" descr="3872467728124968485.jpg"/>
+          <p:cNvPr id="84" name="Picture 83" descr="8536373804798833227.jpg"/>
           <p:cNvPicPr>
             <a:picLocks noChangeAspect="1"/>
           </p:cNvPicPr>
@@ -35159,7 +35159,7 @@
       </p:sp>
       <p:pic>
         <p:nvPicPr>
-          <p:cNvPr id="87" name="Picture 86" descr="7768563020045296748.jpg"/>
+          <p:cNvPr id="87" name="Picture 86" descr="8164580861635186193.jpg"/>
           <p:cNvPicPr>
             <a:picLocks noChangeAspect="1"/>
           </p:cNvPicPr>
@@ -35268,7 +35268,7 @@
       </p:sp>
       <p:pic>
         <p:nvPicPr>
-          <p:cNvPr id="90" name="Picture 89" descr="188478169412812041.jpg"/>
+          <p:cNvPr id="90" name="Picture 89" descr="2894971483344189381.jpg"/>
           <p:cNvPicPr>
             <a:picLocks noChangeAspect="1"/>
           </p:cNvPicPr>
@@ -35377,7 +35377,7 @@
       </p:sp>
       <p:pic>
         <p:nvPicPr>
-          <p:cNvPr id="93" name="Picture 92" descr="7285083055156648169.jpg"/>
+          <p:cNvPr id="93" name="Picture 92" descr="454656652608966177.jpg"/>
           <p:cNvPicPr>
             <a:picLocks noChangeAspect="1"/>
           </p:cNvPicPr>
@@ -35486,7 +35486,7 @@
       </p:sp>
       <p:pic>
         <p:nvPicPr>
-          <p:cNvPr id="96" name="Picture 95" descr="3298387358523767450.jpg"/>
+          <p:cNvPr id="96" name="Picture 95" descr="3512431765128565377.jpg"/>
           <p:cNvPicPr>
             <a:picLocks noChangeAspect="1"/>
           </p:cNvPicPr>
@@ -35595,7 +35595,7 @@
       </p:sp>
       <p:pic>
         <p:nvPicPr>
-          <p:cNvPr id="99" name="Picture 98" descr="2984603724377360682.jpg"/>
+          <p:cNvPr id="99" name="Picture 98" descr="9208379026975339746.jpg"/>
           <p:cNvPicPr>
             <a:picLocks noChangeAspect="1"/>
           </p:cNvPicPr>
@@ -35704,7 +35704,7 @@
       </p:sp>
       <p:pic>
         <p:nvPicPr>
-          <p:cNvPr id="102" name="Picture 101" descr="3815489264604009436.jpg"/>
+          <p:cNvPr id="102" name="Picture 101" descr="8672761161464777380.jpg"/>
           <p:cNvPicPr>
             <a:picLocks noChangeAspect="1"/>
           </p:cNvPicPr>
@@ -35813,7 +35813,7 @@
       </p:sp>
       <p:pic>
         <p:nvPicPr>
-          <p:cNvPr id="105" name="Picture 104" descr="6333570285111628965.jpg"/>
+          <p:cNvPr id="105" name="Picture 104" descr="3359842666902028946.jpg"/>
           <p:cNvPicPr>
             <a:picLocks noChangeAspect="1"/>
           </p:cNvPicPr>
@@ -35922,7 +35922,7 @@
       </p:sp>
       <p:pic>
         <p:nvPicPr>
-          <p:cNvPr id="108" name="Picture 107" descr="4832778074727187405.jpg"/>
+          <p:cNvPr id="108" name="Picture 107" descr="8025998113937040021.jpg"/>
           <p:cNvPicPr>
             <a:picLocks noChangeAspect="1"/>
           </p:cNvPicPr>

--- a/templates/posts/october/05-10-2026-mon-ig-teachers-day-option-2-bunting.pptx
+++ b/templates/posts/october/05-10-2026-mon-ig-teachers-day-option-2-bunting.pptx
@@ -34503,9 +34503,48 @@
           </a:p>
         </p:txBody>
       </p:sp>
+      <p:sp>
+        <p:nvSpPr>
+          <p:cNvPr id="69" name="TextBox 68"/>
+          <p:cNvSpPr txBox="1"/>
+          <p:nvPr/>
+        </p:nvSpPr>
+        <p:spPr>
+          <a:xfrm>
+            <a:off x="495300" y="2190750"/>
+            <a:ext cx="4572000" cy="2286000"/>
+          </a:xfrm>
+          <a:prstGeom prst="rect">
+            <a:avLst/>
+          </a:prstGeom>
+          <a:noFill/>
+        </p:spPr>
+        <p:txBody>
+          <a:bodyPr wrap="square" lIns="0" rIns="0" tIns="0" bIns="0" anchor="ctr">
+            <a:spAutoFit/>
+          </a:bodyPr>
+          <a:lstStyle/>
+          <a:p>
+            <a:pPr algn="l">
+              <a:lnSpc>
+                <a:spcPct val="100000"/>
+              </a:lnSpc>
+            </a:pPr>
+            <a:r>
+              <a:rPr sz="4000" b="1" i="0">
+                <a:solidFill>
+                  <a:srgbClr val="31662F"/>
+                </a:solidFill>
+                <a:latin typeface="Montserrat"/>
+              </a:rPr>
+              <a:t>Happy World Teachers' Day</a:t>
+            </a:r>
+          </a:p>
+        </p:txBody>
+      </p:sp>
       <p:pic>
         <p:nvPicPr>
-          <p:cNvPr id="69" name="Picture 68" descr="9036284228287914251.jpg"/>
+          <p:cNvPr id="70" name="Picture 69" descr="4408951095294771185.jpg"/>
           <p:cNvPicPr>
             <a:picLocks noChangeAspect="1"/>
           </p:cNvPicPr>
@@ -34519,7 +34558,7 @@
         </p:blipFill>
         <p:spPr>
           <a:xfrm>
-            <a:off x="457200" y="2190750"/>
+            <a:off x="5181600" y="2190750"/>
             <a:ext cx="2286000" cy="2286000"/>
           </a:xfrm>
           <a:prstGeom prst="rect">
@@ -34529,13 +34568,13 @@
       </p:pic>
       <p:sp>
         <p:nvSpPr>
-          <p:cNvPr id="70" name="Rectangle 69"/>
-          <p:cNvSpPr/>
-          <p:nvPr/>
-        </p:nvSpPr>
-        <p:spPr>
-          <a:xfrm>
-            <a:off x="457200" y="4057650"/>
+          <p:cNvPr id="71" name="Rectangle 70"/>
+          <p:cNvSpPr/>
+          <p:nvPr/>
+        </p:nvSpPr>
+        <p:spPr>
+          <a:xfrm>
+            <a:off x="5181600" y="4057650"/>
             <a:ext cx="2286000" cy="419100"/>
           </a:xfrm>
           <a:prstGeom prst="rect">
@@ -34575,13 +34614,13 @@
       </p:sp>
       <p:sp>
         <p:nvSpPr>
-          <p:cNvPr id="71" name="TextBox 70"/>
+          <p:cNvPr id="72" name="TextBox 71"/>
           <p:cNvSpPr txBox="1"/>
           <p:nvPr/>
         </p:nvSpPr>
         <p:spPr>
           <a:xfrm>
-            <a:off x="514350" y="4057650"/>
+            <a:off x="5238750" y="4057650"/>
             <a:ext cx="2171700" cy="419100"/>
           </a:xfrm>
           <a:prstGeom prst="rect">
@@ -34614,7 +34653,7 @@
       </p:sp>
       <p:pic>
         <p:nvPicPr>
-          <p:cNvPr id="72" name="Picture 71" descr="7264490724320908151.jpg"/>
+          <p:cNvPr id="73" name="Picture 72" descr="2053480673178515544.jpg"/>
           <p:cNvPicPr>
             <a:picLocks noChangeAspect="1"/>
           </p:cNvPicPr>
@@ -34628,7 +34667,7 @@
         </p:blipFill>
         <p:spPr>
           <a:xfrm>
-            <a:off x="2819400" y="2190750"/>
+            <a:off x="7543800" y="2190750"/>
             <a:ext cx="2286000" cy="2286000"/>
           </a:xfrm>
           <a:prstGeom prst="rect">
@@ -34638,13 +34677,13 @@
       </p:pic>
       <p:sp>
         <p:nvSpPr>
-          <p:cNvPr id="73" name="Rectangle 72"/>
-          <p:cNvSpPr/>
-          <p:nvPr/>
-        </p:nvSpPr>
-        <p:spPr>
-          <a:xfrm>
-            <a:off x="2819400" y="4057650"/>
+          <p:cNvPr id="74" name="Rectangle 73"/>
+          <p:cNvSpPr/>
+          <p:nvPr/>
+        </p:nvSpPr>
+        <p:spPr>
+          <a:xfrm>
+            <a:off x="7543800" y="4057650"/>
             <a:ext cx="2286000" cy="419100"/>
           </a:xfrm>
           <a:prstGeom prst="rect">
@@ -34684,13 +34723,13 @@
       </p:sp>
       <p:sp>
         <p:nvSpPr>
-          <p:cNvPr id="74" name="TextBox 73"/>
+          <p:cNvPr id="75" name="TextBox 74"/>
           <p:cNvSpPr txBox="1"/>
           <p:nvPr/>
         </p:nvSpPr>
         <p:spPr>
           <a:xfrm>
-            <a:off x="2876550" y="4057650"/>
+            <a:off x="7600950" y="4057650"/>
             <a:ext cx="2171700" cy="419100"/>
           </a:xfrm>
           <a:prstGeom prst="rect">
@@ -34723,7 +34762,7 @@
       </p:sp>
       <p:pic>
         <p:nvPicPr>
-          <p:cNvPr id="75" name="Picture 74" descr="9106841745323230857.jpg"/>
+          <p:cNvPr id="76" name="Picture 75" descr="8526052707322937247.jpg"/>
           <p:cNvPicPr>
             <a:picLocks noChangeAspect="1"/>
           </p:cNvPicPr>
@@ -34737,7 +34776,7 @@
         </p:blipFill>
         <p:spPr>
           <a:xfrm>
-            <a:off x="5181600" y="2190750"/>
+            <a:off x="457200" y="4552950"/>
             <a:ext cx="2286000" cy="2286000"/>
           </a:xfrm>
           <a:prstGeom prst="rect">
@@ -34747,13 +34786,13 @@
       </p:pic>
       <p:sp>
         <p:nvSpPr>
-          <p:cNvPr id="76" name="Rectangle 75"/>
-          <p:cNvSpPr/>
-          <p:nvPr/>
-        </p:nvSpPr>
-        <p:spPr>
-          <a:xfrm>
-            <a:off x="5181600" y="4057650"/>
+          <p:cNvPr id="77" name="Rectangle 76"/>
+          <p:cNvSpPr/>
+          <p:nvPr/>
+        </p:nvSpPr>
+        <p:spPr>
+          <a:xfrm>
+            <a:off x="457200" y="6419850"/>
             <a:ext cx="2286000" cy="419100"/>
           </a:xfrm>
           <a:prstGeom prst="rect">
@@ -34793,13 +34832,13 @@
       </p:sp>
       <p:sp>
         <p:nvSpPr>
-          <p:cNvPr id="77" name="TextBox 76"/>
+          <p:cNvPr id="78" name="TextBox 77"/>
           <p:cNvSpPr txBox="1"/>
           <p:nvPr/>
         </p:nvSpPr>
         <p:spPr>
           <a:xfrm>
-            <a:off x="5238750" y="4057650"/>
+            <a:off x="514350" y="6419850"/>
             <a:ext cx="2171700" cy="419100"/>
           </a:xfrm>
           <a:prstGeom prst="rect">
@@ -34832,7 +34871,7 @@
       </p:sp>
       <p:pic>
         <p:nvPicPr>
-          <p:cNvPr id="78" name="Picture 77" descr="6445759230204725191.jpg"/>
+          <p:cNvPr id="79" name="Picture 78" descr="4463640484023020558.jpg"/>
           <p:cNvPicPr>
             <a:picLocks noChangeAspect="1"/>
           </p:cNvPicPr>
@@ -34846,7 +34885,7 @@
         </p:blipFill>
         <p:spPr>
           <a:xfrm>
-            <a:off x="7543800" y="2190750"/>
+            <a:off x="2819400" y="4552950"/>
             <a:ext cx="2286000" cy="2286000"/>
           </a:xfrm>
           <a:prstGeom prst="rect">
@@ -34856,13 +34895,13 @@
       </p:pic>
       <p:sp>
         <p:nvSpPr>
-          <p:cNvPr id="79" name="Rectangle 78"/>
-          <p:cNvSpPr/>
-          <p:nvPr/>
-        </p:nvSpPr>
-        <p:spPr>
-          <a:xfrm>
-            <a:off x="7543800" y="4057650"/>
+          <p:cNvPr id="80" name="Rectangle 79"/>
+          <p:cNvSpPr/>
+          <p:nvPr/>
+        </p:nvSpPr>
+        <p:spPr>
+          <a:xfrm>
+            <a:off x="2819400" y="6419850"/>
             <a:ext cx="2286000" cy="419100"/>
           </a:xfrm>
           <a:prstGeom prst="rect">
@@ -34902,13 +34941,13 @@
       </p:sp>
       <p:sp>
         <p:nvSpPr>
-          <p:cNvPr id="80" name="TextBox 79"/>
+          <p:cNvPr id="81" name="TextBox 80"/>
           <p:cNvSpPr txBox="1"/>
           <p:nvPr/>
         </p:nvSpPr>
         <p:spPr>
           <a:xfrm>
-            <a:off x="7600950" y="4057650"/>
+            <a:off x="2876550" y="6419850"/>
             <a:ext cx="2171700" cy="419100"/>
           </a:xfrm>
           <a:prstGeom prst="rect">
@@ -34941,7 +34980,7 @@
       </p:sp>
       <p:pic>
         <p:nvPicPr>
-          <p:cNvPr id="81" name="Picture 80" descr="8803819581641044895.jpg"/>
+          <p:cNvPr id="82" name="Picture 81" descr="2262292987271407235.jpg"/>
           <p:cNvPicPr>
             <a:picLocks noChangeAspect="1"/>
           </p:cNvPicPr>
@@ -34955,7 +34994,7 @@
         </p:blipFill>
         <p:spPr>
           <a:xfrm>
-            <a:off x="1638300" y="4552950"/>
+            <a:off x="5181600" y="4552950"/>
             <a:ext cx="2286000" cy="2286000"/>
           </a:xfrm>
           <a:prstGeom prst="rect">
@@ -34965,13 +35004,13 @@
       </p:pic>
       <p:sp>
         <p:nvSpPr>
-          <p:cNvPr id="82" name="Rectangle 81"/>
-          <p:cNvSpPr/>
-          <p:nvPr/>
-        </p:nvSpPr>
-        <p:spPr>
-          <a:xfrm>
-            <a:off x="1638300" y="6419850"/>
+          <p:cNvPr id="83" name="Rectangle 82"/>
+          <p:cNvSpPr/>
+          <p:nvPr/>
+        </p:nvSpPr>
+        <p:spPr>
+          <a:xfrm>
+            <a:off x="5181600" y="6419850"/>
             <a:ext cx="2286000" cy="419100"/>
           </a:xfrm>
           <a:prstGeom prst="rect">
@@ -35011,13 +35050,13 @@
       </p:sp>
       <p:sp>
         <p:nvSpPr>
-          <p:cNvPr id="83" name="TextBox 82"/>
+          <p:cNvPr id="84" name="TextBox 83"/>
           <p:cNvSpPr txBox="1"/>
           <p:nvPr/>
         </p:nvSpPr>
         <p:spPr>
           <a:xfrm>
-            <a:off x="1695450" y="6419850"/>
+            <a:off x="5238750" y="6419850"/>
             <a:ext cx="2171700" cy="419100"/>
           </a:xfrm>
           <a:prstGeom prst="rect">
@@ -35050,7 +35089,7 @@
       </p:sp>
       <p:pic>
         <p:nvPicPr>
-          <p:cNvPr id="84" name="Picture 83" descr="8536373804798833227.jpg"/>
+          <p:cNvPr id="85" name="Picture 84" descr="9013575186157804863.jpg"/>
           <p:cNvPicPr>
             <a:picLocks noChangeAspect="1"/>
           </p:cNvPicPr>
@@ -35064,7 +35103,7 @@
         </p:blipFill>
         <p:spPr>
           <a:xfrm>
-            <a:off x="4000500" y="4552950"/>
+            <a:off x="7543800" y="4552950"/>
             <a:ext cx="2286000" cy="2286000"/>
           </a:xfrm>
           <a:prstGeom prst="rect">
@@ -35074,13 +35113,13 @@
       </p:pic>
       <p:sp>
         <p:nvSpPr>
-          <p:cNvPr id="85" name="Rectangle 84"/>
-          <p:cNvSpPr/>
-          <p:nvPr/>
-        </p:nvSpPr>
-        <p:spPr>
-          <a:xfrm>
-            <a:off x="4000500" y="6419850"/>
+          <p:cNvPr id="86" name="Rectangle 85"/>
+          <p:cNvSpPr/>
+          <p:nvPr/>
+        </p:nvSpPr>
+        <p:spPr>
+          <a:xfrm>
+            <a:off x="7543800" y="6419850"/>
             <a:ext cx="2286000" cy="419100"/>
           </a:xfrm>
           <a:prstGeom prst="rect">
@@ -35120,13 +35159,13 @@
       </p:sp>
       <p:sp>
         <p:nvSpPr>
-          <p:cNvPr id="86" name="TextBox 85"/>
+          <p:cNvPr id="87" name="TextBox 86"/>
           <p:cNvSpPr txBox="1"/>
           <p:nvPr/>
         </p:nvSpPr>
         <p:spPr>
           <a:xfrm>
-            <a:off x="4057650" y="6419850"/>
+            <a:off x="7600950" y="6419850"/>
             <a:ext cx="2171700" cy="419100"/>
           </a:xfrm>
           <a:prstGeom prst="rect">
@@ -35159,7 +35198,7 @@
       </p:sp>
       <p:pic>
         <p:nvPicPr>
-          <p:cNvPr id="87" name="Picture 86" descr="8164580861635186193.jpg"/>
+          <p:cNvPr id="88" name="Picture 87" descr="5529725699895573590.jpg"/>
           <p:cNvPicPr>
             <a:picLocks noChangeAspect="1"/>
           </p:cNvPicPr>
@@ -35173,7 +35212,7 @@
         </p:blipFill>
         <p:spPr>
           <a:xfrm>
-            <a:off x="6362700" y="4552950"/>
+            <a:off x="457200" y="6915150"/>
             <a:ext cx="2286000" cy="2286000"/>
           </a:xfrm>
           <a:prstGeom prst="rect">
@@ -35183,13 +35222,13 @@
       </p:pic>
       <p:sp>
         <p:nvSpPr>
-          <p:cNvPr id="88" name="Rectangle 87"/>
-          <p:cNvSpPr/>
-          <p:nvPr/>
-        </p:nvSpPr>
-        <p:spPr>
-          <a:xfrm>
-            <a:off x="6362700" y="6419850"/>
+          <p:cNvPr id="89" name="Rectangle 88"/>
+          <p:cNvSpPr/>
+          <p:nvPr/>
+        </p:nvSpPr>
+        <p:spPr>
+          <a:xfrm>
+            <a:off x="457200" y="8782050"/>
             <a:ext cx="2286000" cy="419100"/>
           </a:xfrm>
           <a:prstGeom prst="rect">
@@ -35229,13 +35268,13 @@
       </p:sp>
       <p:sp>
         <p:nvSpPr>
-          <p:cNvPr id="89" name="TextBox 88"/>
+          <p:cNvPr id="90" name="TextBox 89"/>
           <p:cNvSpPr txBox="1"/>
           <p:nvPr/>
         </p:nvSpPr>
         <p:spPr>
           <a:xfrm>
-            <a:off x="6419850" y="6419850"/>
+            <a:off x="514350" y="8782050"/>
             <a:ext cx="2171700" cy="419100"/>
           </a:xfrm>
           <a:prstGeom prst="rect">
@@ -35268,7 +35307,7 @@
       </p:sp>
       <p:pic>
         <p:nvPicPr>
-          <p:cNvPr id="90" name="Picture 89" descr="2894971483344189381.jpg"/>
+          <p:cNvPr id="91" name="Picture 90" descr="2407624395823463407.jpg"/>
           <p:cNvPicPr>
             <a:picLocks noChangeAspect="1"/>
           </p:cNvPicPr>
@@ -35282,7 +35321,7 @@
         </p:blipFill>
         <p:spPr>
           <a:xfrm>
-            <a:off x="457200" y="6915150"/>
+            <a:off x="2819400" y="6915150"/>
             <a:ext cx="2286000" cy="2286000"/>
           </a:xfrm>
           <a:prstGeom prst="rect">
@@ -35292,13 +35331,13 @@
       </p:pic>
       <p:sp>
         <p:nvSpPr>
-          <p:cNvPr id="91" name="Rectangle 90"/>
-          <p:cNvSpPr/>
-          <p:nvPr/>
-        </p:nvSpPr>
-        <p:spPr>
-          <a:xfrm>
-            <a:off x="457200" y="8782050"/>
+          <p:cNvPr id="92" name="Rectangle 91"/>
+          <p:cNvSpPr/>
+          <p:nvPr/>
+        </p:nvSpPr>
+        <p:spPr>
+          <a:xfrm>
+            <a:off x="2819400" y="8782050"/>
             <a:ext cx="2286000" cy="419100"/>
           </a:xfrm>
           <a:prstGeom prst="rect">
@@ -35338,13 +35377,13 @@
       </p:sp>
       <p:sp>
         <p:nvSpPr>
-          <p:cNvPr id="92" name="TextBox 91"/>
+          <p:cNvPr id="93" name="TextBox 92"/>
           <p:cNvSpPr txBox="1"/>
           <p:nvPr/>
         </p:nvSpPr>
         <p:spPr>
           <a:xfrm>
-            <a:off x="514350" y="8782050"/>
+            <a:off x="2876550" y="8782050"/>
             <a:ext cx="2171700" cy="419100"/>
           </a:xfrm>
           <a:prstGeom prst="rect">
@@ -35377,7 +35416,7 @@
       </p:sp>
       <p:pic>
         <p:nvPicPr>
-          <p:cNvPr id="93" name="Picture 92" descr="454656652608966177.jpg"/>
+          <p:cNvPr id="94" name="Picture 93" descr="1164985834360799692.jpg"/>
           <p:cNvPicPr>
             <a:picLocks noChangeAspect="1"/>
           </p:cNvPicPr>
@@ -35391,7 +35430,7 @@
         </p:blipFill>
         <p:spPr>
           <a:xfrm>
-            <a:off x="2819400" y="6915150"/>
+            <a:off x="5181600" y="6915150"/>
             <a:ext cx="2286000" cy="2286000"/>
           </a:xfrm>
           <a:prstGeom prst="rect">
@@ -35401,13 +35440,13 @@
       </p:pic>
       <p:sp>
         <p:nvSpPr>
-          <p:cNvPr id="94" name="Rectangle 93"/>
-          <p:cNvSpPr/>
-          <p:nvPr/>
-        </p:nvSpPr>
-        <p:spPr>
-          <a:xfrm>
-            <a:off x="2819400" y="8782050"/>
+          <p:cNvPr id="95" name="Rectangle 94"/>
+          <p:cNvSpPr/>
+          <p:nvPr/>
+        </p:nvSpPr>
+        <p:spPr>
+          <a:xfrm>
+            <a:off x="5181600" y="8782050"/>
             <a:ext cx="2286000" cy="419100"/>
           </a:xfrm>
           <a:prstGeom prst="rect">
@@ -35447,13 +35486,13 @@
       </p:sp>
       <p:sp>
         <p:nvSpPr>
-          <p:cNvPr id="95" name="TextBox 94"/>
+          <p:cNvPr id="96" name="TextBox 95"/>
           <p:cNvSpPr txBox="1"/>
           <p:nvPr/>
         </p:nvSpPr>
         <p:spPr>
           <a:xfrm>
-            <a:off x="2876550" y="8782050"/>
+            <a:off x="5238750" y="8782050"/>
             <a:ext cx="2171700" cy="419100"/>
           </a:xfrm>
           <a:prstGeom prst="rect">
@@ -35486,7 +35525,7 @@
       </p:sp>
       <p:pic>
         <p:nvPicPr>
-          <p:cNvPr id="96" name="Picture 95" descr="3512431765128565377.jpg"/>
+          <p:cNvPr id="97" name="Picture 96" descr="2031739261793493277.jpg"/>
           <p:cNvPicPr>
             <a:picLocks noChangeAspect="1"/>
           </p:cNvPicPr>
@@ -35500,7 +35539,7 @@
         </p:blipFill>
         <p:spPr>
           <a:xfrm>
-            <a:off x="5181600" y="6915150"/>
+            <a:off x="7543800" y="6915150"/>
             <a:ext cx="2286000" cy="2286000"/>
           </a:xfrm>
           <a:prstGeom prst="rect">
@@ -35510,13 +35549,13 @@
       </p:pic>
       <p:sp>
         <p:nvSpPr>
-          <p:cNvPr id="97" name="Rectangle 96"/>
-          <p:cNvSpPr/>
-          <p:nvPr/>
-        </p:nvSpPr>
-        <p:spPr>
-          <a:xfrm>
-            <a:off x="5181600" y="8782050"/>
+          <p:cNvPr id="98" name="Rectangle 97"/>
+          <p:cNvSpPr/>
+          <p:nvPr/>
+        </p:nvSpPr>
+        <p:spPr>
+          <a:xfrm>
+            <a:off x="7543800" y="8782050"/>
             <a:ext cx="2286000" cy="419100"/>
           </a:xfrm>
           <a:prstGeom prst="rect">
@@ -35556,13 +35595,13 @@
       </p:sp>
       <p:sp>
         <p:nvSpPr>
-          <p:cNvPr id="98" name="TextBox 97"/>
+          <p:cNvPr id="99" name="TextBox 98"/>
           <p:cNvSpPr txBox="1"/>
           <p:nvPr/>
         </p:nvSpPr>
         <p:spPr>
           <a:xfrm>
-            <a:off x="5238750" y="8782050"/>
+            <a:off x="7600950" y="8782050"/>
             <a:ext cx="2171700" cy="419100"/>
           </a:xfrm>
           <a:prstGeom prst="rect">
@@ -35595,7 +35634,7 @@
       </p:sp>
       <p:pic>
         <p:nvPicPr>
-          <p:cNvPr id="99" name="Picture 98" descr="9208379026975339746.jpg"/>
+          <p:cNvPr id="100" name="Picture 99" descr="4102834731964614266.jpg"/>
           <p:cNvPicPr>
             <a:picLocks noChangeAspect="1"/>
           </p:cNvPicPr>
@@ -35609,7 +35648,7 @@
         </p:blipFill>
         <p:spPr>
           <a:xfrm>
-            <a:off x="7543800" y="6915150"/>
+            <a:off x="457200" y="9277350"/>
             <a:ext cx="2286000" cy="2286000"/>
           </a:xfrm>
           <a:prstGeom prst="rect">
@@ -35619,13 +35658,13 @@
       </p:pic>
       <p:sp>
         <p:nvSpPr>
-          <p:cNvPr id="100" name="Rectangle 99"/>
-          <p:cNvSpPr/>
-          <p:nvPr/>
-        </p:nvSpPr>
-        <p:spPr>
-          <a:xfrm>
-            <a:off x="7543800" y="8782050"/>
+          <p:cNvPr id="101" name="Rectangle 100"/>
+          <p:cNvSpPr/>
+          <p:nvPr/>
+        </p:nvSpPr>
+        <p:spPr>
+          <a:xfrm>
+            <a:off x="457200" y="11144250"/>
             <a:ext cx="2286000" cy="419100"/>
           </a:xfrm>
           <a:prstGeom prst="rect">
@@ -35665,13 +35704,13 @@
       </p:sp>
       <p:sp>
         <p:nvSpPr>
-          <p:cNvPr id="101" name="TextBox 100"/>
+          <p:cNvPr id="102" name="TextBox 101"/>
           <p:cNvSpPr txBox="1"/>
           <p:nvPr/>
         </p:nvSpPr>
         <p:spPr>
           <a:xfrm>
-            <a:off x="7600950" y="8782050"/>
+            <a:off x="514350" y="11144250"/>
             <a:ext cx="2171700" cy="419100"/>
           </a:xfrm>
           <a:prstGeom prst="rect">
@@ -35704,7 +35743,7 @@
       </p:sp>
       <p:pic>
         <p:nvPicPr>
-          <p:cNvPr id="102" name="Picture 101" descr="8672761161464777380.jpg"/>
+          <p:cNvPr id="103" name="Picture 102" descr="8877044523468660322.jpg"/>
           <p:cNvPicPr>
             <a:picLocks noChangeAspect="1"/>
           </p:cNvPicPr>
@@ -35718,7 +35757,7 @@
         </p:blipFill>
         <p:spPr>
           <a:xfrm>
-            <a:off x="1638300" y="9277350"/>
+            <a:off x="2819400" y="9277350"/>
             <a:ext cx="2286000" cy="2286000"/>
           </a:xfrm>
           <a:prstGeom prst="rect">
@@ -35728,13 +35767,13 @@
       </p:pic>
       <p:sp>
         <p:nvSpPr>
-          <p:cNvPr id="103" name="Rectangle 102"/>
-          <p:cNvSpPr/>
-          <p:nvPr/>
-        </p:nvSpPr>
-        <p:spPr>
-          <a:xfrm>
-            <a:off x="1638300" y="11144250"/>
+          <p:cNvPr id="104" name="Rectangle 103"/>
+          <p:cNvSpPr/>
+          <p:nvPr/>
+        </p:nvSpPr>
+        <p:spPr>
+          <a:xfrm>
+            <a:off x="2819400" y="11144250"/>
             <a:ext cx="2286000" cy="419100"/>
           </a:xfrm>
           <a:prstGeom prst="rect">
@@ -35774,13 +35813,13 @@
       </p:sp>
       <p:sp>
         <p:nvSpPr>
-          <p:cNvPr id="104" name="TextBox 103"/>
+          <p:cNvPr id="105" name="TextBox 104"/>
           <p:cNvSpPr txBox="1"/>
           <p:nvPr/>
         </p:nvSpPr>
         <p:spPr>
           <a:xfrm>
-            <a:off x="1695450" y="11144250"/>
+            <a:off x="2876550" y="11144250"/>
             <a:ext cx="2171700" cy="419100"/>
           </a:xfrm>
           <a:prstGeom prst="rect">
@@ -35813,7 +35852,7 @@
       </p:sp>
       <p:pic>
         <p:nvPicPr>
-          <p:cNvPr id="105" name="Picture 104" descr="3359842666902028946.jpg"/>
+          <p:cNvPr id="106" name="Picture 105" descr="8585654983711146034.jpg"/>
           <p:cNvPicPr>
             <a:picLocks noChangeAspect="1"/>
           </p:cNvPicPr>
@@ -35827,7 +35866,7 @@
         </p:blipFill>
         <p:spPr>
           <a:xfrm>
-            <a:off x="4000500" y="9277350"/>
+            <a:off x="5181600" y="9277350"/>
             <a:ext cx="2286000" cy="2286000"/>
           </a:xfrm>
           <a:prstGeom prst="rect">
@@ -35837,13 +35876,13 @@
       </p:pic>
       <p:sp>
         <p:nvSpPr>
-          <p:cNvPr id="106" name="Rectangle 105"/>
-          <p:cNvSpPr/>
-          <p:nvPr/>
-        </p:nvSpPr>
-        <p:spPr>
-          <a:xfrm>
-            <a:off x="4000500" y="11144250"/>
+          <p:cNvPr id="107" name="Rectangle 106"/>
+          <p:cNvSpPr/>
+          <p:nvPr/>
+        </p:nvSpPr>
+        <p:spPr>
+          <a:xfrm>
+            <a:off x="5181600" y="11144250"/>
             <a:ext cx="2286000" cy="419100"/>
           </a:xfrm>
           <a:prstGeom prst="rect">
@@ -35883,13 +35922,13 @@
       </p:sp>
       <p:sp>
         <p:nvSpPr>
-          <p:cNvPr id="107" name="TextBox 106"/>
+          <p:cNvPr id="108" name="TextBox 107"/>
           <p:cNvSpPr txBox="1"/>
           <p:nvPr/>
         </p:nvSpPr>
         <p:spPr>
           <a:xfrm>
-            <a:off x="4057650" y="11144250"/>
+            <a:off x="5238750" y="11144250"/>
             <a:ext cx="2171700" cy="419100"/>
           </a:xfrm>
           <a:prstGeom prst="rect">
@@ -35922,7 +35961,7 @@
       </p:sp>
       <p:pic>
         <p:nvPicPr>
-          <p:cNvPr id="108" name="Picture 107" descr="8025998113937040021.jpg"/>
+          <p:cNvPr id="109" name="Picture 108" descr="8174182683401141233.jpg"/>
           <p:cNvPicPr>
             <a:picLocks noChangeAspect="1"/>
           </p:cNvPicPr>
@@ -35936,7 +35975,7 @@
         </p:blipFill>
         <p:spPr>
           <a:xfrm>
-            <a:off x="6362700" y="9277350"/>
+            <a:off x="7543800" y="9277350"/>
             <a:ext cx="2286000" cy="2286000"/>
           </a:xfrm>
           <a:prstGeom prst="rect">
@@ -35946,13 +35985,13 @@
       </p:pic>
       <p:sp>
         <p:nvSpPr>
-          <p:cNvPr id="109" name="Rectangle 108"/>
-          <p:cNvSpPr/>
-          <p:nvPr/>
-        </p:nvSpPr>
-        <p:spPr>
-          <a:xfrm>
-            <a:off x="6362700" y="11144250"/>
+          <p:cNvPr id="110" name="Rectangle 109"/>
+          <p:cNvSpPr/>
+          <p:nvPr/>
+        </p:nvSpPr>
+        <p:spPr>
+          <a:xfrm>
+            <a:off x="7543800" y="11144250"/>
             <a:ext cx="2286000" cy="419100"/>
           </a:xfrm>
           <a:prstGeom prst="rect">
@@ -35992,13 +36031,13 @@
       </p:sp>
       <p:sp>
         <p:nvSpPr>
-          <p:cNvPr id="110" name="TextBox 109"/>
+          <p:cNvPr id="111" name="TextBox 110"/>
           <p:cNvSpPr txBox="1"/>
           <p:nvPr/>
         </p:nvSpPr>
         <p:spPr>
           <a:xfrm>
-            <a:off x="6419850" y="11144250"/>
+            <a:off x="7600950" y="11144250"/>
             <a:ext cx="2171700" cy="419100"/>
           </a:xfrm>
           <a:prstGeom prst="rect">
@@ -36031,7 +36070,7 @@
       </p:sp>
       <p:sp>
         <p:nvSpPr>
-          <p:cNvPr id="111" name="TextBox 110"/>
+          <p:cNvPr id="112" name="TextBox 111"/>
           <p:cNvSpPr txBox="1"/>
           <p:nvPr/>
         </p:nvSpPr>

--- a/templates/posts/october/05-10-2026-mon-ig-teachers-day-option-2-bunting.pptx
+++ b/templates/posts/october/05-10-2026-mon-ig-teachers-day-option-2-bunting.pptx
@@ -7981,7 +7981,7 @@
             <a:r>
               <a:rPr sz="3000" b="0" i="0">
                 <a:solidFill>
-                  <a:srgbClr val="1A1A1A"/>
+                  <a:srgbClr val="333130"/>
                 </a:solidFill>
                 <a:latin typeface="Source Sans 3"/>
               </a:rPr>
@@ -34544,7 +34544,7 @@
       </p:sp>
       <p:pic>
         <p:nvPicPr>
-          <p:cNvPr id="70" name="Picture 69" descr="4408951095294771185.jpg"/>
+          <p:cNvPr id="70" name="Picture 69" descr="6234609011925723337.jpg"/>
           <p:cNvPicPr>
             <a:picLocks noChangeAspect="1"/>
           </p:cNvPicPr>
@@ -34653,7 +34653,7 @@
       </p:sp>
       <p:pic>
         <p:nvPicPr>
-          <p:cNvPr id="73" name="Picture 72" descr="2053480673178515544.jpg"/>
+          <p:cNvPr id="73" name="Picture 72" descr="2885865381636175526.jpg"/>
           <p:cNvPicPr>
             <a:picLocks noChangeAspect="1"/>
           </p:cNvPicPr>
@@ -34762,7 +34762,7 @@
       </p:sp>
       <p:pic>
         <p:nvPicPr>
-          <p:cNvPr id="76" name="Picture 75" descr="8526052707322937247.jpg"/>
+          <p:cNvPr id="76" name="Picture 75" descr="4596608046275292327.jpg"/>
           <p:cNvPicPr>
             <a:picLocks noChangeAspect="1"/>
           </p:cNvPicPr>
@@ -34871,7 +34871,7 @@
       </p:sp>
       <p:pic>
         <p:nvPicPr>
-          <p:cNvPr id="79" name="Picture 78" descr="4463640484023020558.jpg"/>
+          <p:cNvPr id="79" name="Picture 78" descr="4332968967792942556.jpg"/>
           <p:cNvPicPr>
             <a:picLocks noChangeAspect="1"/>
           </p:cNvPicPr>
@@ -34980,7 +34980,7 @@
       </p:sp>
       <p:pic>
         <p:nvPicPr>
-          <p:cNvPr id="82" name="Picture 81" descr="2262292987271407235.jpg"/>
+          <p:cNvPr id="82" name="Picture 81" descr="8468941578046363424.jpg"/>
           <p:cNvPicPr>
             <a:picLocks noChangeAspect="1"/>
           </p:cNvPicPr>
@@ -35089,7 +35089,7 @@
       </p:sp>
       <p:pic>
         <p:nvPicPr>
-          <p:cNvPr id="85" name="Picture 84" descr="9013575186157804863.jpg"/>
+          <p:cNvPr id="85" name="Picture 84" descr="8881565924270927158.jpg"/>
           <p:cNvPicPr>
             <a:picLocks noChangeAspect="1"/>
           </p:cNvPicPr>
@@ -35198,7 +35198,7 @@
       </p:sp>
       <p:pic>
         <p:nvPicPr>
-          <p:cNvPr id="88" name="Picture 87" descr="5529725699895573590.jpg"/>
+          <p:cNvPr id="88" name="Picture 87" descr="4356876515863862456.jpg"/>
           <p:cNvPicPr>
             <a:picLocks noChangeAspect="1"/>
           </p:cNvPicPr>
@@ -35307,7 +35307,7 @@
       </p:sp>
       <p:pic>
         <p:nvPicPr>
-          <p:cNvPr id="91" name="Picture 90" descr="2407624395823463407.jpg"/>
+          <p:cNvPr id="91" name="Picture 90" descr="1621609621900963801.jpg"/>
           <p:cNvPicPr>
             <a:picLocks noChangeAspect="1"/>
           </p:cNvPicPr>
@@ -35416,7 +35416,7 @@
       </p:sp>
       <p:pic>
         <p:nvPicPr>
-          <p:cNvPr id="94" name="Picture 93" descr="1164985834360799692.jpg"/>
+          <p:cNvPr id="94" name="Picture 93" descr="6265112960125145205.jpg"/>
           <p:cNvPicPr>
             <a:picLocks noChangeAspect="1"/>
           </p:cNvPicPr>
@@ -35525,7 +35525,7 @@
       </p:sp>
       <p:pic>
         <p:nvPicPr>
-          <p:cNvPr id="97" name="Picture 96" descr="2031739261793493277.jpg"/>
+          <p:cNvPr id="97" name="Picture 96" descr="4497001751860755788.jpg"/>
           <p:cNvPicPr>
             <a:picLocks noChangeAspect="1"/>
           </p:cNvPicPr>
@@ -35634,7 +35634,7 @@
       </p:sp>
       <p:pic>
         <p:nvPicPr>
-          <p:cNvPr id="100" name="Picture 99" descr="4102834731964614266.jpg"/>
+          <p:cNvPr id="100" name="Picture 99" descr="6015455580736178253.jpg"/>
           <p:cNvPicPr>
             <a:picLocks noChangeAspect="1"/>
           </p:cNvPicPr>
@@ -35743,7 +35743,7 @@
       </p:sp>
       <p:pic>
         <p:nvPicPr>
-          <p:cNvPr id="103" name="Picture 102" descr="8877044523468660322.jpg"/>
+          <p:cNvPr id="103" name="Picture 102" descr="8671595325082427723.jpg"/>
           <p:cNvPicPr>
             <a:picLocks noChangeAspect="1"/>
           </p:cNvPicPr>
@@ -35852,7 +35852,7 @@
       </p:sp>
       <p:pic>
         <p:nvPicPr>
-          <p:cNvPr id="106" name="Picture 105" descr="8585654983711146034.jpg"/>
+          <p:cNvPr id="106" name="Picture 105" descr="530489703401159089.jpg"/>
           <p:cNvPicPr>
             <a:picLocks noChangeAspect="1"/>
           </p:cNvPicPr>
@@ -35961,7 +35961,7 @@
       </p:sp>
       <p:pic>
         <p:nvPicPr>
-          <p:cNvPr id="109" name="Picture 108" descr="8174182683401141233.jpg"/>
+          <p:cNvPr id="109" name="Picture 108" descr="1961223670800779458.jpg"/>
           <p:cNvPicPr>
             <a:picLocks noChangeAspect="1"/>
           </p:cNvPicPr>

--- a/templates/posts/october/05-10-2026-mon-ig-teachers-day-option-2-bunting.pptx
+++ b/templates/posts/october/05-10-2026-mon-ig-teachers-day-option-2-bunting.pptx
@@ -34544,7 +34544,7 @@
       </p:sp>
       <p:pic>
         <p:nvPicPr>
-          <p:cNvPr id="70" name="Picture 69" descr="6234609011925723337.jpg"/>
+          <p:cNvPr id="70" name="Picture 69" descr="3423127874932208630.jpg"/>
           <p:cNvPicPr>
             <a:picLocks noChangeAspect="1"/>
           </p:cNvPicPr>
@@ -34653,7 +34653,7 @@
       </p:sp>
       <p:pic>
         <p:nvPicPr>
-          <p:cNvPr id="73" name="Picture 72" descr="2885865381636175526.jpg"/>
+          <p:cNvPr id="73" name="Picture 72" descr="3297107423503027276.jpg"/>
           <p:cNvPicPr>
             <a:picLocks noChangeAspect="1"/>
           </p:cNvPicPr>
@@ -34762,7 +34762,7 @@
       </p:sp>
       <p:pic>
         <p:nvPicPr>
-          <p:cNvPr id="76" name="Picture 75" descr="4596608046275292327.jpg"/>
+          <p:cNvPr id="76" name="Picture 75" descr="6959830007125462775.jpg"/>
           <p:cNvPicPr>
             <a:picLocks noChangeAspect="1"/>
           </p:cNvPicPr>
@@ -34871,7 +34871,7 @@
       </p:sp>
       <p:pic>
         <p:nvPicPr>
-          <p:cNvPr id="79" name="Picture 78" descr="4332968967792942556.jpg"/>
+          <p:cNvPr id="79" name="Picture 78" descr="2532088052200438377.jpg"/>
           <p:cNvPicPr>
             <a:picLocks noChangeAspect="1"/>
           </p:cNvPicPr>
@@ -34980,7 +34980,7 @@
       </p:sp>
       <p:pic>
         <p:nvPicPr>
-          <p:cNvPr id="82" name="Picture 81" descr="8468941578046363424.jpg"/>
+          <p:cNvPr id="82" name="Picture 81" descr="7677503132644364983.jpg"/>
           <p:cNvPicPr>
             <a:picLocks noChangeAspect="1"/>
           </p:cNvPicPr>
@@ -35089,7 +35089,7 @@
       </p:sp>
       <p:pic>
         <p:nvPicPr>
-          <p:cNvPr id="85" name="Picture 84" descr="8881565924270927158.jpg"/>
+          <p:cNvPr id="85" name="Picture 84" descr="2495813991993553482.jpg"/>
           <p:cNvPicPr>
             <a:picLocks noChangeAspect="1"/>
           </p:cNvPicPr>
@@ -35198,7 +35198,7 @@
       </p:sp>
       <p:pic>
         <p:nvPicPr>
-          <p:cNvPr id="88" name="Picture 87" descr="4356876515863862456.jpg"/>
+          <p:cNvPr id="88" name="Picture 87" descr="992375284083682736.jpg"/>
           <p:cNvPicPr>
             <a:picLocks noChangeAspect="1"/>
           </p:cNvPicPr>
@@ -35307,7 +35307,7 @@
       </p:sp>
       <p:pic>
         <p:nvPicPr>
-          <p:cNvPr id="91" name="Picture 90" descr="1621609621900963801.jpg"/>
+          <p:cNvPr id="91" name="Picture 90" descr="4636357773151813356.jpg"/>
           <p:cNvPicPr>
             <a:picLocks noChangeAspect="1"/>
           </p:cNvPicPr>
@@ -35409,14 +35409,14 @@
                 </a:solidFill>
                 <a:latin typeface="Montserrat"/>
               </a:rPr>
-              <a:t>Aysen Ustunay</a:t>
+              <a:t>Ayşen Üstünay</a:t>
             </a:r>
           </a:p>
         </p:txBody>
       </p:sp>
       <p:pic>
         <p:nvPicPr>
-          <p:cNvPr id="94" name="Picture 93" descr="6265112960125145205.jpg"/>
+          <p:cNvPr id="94" name="Picture 93" descr="4337694397078735279.jpg"/>
           <p:cNvPicPr>
             <a:picLocks noChangeAspect="1"/>
           </p:cNvPicPr>
@@ -35525,7 +35525,7 @@
       </p:sp>
       <p:pic>
         <p:nvPicPr>
-          <p:cNvPr id="97" name="Picture 96" descr="4497001751860755788.jpg"/>
+          <p:cNvPr id="97" name="Picture 96" descr="8062215383129015180.jpg"/>
           <p:cNvPicPr>
             <a:picLocks noChangeAspect="1"/>
           </p:cNvPicPr>
@@ -35627,14 +35627,14 @@
                 </a:solidFill>
                 <a:latin typeface="Montserrat"/>
               </a:rPr>
-              <a:t>Gerald Ramirez</a:t>
+              <a:t>Gerald Ramírez</a:t>
             </a:r>
           </a:p>
         </p:txBody>
       </p:sp>
       <p:pic>
         <p:nvPicPr>
-          <p:cNvPr id="100" name="Picture 99" descr="6015455580736178253.jpg"/>
+          <p:cNvPr id="100" name="Picture 99" descr="2684707124881562698.jpg"/>
           <p:cNvPicPr>
             <a:picLocks noChangeAspect="1"/>
           </p:cNvPicPr>
@@ -35743,7 +35743,7 @@
       </p:sp>
       <p:pic>
         <p:nvPicPr>
-          <p:cNvPr id="103" name="Picture 102" descr="8671595325082427723.jpg"/>
+          <p:cNvPr id="103" name="Picture 102" descr="3303125404541949075.jpg"/>
           <p:cNvPicPr>
             <a:picLocks noChangeAspect="1"/>
           </p:cNvPicPr>
@@ -35845,14 +35845,14 @@
                 </a:solidFill>
                 <a:latin typeface="Montserrat"/>
               </a:rPr>
-              <a:t>Ib Borup Pederson</a:t>
+              <a:t>Ib Borup Pedersen</a:t>
             </a:r>
           </a:p>
         </p:txBody>
       </p:sp>
       <p:pic>
         <p:nvPicPr>
-          <p:cNvPr id="106" name="Picture 105" descr="530489703401159089.jpg"/>
+          <p:cNvPr id="106" name="Picture 105" descr="2484353581637585657.jpg"/>
           <p:cNvPicPr>
             <a:picLocks noChangeAspect="1"/>
           </p:cNvPicPr>
@@ -35961,7 +35961,7 @@
       </p:sp>
       <p:pic>
         <p:nvPicPr>
-          <p:cNvPr id="109" name="Picture 108" descr="1961223670800779458.jpg"/>
+          <p:cNvPr id="109" name="Picture 108" descr="5194115076089133331.jpg"/>
           <p:cNvPicPr>
             <a:picLocks noChangeAspect="1"/>
           </p:cNvPicPr>

--- a/templates/posts/october/05-10-2026-mon-ig-teachers-day-option-2-bunting.pptx
+++ b/templates/posts/october/05-10-2026-mon-ig-teachers-day-option-2-bunting.pptx
@@ -34512,7 +34512,7 @@
         <p:spPr>
           <a:xfrm>
             <a:off x="495300" y="2190750"/>
-            <a:ext cx="4572000" cy="2286000"/>
+            <a:ext cx="3627120" cy="1813560"/>
           </a:xfrm>
           <a:prstGeom prst="rect">
             <a:avLst/>
@@ -34531,7 +34531,7 @@
               </a:lnSpc>
             </a:pPr>
             <a:r>
-              <a:rPr sz="4000" b="1" i="0">
+              <a:rPr sz="3400" b="1" i="0">
                 <a:solidFill>
                   <a:srgbClr val="31662F"/>
                 </a:solidFill>
@@ -34544,7 +34544,7 @@
       </p:sp>
       <p:pic>
         <p:nvPicPr>
-          <p:cNvPr id="70" name="Picture 69" descr="3423127874932208630.jpg"/>
+          <p:cNvPr id="70" name="Picture 69" descr="1752988849223235031.jpg"/>
           <p:cNvPicPr>
             <a:picLocks noChangeAspect="1"/>
           </p:cNvPicPr>
@@ -34558,8 +34558,8 @@
         </p:blipFill>
         <p:spPr>
           <a:xfrm>
-            <a:off x="5181600" y="2190750"/>
-            <a:ext cx="2286000" cy="2286000"/>
+            <a:off x="4236720" y="2190750"/>
+            <a:ext cx="1813560" cy="1813560"/>
           </a:xfrm>
           <a:prstGeom prst="rect">
             <a:avLst/>
@@ -34574,8 +34574,8 @@
         </p:nvSpPr>
         <p:spPr>
           <a:xfrm>
-            <a:off x="5181600" y="4057650"/>
-            <a:ext cx="2286000" cy="419100"/>
+            <a:off x="4236720" y="3661410"/>
+            <a:ext cx="1813560" cy="342900"/>
           </a:xfrm>
           <a:prstGeom prst="rect">
             <a:avLst/>
@@ -34620,8 +34620,8 @@
         </p:nvSpPr>
         <p:spPr>
           <a:xfrm>
-            <a:off x="5238750" y="4057650"/>
-            <a:ext cx="2171700" cy="419100"/>
+            <a:off x="4274820" y="3661410"/>
+            <a:ext cx="1737360" cy="342900"/>
           </a:xfrm>
           <a:prstGeom prst="rect">
             <a:avLst/>
@@ -34640,7 +34640,7 @@
               </a:lnSpc>
             </a:pPr>
             <a:r>
-              <a:rPr sz="1500" b="1" i="0">
+              <a:rPr sz="1200" b="1" i="0">
                 <a:solidFill>
                   <a:srgbClr val="31662F"/>
                 </a:solidFill>
@@ -34653,7 +34653,7 @@
       </p:sp>
       <p:pic>
         <p:nvPicPr>
-          <p:cNvPr id="73" name="Picture 72" descr="3297107423503027276.jpg"/>
+          <p:cNvPr id="73" name="Picture 72" descr="2612131318617217853.jpg"/>
           <p:cNvPicPr>
             <a:picLocks noChangeAspect="1"/>
           </p:cNvPicPr>
@@ -34667,8 +34667,8 @@
         </p:blipFill>
         <p:spPr>
           <a:xfrm>
-            <a:off x="7543800" y="2190750"/>
-            <a:ext cx="2286000" cy="2286000"/>
+            <a:off x="6126480" y="2190750"/>
+            <a:ext cx="1813560" cy="1813560"/>
           </a:xfrm>
           <a:prstGeom prst="rect">
             <a:avLst/>
@@ -34683,8 +34683,8 @@
         </p:nvSpPr>
         <p:spPr>
           <a:xfrm>
-            <a:off x="7543800" y="4057650"/>
-            <a:ext cx="2286000" cy="419100"/>
+            <a:off x="6126480" y="3661410"/>
+            <a:ext cx="1813560" cy="342900"/>
           </a:xfrm>
           <a:prstGeom prst="rect">
             <a:avLst/>
@@ -34729,8 +34729,8 @@
         </p:nvSpPr>
         <p:spPr>
           <a:xfrm>
-            <a:off x="7600950" y="4057650"/>
-            <a:ext cx="2171700" cy="419100"/>
+            <a:off x="6164580" y="3661410"/>
+            <a:ext cx="1737360" cy="342900"/>
           </a:xfrm>
           <a:prstGeom prst="rect">
             <a:avLst/>
@@ -34749,7 +34749,7 @@
               </a:lnSpc>
             </a:pPr>
             <a:r>
-              <a:rPr sz="1500" b="1" i="0">
+              <a:rPr sz="1200" b="1" i="0">
                 <a:solidFill>
                   <a:srgbClr val="31662F"/>
                 </a:solidFill>
@@ -34762,7 +34762,7 @@
       </p:sp>
       <p:pic>
         <p:nvPicPr>
-          <p:cNvPr id="76" name="Picture 75" descr="6959830007125462775.jpg"/>
+          <p:cNvPr id="76" name="Picture 75" descr="7144932367790493661.jpg"/>
           <p:cNvPicPr>
             <a:picLocks noChangeAspect="1"/>
           </p:cNvPicPr>
@@ -34776,8 +34776,8 @@
         </p:blipFill>
         <p:spPr>
           <a:xfrm>
-            <a:off x="457200" y="4552950"/>
-            <a:ext cx="2286000" cy="2286000"/>
+            <a:off x="8016240" y="2190750"/>
+            <a:ext cx="1813560" cy="1813560"/>
           </a:xfrm>
           <a:prstGeom prst="rect">
             <a:avLst/>
@@ -34792,8 +34792,8 @@
         </p:nvSpPr>
         <p:spPr>
           <a:xfrm>
-            <a:off x="457200" y="6419850"/>
-            <a:ext cx="2286000" cy="419100"/>
+            <a:off x="8016240" y="3661410"/>
+            <a:ext cx="1813560" cy="342900"/>
           </a:xfrm>
           <a:prstGeom prst="rect">
             <a:avLst/>
@@ -34838,8 +34838,8 @@
         </p:nvSpPr>
         <p:spPr>
           <a:xfrm>
-            <a:off x="514350" y="6419850"/>
-            <a:ext cx="2171700" cy="419100"/>
+            <a:off x="8054340" y="3661410"/>
+            <a:ext cx="1737360" cy="342900"/>
           </a:xfrm>
           <a:prstGeom prst="rect">
             <a:avLst/>
@@ -34858,7 +34858,7 @@
               </a:lnSpc>
             </a:pPr>
             <a:r>
-              <a:rPr sz="1500" b="1" i="0">
+              <a:rPr sz="1200" b="1" i="0">
                 <a:solidFill>
                   <a:srgbClr val="31662F"/>
                 </a:solidFill>
@@ -34871,7 +34871,7 @@
       </p:sp>
       <p:pic>
         <p:nvPicPr>
-          <p:cNvPr id="79" name="Picture 78" descr="2532088052200438377.jpg"/>
+          <p:cNvPr id="79" name="Picture 78" descr="1194488140148190033.jpg"/>
           <p:cNvPicPr>
             <a:picLocks noChangeAspect="1"/>
           </p:cNvPicPr>
@@ -34885,8 +34885,8 @@
         </p:blipFill>
         <p:spPr>
           <a:xfrm>
-            <a:off x="2819400" y="4552950"/>
-            <a:ext cx="2286000" cy="2286000"/>
+            <a:off x="457200" y="4080510"/>
+            <a:ext cx="1813560" cy="1813560"/>
           </a:xfrm>
           <a:prstGeom prst="rect">
             <a:avLst/>
@@ -34901,8 +34901,8 @@
         </p:nvSpPr>
         <p:spPr>
           <a:xfrm>
-            <a:off x="2819400" y="6419850"/>
-            <a:ext cx="2286000" cy="419100"/>
+            <a:off x="457200" y="5551170"/>
+            <a:ext cx="1813560" cy="342900"/>
           </a:xfrm>
           <a:prstGeom prst="rect">
             <a:avLst/>
@@ -34947,8 +34947,8 @@
         </p:nvSpPr>
         <p:spPr>
           <a:xfrm>
-            <a:off x="2876550" y="6419850"/>
-            <a:ext cx="2171700" cy="419100"/>
+            <a:off x="495300" y="5551170"/>
+            <a:ext cx="1737360" cy="342900"/>
           </a:xfrm>
           <a:prstGeom prst="rect">
             <a:avLst/>
@@ -34967,7 +34967,7 @@
               </a:lnSpc>
             </a:pPr>
             <a:r>
-              <a:rPr sz="1500" b="1" i="0">
+              <a:rPr sz="1200" b="1" i="0">
                 <a:solidFill>
                   <a:srgbClr val="31662F"/>
                 </a:solidFill>
@@ -34980,7 +34980,7 @@
       </p:sp>
       <p:pic>
         <p:nvPicPr>
-          <p:cNvPr id="82" name="Picture 81" descr="7677503132644364983.jpg"/>
+          <p:cNvPr id="82" name="Picture 81" descr="8647953704869287552.jpg"/>
           <p:cNvPicPr>
             <a:picLocks noChangeAspect="1"/>
           </p:cNvPicPr>
@@ -34994,8 +34994,8 @@
         </p:blipFill>
         <p:spPr>
           <a:xfrm>
-            <a:off x="5181600" y="4552950"/>
-            <a:ext cx="2286000" cy="2286000"/>
+            <a:off x="2346960" y="4080510"/>
+            <a:ext cx="1813560" cy="1813560"/>
           </a:xfrm>
           <a:prstGeom prst="rect">
             <a:avLst/>
@@ -35010,8 +35010,8 @@
         </p:nvSpPr>
         <p:spPr>
           <a:xfrm>
-            <a:off x="5181600" y="6419850"/>
-            <a:ext cx="2286000" cy="419100"/>
+            <a:off x="2346960" y="5551170"/>
+            <a:ext cx="1813560" cy="342900"/>
           </a:xfrm>
           <a:prstGeom prst="rect">
             <a:avLst/>
@@ -35056,8 +35056,8 @@
         </p:nvSpPr>
         <p:spPr>
           <a:xfrm>
-            <a:off x="5238750" y="6419850"/>
-            <a:ext cx="2171700" cy="419100"/>
+            <a:off x="2385060" y="5551170"/>
+            <a:ext cx="1737360" cy="342900"/>
           </a:xfrm>
           <a:prstGeom prst="rect">
             <a:avLst/>
@@ -35076,7 +35076,7 @@
               </a:lnSpc>
             </a:pPr>
             <a:r>
-              <a:rPr sz="1500" b="1" i="0">
+              <a:rPr sz="1200" b="1" i="0">
                 <a:solidFill>
                   <a:srgbClr val="31662F"/>
                 </a:solidFill>
@@ -35089,7 +35089,7 @@
       </p:sp>
       <p:pic>
         <p:nvPicPr>
-          <p:cNvPr id="85" name="Picture 84" descr="2495813991993553482.jpg"/>
+          <p:cNvPr id="85" name="Picture 84" descr="6026637821407471426.jpg"/>
           <p:cNvPicPr>
             <a:picLocks noChangeAspect="1"/>
           </p:cNvPicPr>
@@ -35103,8 +35103,8 @@
         </p:blipFill>
         <p:spPr>
           <a:xfrm>
-            <a:off x="7543800" y="4552950"/>
-            <a:ext cx="2286000" cy="2286000"/>
+            <a:off x="4236720" y="4080510"/>
+            <a:ext cx="1813560" cy="1813560"/>
           </a:xfrm>
           <a:prstGeom prst="rect">
             <a:avLst/>
@@ -35119,8 +35119,8 @@
         </p:nvSpPr>
         <p:spPr>
           <a:xfrm>
-            <a:off x="7543800" y="6419850"/>
-            <a:ext cx="2286000" cy="419100"/>
+            <a:off x="4236720" y="5551170"/>
+            <a:ext cx="1813560" cy="342900"/>
           </a:xfrm>
           <a:prstGeom prst="rect">
             <a:avLst/>
@@ -35165,8 +35165,8 @@
         </p:nvSpPr>
         <p:spPr>
           <a:xfrm>
-            <a:off x="7600950" y="6419850"/>
-            <a:ext cx="2171700" cy="419100"/>
+            <a:off x="4274820" y="5551170"/>
+            <a:ext cx="1737360" cy="342900"/>
           </a:xfrm>
           <a:prstGeom prst="rect">
             <a:avLst/>
@@ -35185,7 +35185,7 @@
               </a:lnSpc>
             </a:pPr>
             <a:r>
-              <a:rPr sz="1500" b="1" i="0">
+              <a:rPr sz="1200" b="1" i="0">
                 <a:solidFill>
                   <a:srgbClr val="31662F"/>
                 </a:solidFill>
@@ -35198,7 +35198,7 @@
       </p:sp>
       <p:pic>
         <p:nvPicPr>
-          <p:cNvPr id="88" name="Picture 87" descr="992375284083682736.jpg"/>
+          <p:cNvPr id="88" name="Picture 87" descr="3723017669234027646.jpg"/>
           <p:cNvPicPr>
             <a:picLocks noChangeAspect="1"/>
           </p:cNvPicPr>
@@ -35212,8 +35212,8 @@
         </p:blipFill>
         <p:spPr>
           <a:xfrm>
-            <a:off x="457200" y="6915150"/>
-            <a:ext cx="2286000" cy="2286000"/>
+            <a:off x="6126480" y="4080510"/>
+            <a:ext cx="1813560" cy="1813560"/>
           </a:xfrm>
           <a:prstGeom prst="rect">
             <a:avLst/>
@@ -35228,8 +35228,8 @@
         </p:nvSpPr>
         <p:spPr>
           <a:xfrm>
-            <a:off x="457200" y="8782050"/>
-            <a:ext cx="2286000" cy="419100"/>
+            <a:off x="6126480" y="5551170"/>
+            <a:ext cx="1813560" cy="342900"/>
           </a:xfrm>
           <a:prstGeom prst="rect">
             <a:avLst/>
@@ -35274,8 +35274,8 @@
         </p:nvSpPr>
         <p:spPr>
           <a:xfrm>
-            <a:off x="514350" y="8782050"/>
-            <a:ext cx="2171700" cy="419100"/>
+            <a:off x="6164580" y="5551170"/>
+            <a:ext cx="1737360" cy="342900"/>
           </a:xfrm>
           <a:prstGeom prst="rect">
             <a:avLst/>
@@ -35294,7 +35294,7 @@
               </a:lnSpc>
             </a:pPr>
             <a:r>
-              <a:rPr sz="1500" b="1" i="0">
+              <a:rPr sz="1200" b="1" i="0">
                 <a:solidFill>
                   <a:srgbClr val="31662F"/>
                 </a:solidFill>
@@ -35307,7 +35307,7 @@
       </p:sp>
       <p:pic>
         <p:nvPicPr>
-          <p:cNvPr id="91" name="Picture 90" descr="4636357773151813356.jpg"/>
+          <p:cNvPr id="91" name="Picture 90" descr="3113535558271719414.jpg"/>
           <p:cNvPicPr>
             <a:picLocks noChangeAspect="1"/>
           </p:cNvPicPr>
@@ -35321,8 +35321,8 @@
         </p:blipFill>
         <p:spPr>
           <a:xfrm>
-            <a:off x="2819400" y="6915150"/>
-            <a:ext cx="2286000" cy="2286000"/>
+            <a:off x="8016240" y="4080510"/>
+            <a:ext cx="1813560" cy="1813560"/>
           </a:xfrm>
           <a:prstGeom prst="rect">
             <a:avLst/>
@@ -35337,8 +35337,8 @@
         </p:nvSpPr>
         <p:spPr>
           <a:xfrm>
-            <a:off x="2819400" y="8782050"/>
-            <a:ext cx="2286000" cy="419100"/>
+            <a:off x="8016240" y="5551170"/>
+            <a:ext cx="1813560" cy="342900"/>
           </a:xfrm>
           <a:prstGeom prst="rect">
             <a:avLst/>
@@ -35383,8 +35383,8 @@
         </p:nvSpPr>
         <p:spPr>
           <a:xfrm>
-            <a:off x="2876550" y="8782050"/>
-            <a:ext cx="2171700" cy="419100"/>
+            <a:off x="8054340" y="5551170"/>
+            <a:ext cx="1737360" cy="342900"/>
           </a:xfrm>
           <a:prstGeom prst="rect">
             <a:avLst/>
@@ -35403,7 +35403,7 @@
               </a:lnSpc>
             </a:pPr>
             <a:r>
-              <a:rPr sz="1500" b="1" i="0">
+              <a:rPr sz="1200" b="1" i="0">
                 <a:solidFill>
                   <a:srgbClr val="31662F"/>
                 </a:solidFill>
@@ -35416,7 +35416,7 @@
       </p:sp>
       <p:pic>
         <p:nvPicPr>
-          <p:cNvPr id="94" name="Picture 93" descr="4337694397078735279.jpg"/>
+          <p:cNvPr id="94" name="Picture 93" descr="5414851247296223470.jpg"/>
           <p:cNvPicPr>
             <a:picLocks noChangeAspect="1"/>
           </p:cNvPicPr>
@@ -35430,8 +35430,8 @@
         </p:blipFill>
         <p:spPr>
           <a:xfrm>
-            <a:off x="5181600" y="6915150"/>
-            <a:ext cx="2286000" cy="2286000"/>
+            <a:off x="457200" y="5970270"/>
+            <a:ext cx="1813560" cy="1813560"/>
           </a:xfrm>
           <a:prstGeom prst="rect">
             <a:avLst/>
@@ -35446,8 +35446,8 @@
         </p:nvSpPr>
         <p:spPr>
           <a:xfrm>
-            <a:off x="5181600" y="8782050"/>
-            <a:ext cx="2286000" cy="419100"/>
+            <a:off x="457200" y="7440929"/>
+            <a:ext cx="1813560" cy="342900"/>
           </a:xfrm>
           <a:prstGeom prst="rect">
             <a:avLst/>
@@ -35492,8 +35492,8 @@
         </p:nvSpPr>
         <p:spPr>
           <a:xfrm>
-            <a:off x="5238750" y="8782050"/>
-            <a:ext cx="2171700" cy="419100"/>
+            <a:off x="495300" y="7440929"/>
+            <a:ext cx="1737360" cy="342900"/>
           </a:xfrm>
           <a:prstGeom prst="rect">
             <a:avLst/>
@@ -35512,7 +35512,7 @@
               </a:lnSpc>
             </a:pPr>
             <a:r>
-              <a:rPr sz="1500" b="1" i="0">
+              <a:rPr sz="1200" b="1" i="0">
                 <a:solidFill>
                   <a:srgbClr val="31662F"/>
                 </a:solidFill>
@@ -35525,7 +35525,7 @@
       </p:sp>
       <p:pic>
         <p:nvPicPr>
-          <p:cNvPr id="97" name="Picture 96" descr="8062215383129015180.jpg"/>
+          <p:cNvPr id="97" name="Picture 96" descr="6759120478498615729.jpg"/>
           <p:cNvPicPr>
             <a:picLocks noChangeAspect="1"/>
           </p:cNvPicPr>
@@ -35539,8 +35539,8 @@
         </p:blipFill>
         <p:spPr>
           <a:xfrm>
-            <a:off x="7543800" y="6915150"/>
-            <a:ext cx="2286000" cy="2286000"/>
+            <a:off x="2346960" y="5970270"/>
+            <a:ext cx="1813560" cy="1813560"/>
           </a:xfrm>
           <a:prstGeom prst="rect">
             <a:avLst/>
@@ -35555,8 +35555,8 @@
         </p:nvSpPr>
         <p:spPr>
           <a:xfrm>
-            <a:off x="7543800" y="8782050"/>
-            <a:ext cx="2286000" cy="419100"/>
+            <a:off x="2346960" y="7440929"/>
+            <a:ext cx="1813560" cy="342900"/>
           </a:xfrm>
           <a:prstGeom prst="rect">
             <a:avLst/>
@@ -35601,8 +35601,8 @@
         </p:nvSpPr>
         <p:spPr>
           <a:xfrm>
-            <a:off x="7600950" y="8782050"/>
-            <a:ext cx="2171700" cy="419100"/>
+            <a:off x="2385060" y="7440929"/>
+            <a:ext cx="1737360" cy="342900"/>
           </a:xfrm>
           <a:prstGeom prst="rect">
             <a:avLst/>
@@ -35621,7 +35621,7 @@
               </a:lnSpc>
             </a:pPr>
             <a:r>
-              <a:rPr sz="1500" b="1" i="0">
+              <a:rPr sz="1200" b="1" i="0">
                 <a:solidFill>
                   <a:srgbClr val="31662F"/>
                 </a:solidFill>
@@ -35634,7 +35634,7 @@
       </p:sp>
       <p:pic>
         <p:nvPicPr>
-          <p:cNvPr id="100" name="Picture 99" descr="2684707124881562698.jpg"/>
+          <p:cNvPr id="100" name="Picture 99" descr="9169552863569812281.jpg"/>
           <p:cNvPicPr>
             <a:picLocks noChangeAspect="1"/>
           </p:cNvPicPr>
@@ -35648,8 +35648,8 @@
         </p:blipFill>
         <p:spPr>
           <a:xfrm>
-            <a:off x="457200" y="9277350"/>
-            <a:ext cx="2286000" cy="2286000"/>
+            <a:off x="4236720" y="5970270"/>
+            <a:ext cx="1813560" cy="1813560"/>
           </a:xfrm>
           <a:prstGeom prst="rect">
             <a:avLst/>
@@ -35664,8 +35664,8 @@
         </p:nvSpPr>
         <p:spPr>
           <a:xfrm>
-            <a:off x="457200" y="11144250"/>
-            <a:ext cx="2286000" cy="419100"/>
+            <a:off x="4236720" y="7440929"/>
+            <a:ext cx="1813560" cy="342900"/>
           </a:xfrm>
           <a:prstGeom prst="rect">
             <a:avLst/>
@@ -35710,8 +35710,8 @@
         </p:nvSpPr>
         <p:spPr>
           <a:xfrm>
-            <a:off x="514350" y="11144250"/>
-            <a:ext cx="2171700" cy="419100"/>
+            <a:off x="4274820" y="7440929"/>
+            <a:ext cx="1737360" cy="342900"/>
           </a:xfrm>
           <a:prstGeom prst="rect">
             <a:avLst/>
@@ -35730,7 +35730,7 @@
               </a:lnSpc>
             </a:pPr>
             <a:r>
-              <a:rPr sz="1500" b="1" i="0">
+              <a:rPr sz="1200" b="1" i="0">
                 <a:solidFill>
                   <a:srgbClr val="31662F"/>
                 </a:solidFill>
@@ -35743,7 +35743,7 @@
       </p:sp>
       <p:pic>
         <p:nvPicPr>
-          <p:cNvPr id="103" name="Picture 102" descr="3303125404541949075.jpg"/>
+          <p:cNvPr id="103" name="Picture 102" descr="6225129540398821112.jpg"/>
           <p:cNvPicPr>
             <a:picLocks noChangeAspect="1"/>
           </p:cNvPicPr>
@@ -35757,8 +35757,8 @@
         </p:blipFill>
         <p:spPr>
           <a:xfrm>
-            <a:off x="2819400" y="9277350"/>
-            <a:ext cx="2286000" cy="2286000"/>
+            <a:off x="6126480" y="5970270"/>
+            <a:ext cx="1813560" cy="1813560"/>
           </a:xfrm>
           <a:prstGeom prst="rect">
             <a:avLst/>
@@ -35773,8 +35773,8 @@
         </p:nvSpPr>
         <p:spPr>
           <a:xfrm>
-            <a:off x="2819400" y="11144250"/>
-            <a:ext cx="2286000" cy="419100"/>
+            <a:off x="6126480" y="7440929"/>
+            <a:ext cx="1813560" cy="342900"/>
           </a:xfrm>
           <a:prstGeom prst="rect">
             <a:avLst/>
@@ -35819,8 +35819,8 @@
         </p:nvSpPr>
         <p:spPr>
           <a:xfrm>
-            <a:off x="2876550" y="11144250"/>
-            <a:ext cx="2171700" cy="419100"/>
+            <a:off x="6164580" y="7440929"/>
+            <a:ext cx="1737360" cy="342900"/>
           </a:xfrm>
           <a:prstGeom prst="rect">
             <a:avLst/>
@@ -35839,7 +35839,7 @@
               </a:lnSpc>
             </a:pPr>
             <a:r>
-              <a:rPr sz="1500" b="1" i="0">
+              <a:rPr sz="1200" b="1" i="0">
                 <a:solidFill>
                   <a:srgbClr val="31662F"/>
                 </a:solidFill>
@@ -35852,7 +35852,7 @@
       </p:sp>
       <p:pic>
         <p:nvPicPr>
-          <p:cNvPr id="106" name="Picture 105" descr="2484353581637585657.jpg"/>
+          <p:cNvPr id="106" name="Picture 105" descr="6957233813328317874.jpg"/>
           <p:cNvPicPr>
             <a:picLocks noChangeAspect="1"/>
           </p:cNvPicPr>
@@ -35866,8 +35866,8 @@
         </p:blipFill>
         <p:spPr>
           <a:xfrm>
-            <a:off x="5181600" y="9277350"/>
-            <a:ext cx="2286000" cy="2286000"/>
+            <a:off x="8016240" y="5970270"/>
+            <a:ext cx="1813560" cy="1813560"/>
           </a:xfrm>
           <a:prstGeom prst="rect">
             <a:avLst/>
@@ -35882,8 +35882,8 @@
         </p:nvSpPr>
         <p:spPr>
           <a:xfrm>
-            <a:off x="5181600" y="11144250"/>
-            <a:ext cx="2286000" cy="419100"/>
+            <a:off x="8016240" y="7440929"/>
+            <a:ext cx="1813560" cy="342900"/>
           </a:xfrm>
           <a:prstGeom prst="rect">
             <a:avLst/>
@@ -35928,8 +35928,8 @@
         </p:nvSpPr>
         <p:spPr>
           <a:xfrm>
-            <a:off x="5238750" y="11144250"/>
-            <a:ext cx="2171700" cy="419100"/>
+            <a:off x="8054340" y="7440929"/>
+            <a:ext cx="1737360" cy="342900"/>
           </a:xfrm>
           <a:prstGeom prst="rect">
             <a:avLst/>
@@ -35948,7 +35948,7 @@
               </a:lnSpc>
             </a:pPr>
             <a:r>
-              <a:rPr sz="1500" b="1" i="0">
+              <a:rPr sz="1200" b="1" i="0">
                 <a:solidFill>
                   <a:srgbClr val="31662F"/>
                 </a:solidFill>
@@ -35961,7 +35961,7 @@
       </p:sp>
       <p:pic>
         <p:nvPicPr>
-          <p:cNvPr id="109" name="Picture 108" descr="5194115076089133331.jpg"/>
+          <p:cNvPr id="109" name="Picture 108" descr="6998284926264825370.jpg"/>
           <p:cNvPicPr>
             <a:picLocks noChangeAspect="1"/>
           </p:cNvPicPr>
@@ -35975,8 +35975,8 @@
         </p:blipFill>
         <p:spPr>
           <a:xfrm>
-            <a:off x="7543800" y="9277350"/>
-            <a:ext cx="2286000" cy="2286000"/>
+            <a:off x="457200" y="7860030"/>
+            <a:ext cx="1813560" cy="1813560"/>
           </a:xfrm>
           <a:prstGeom prst="rect">
             <a:avLst/>
@@ -35991,8 +35991,8 @@
         </p:nvSpPr>
         <p:spPr>
           <a:xfrm>
-            <a:off x="7543800" y="11144250"/>
-            <a:ext cx="2286000" cy="419100"/>
+            <a:off x="457200" y="9330690"/>
+            <a:ext cx="1813560" cy="342900"/>
           </a:xfrm>
           <a:prstGeom prst="rect">
             <a:avLst/>
@@ -36037,8 +36037,8 @@
         </p:nvSpPr>
         <p:spPr>
           <a:xfrm>
-            <a:off x="7600950" y="11144250"/>
-            <a:ext cx="2171700" cy="419100"/>
+            <a:off x="495300" y="9330690"/>
+            <a:ext cx="1737360" cy="342900"/>
           </a:xfrm>
           <a:prstGeom prst="rect">
             <a:avLst/>
@@ -36057,7 +36057,7 @@
               </a:lnSpc>
             </a:pPr>
             <a:r>
-              <a:rPr sz="1500" b="1" i="0">
+              <a:rPr sz="1200" b="1" i="0">
                 <a:solidFill>
                   <a:srgbClr val="31662F"/>
                 </a:solidFill>
@@ -36068,9 +36068,445 @@
           </a:p>
         </p:txBody>
       </p:sp>
-      <p:sp>
-        <p:nvSpPr>
-          <p:cNvPr id="112" name="TextBox 111"/>
+      <p:pic>
+        <p:nvPicPr>
+          <p:cNvPr id="112" name="Picture 111" descr="2904139003338272881.jpg"/>
+          <p:cNvPicPr>
+            <a:picLocks noChangeAspect="1"/>
+          </p:cNvPicPr>
+          <p:nvPr/>
+        </p:nvPicPr>
+        <p:blipFill>
+          <a:blip r:embed="rId17"/>
+          <a:stretch>
+            <a:fillRect/>
+          </a:stretch>
+        </p:blipFill>
+        <p:spPr>
+          <a:xfrm>
+            <a:off x="2346960" y="7860030"/>
+            <a:ext cx="1813560" cy="1813560"/>
+          </a:xfrm>
+          <a:prstGeom prst="rect">
+            <a:avLst/>
+          </a:prstGeom>
+        </p:spPr>
+      </p:pic>
+      <p:sp>
+        <p:nvSpPr>
+          <p:cNvPr id="113" name="Rectangle 112"/>
+          <p:cNvSpPr/>
+          <p:nvPr/>
+        </p:nvSpPr>
+        <p:spPr>
+          <a:xfrm>
+            <a:off x="2346960" y="9330690"/>
+            <a:ext cx="1813560" cy="342900"/>
+          </a:xfrm>
+          <a:prstGeom prst="rect">
+            <a:avLst/>
+          </a:prstGeom>
+          <a:solidFill>
+            <a:srgbClr val="F3F1EA">
+              <a:alpha val="88000"/>
+            </a:srgbClr>
+          </a:solidFill>
+          <a:ln>
+            <a:noFill/>
+          </a:ln>
+          <a:effectLst/>
+        </p:spPr>
+        <p:style>
+          <a:lnRef idx="1">
+            <a:schemeClr val="accent1"/>
+          </a:lnRef>
+          <a:fillRef idx="3">
+            <a:schemeClr val="accent1"/>
+          </a:fillRef>
+          <a:effectRef idx="2">
+            <a:schemeClr val="accent1"/>
+          </a:effectRef>
+          <a:fontRef idx="minor">
+            <a:schemeClr val="lt1"/>
+          </a:fontRef>
+        </p:style>
+        <p:txBody>
+          <a:bodyPr rtlCol="0" anchor="ctr"/>
+          <a:lstStyle/>
+          <a:p>
+            <a:pPr algn="ctr"/>
+          </a:p>
+        </p:txBody>
+      </p:sp>
+      <p:sp>
+        <p:nvSpPr>
+          <p:cNvPr id="114" name="TextBox 113"/>
+          <p:cNvSpPr txBox="1"/>
+          <p:nvPr/>
+        </p:nvSpPr>
+        <p:spPr>
+          <a:xfrm>
+            <a:off x="2385060" y="9330690"/>
+            <a:ext cx="1737360" cy="342900"/>
+          </a:xfrm>
+          <a:prstGeom prst="rect">
+            <a:avLst/>
+          </a:prstGeom>
+          <a:noFill/>
+        </p:spPr>
+        <p:txBody>
+          <a:bodyPr wrap="square" lIns="0" rIns="0" tIns="0" bIns="0" anchor="ctr">
+            <a:spAutoFit/>
+          </a:bodyPr>
+          <a:lstStyle/>
+          <a:p>
+            <a:pPr algn="ctr">
+              <a:lnSpc>
+                <a:spcPct val="120000"/>
+              </a:lnSpc>
+            </a:pPr>
+            <a:r>
+              <a:rPr sz="1200" b="1" i="0">
+                <a:solidFill>
+                  <a:srgbClr val="31662F"/>
+                </a:solidFill>
+                <a:latin typeface="Montserrat"/>
+              </a:rPr>
+              <a:t>Elina Psara</a:t>
+            </a:r>
+          </a:p>
+        </p:txBody>
+      </p:sp>
+      <p:pic>
+        <p:nvPicPr>
+          <p:cNvPr id="115" name="Picture 114" descr="7454114753255690645.jpg"/>
+          <p:cNvPicPr>
+            <a:picLocks noChangeAspect="1"/>
+          </p:cNvPicPr>
+          <p:nvPr/>
+        </p:nvPicPr>
+        <p:blipFill>
+          <a:blip r:embed="rId18"/>
+          <a:stretch>
+            <a:fillRect/>
+          </a:stretch>
+        </p:blipFill>
+        <p:spPr>
+          <a:xfrm>
+            <a:off x="4236720" y="7860030"/>
+            <a:ext cx="1813560" cy="1813560"/>
+          </a:xfrm>
+          <a:prstGeom prst="rect">
+            <a:avLst/>
+          </a:prstGeom>
+        </p:spPr>
+      </p:pic>
+      <p:sp>
+        <p:nvSpPr>
+          <p:cNvPr id="116" name="Rectangle 115"/>
+          <p:cNvSpPr/>
+          <p:nvPr/>
+        </p:nvSpPr>
+        <p:spPr>
+          <a:xfrm>
+            <a:off x="4236720" y="9330690"/>
+            <a:ext cx="1813560" cy="342900"/>
+          </a:xfrm>
+          <a:prstGeom prst="rect">
+            <a:avLst/>
+          </a:prstGeom>
+          <a:solidFill>
+            <a:srgbClr val="F3F1EA">
+              <a:alpha val="88000"/>
+            </a:srgbClr>
+          </a:solidFill>
+          <a:ln>
+            <a:noFill/>
+          </a:ln>
+          <a:effectLst/>
+        </p:spPr>
+        <p:style>
+          <a:lnRef idx="1">
+            <a:schemeClr val="accent1"/>
+          </a:lnRef>
+          <a:fillRef idx="3">
+            <a:schemeClr val="accent1"/>
+          </a:fillRef>
+          <a:effectRef idx="2">
+            <a:schemeClr val="accent1"/>
+          </a:effectRef>
+          <a:fontRef idx="minor">
+            <a:schemeClr val="lt1"/>
+          </a:fontRef>
+        </p:style>
+        <p:txBody>
+          <a:bodyPr rtlCol="0" anchor="ctr"/>
+          <a:lstStyle/>
+          <a:p>
+            <a:pPr algn="ctr"/>
+          </a:p>
+        </p:txBody>
+      </p:sp>
+      <p:sp>
+        <p:nvSpPr>
+          <p:cNvPr id="117" name="TextBox 116"/>
+          <p:cNvSpPr txBox="1"/>
+          <p:nvPr/>
+        </p:nvSpPr>
+        <p:spPr>
+          <a:xfrm>
+            <a:off x="4274820" y="9330690"/>
+            <a:ext cx="1737360" cy="342900"/>
+          </a:xfrm>
+          <a:prstGeom prst="rect">
+            <a:avLst/>
+          </a:prstGeom>
+          <a:noFill/>
+        </p:spPr>
+        <p:txBody>
+          <a:bodyPr wrap="square" lIns="0" rIns="0" tIns="0" bIns="0" anchor="ctr">
+            <a:spAutoFit/>
+          </a:bodyPr>
+          <a:lstStyle/>
+          <a:p>
+            <a:pPr algn="ctr">
+              <a:lnSpc>
+                <a:spcPct val="120000"/>
+              </a:lnSpc>
+            </a:pPr>
+            <a:r>
+              <a:rPr sz="1200" b="1" i="0">
+                <a:solidFill>
+                  <a:srgbClr val="31662F"/>
+                </a:solidFill>
+                <a:latin typeface="Montserrat"/>
+              </a:rPr>
+              <a:t>Caterina Capri</a:t>
+            </a:r>
+          </a:p>
+        </p:txBody>
+      </p:sp>
+      <p:pic>
+        <p:nvPicPr>
+          <p:cNvPr id="118" name="Picture 117" descr="8055802890071954999.jpg"/>
+          <p:cNvPicPr>
+            <a:picLocks noChangeAspect="1"/>
+          </p:cNvPicPr>
+          <p:nvPr/>
+        </p:nvPicPr>
+        <p:blipFill>
+          <a:blip r:embed="rId19"/>
+          <a:stretch>
+            <a:fillRect/>
+          </a:stretch>
+        </p:blipFill>
+        <p:spPr>
+          <a:xfrm>
+            <a:off x="6126480" y="7860030"/>
+            <a:ext cx="1813560" cy="1813560"/>
+          </a:xfrm>
+          <a:prstGeom prst="rect">
+            <a:avLst/>
+          </a:prstGeom>
+        </p:spPr>
+      </p:pic>
+      <p:sp>
+        <p:nvSpPr>
+          <p:cNvPr id="119" name="Rectangle 118"/>
+          <p:cNvSpPr/>
+          <p:nvPr/>
+        </p:nvSpPr>
+        <p:spPr>
+          <a:xfrm>
+            <a:off x="6126480" y="9330690"/>
+            <a:ext cx="1813560" cy="342900"/>
+          </a:xfrm>
+          <a:prstGeom prst="rect">
+            <a:avLst/>
+          </a:prstGeom>
+          <a:solidFill>
+            <a:srgbClr val="F3F1EA">
+              <a:alpha val="88000"/>
+            </a:srgbClr>
+          </a:solidFill>
+          <a:ln>
+            <a:noFill/>
+          </a:ln>
+          <a:effectLst/>
+        </p:spPr>
+        <p:style>
+          <a:lnRef idx="1">
+            <a:schemeClr val="accent1"/>
+          </a:lnRef>
+          <a:fillRef idx="3">
+            <a:schemeClr val="accent1"/>
+          </a:fillRef>
+          <a:effectRef idx="2">
+            <a:schemeClr val="accent1"/>
+          </a:effectRef>
+          <a:fontRef idx="minor">
+            <a:schemeClr val="lt1"/>
+          </a:fontRef>
+        </p:style>
+        <p:txBody>
+          <a:bodyPr rtlCol="0" anchor="ctr"/>
+          <a:lstStyle/>
+          <a:p>
+            <a:pPr algn="ctr"/>
+          </a:p>
+        </p:txBody>
+      </p:sp>
+      <p:sp>
+        <p:nvSpPr>
+          <p:cNvPr id="120" name="TextBox 119"/>
+          <p:cNvSpPr txBox="1"/>
+          <p:nvPr/>
+        </p:nvSpPr>
+        <p:spPr>
+          <a:xfrm>
+            <a:off x="6164580" y="9330690"/>
+            <a:ext cx="1737360" cy="342900"/>
+          </a:xfrm>
+          <a:prstGeom prst="rect">
+            <a:avLst/>
+          </a:prstGeom>
+          <a:noFill/>
+        </p:spPr>
+        <p:txBody>
+          <a:bodyPr wrap="square" lIns="0" rIns="0" tIns="0" bIns="0" anchor="ctr">
+            <a:spAutoFit/>
+          </a:bodyPr>
+          <a:lstStyle/>
+          <a:p>
+            <a:pPr algn="ctr">
+              <a:lnSpc>
+                <a:spcPct val="120000"/>
+              </a:lnSpc>
+            </a:pPr>
+            <a:r>
+              <a:rPr sz="1200" b="1" i="0">
+                <a:solidFill>
+                  <a:srgbClr val="31662F"/>
+                </a:solidFill>
+                <a:latin typeface="Montserrat"/>
+              </a:rPr>
+              <a:t>Laura Campos</a:t>
+            </a:r>
+          </a:p>
+        </p:txBody>
+      </p:sp>
+      <p:pic>
+        <p:nvPicPr>
+          <p:cNvPr id="121" name="Picture 120" descr="6327792871960472773.jpg"/>
+          <p:cNvPicPr>
+            <a:picLocks noChangeAspect="1"/>
+          </p:cNvPicPr>
+          <p:nvPr/>
+        </p:nvPicPr>
+        <p:blipFill>
+          <a:blip r:embed="rId20"/>
+          <a:stretch>
+            <a:fillRect/>
+          </a:stretch>
+        </p:blipFill>
+        <p:spPr>
+          <a:xfrm>
+            <a:off x="8016240" y="7860030"/>
+            <a:ext cx="1813560" cy="1813560"/>
+          </a:xfrm>
+          <a:prstGeom prst="rect">
+            <a:avLst/>
+          </a:prstGeom>
+        </p:spPr>
+      </p:pic>
+      <p:sp>
+        <p:nvSpPr>
+          <p:cNvPr id="122" name="Rectangle 121"/>
+          <p:cNvSpPr/>
+          <p:nvPr/>
+        </p:nvSpPr>
+        <p:spPr>
+          <a:xfrm>
+            <a:off x="8016240" y="9330690"/>
+            <a:ext cx="1813560" cy="342900"/>
+          </a:xfrm>
+          <a:prstGeom prst="rect">
+            <a:avLst/>
+          </a:prstGeom>
+          <a:solidFill>
+            <a:srgbClr val="F3F1EA">
+              <a:alpha val="88000"/>
+            </a:srgbClr>
+          </a:solidFill>
+          <a:ln>
+            <a:noFill/>
+          </a:ln>
+          <a:effectLst/>
+        </p:spPr>
+        <p:style>
+          <a:lnRef idx="1">
+            <a:schemeClr val="accent1"/>
+          </a:lnRef>
+          <a:fillRef idx="3">
+            <a:schemeClr val="accent1"/>
+          </a:fillRef>
+          <a:effectRef idx="2">
+            <a:schemeClr val="accent1"/>
+          </a:effectRef>
+          <a:fontRef idx="minor">
+            <a:schemeClr val="lt1"/>
+          </a:fontRef>
+        </p:style>
+        <p:txBody>
+          <a:bodyPr rtlCol="0" anchor="ctr"/>
+          <a:lstStyle/>
+          <a:p>
+            <a:pPr algn="ctr"/>
+          </a:p>
+        </p:txBody>
+      </p:sp>
+      <p:sp>
+        <p:nvSpPr>
+          <p:cNvPr id="123" name="TextBox 122"/>
+          <p:cNvSpPr txBox="1"/>
+          <p:nvPr/>
+        </p:nvSpPr>
+        <p:spPr>
+          <a:xfrm>
+            <a:off x="8054340" y="9330690"/>
+            <a:ext cx="1737360" cy="342900"/>
+          </a:xfrm>
+          <a:prstGeom prst="rect">
+            <a:avLst/>
+          </a:prstGeom>
+          <a:noFill/>
+        </p:spPr>
+        <p:txBody>
+          <a:bodyPr wrap="square" lIns="0" rIns="0" tIns="0" bIns="0" anchor="ctr">
+            <a:spAutoFit/>
+          </a:bodyPr>
+          <a:lstStyle/>
+          <a:p>
+            <a:pPr algn="ctr">
+              <a:lnSpc>
+                <a:spcPct val="120000"/>
+              </a:lnSpc>
+            </a:pPr>
+            <a:r>
+              <a:rPr sz="1200" b="1" i="0">
+                <a:solidFill>
+                  <a:srgbClr val="31662F"/>
+                </a:solidFill>
+                <a:latin typeface="Montserrat"/>
+              </a:rPr>
+              <a:t>Nora Levay</a:t>
+            </a:r>
+          </a:p>
+        </p:txBody>
+      </p:sp>
+      <p:sp>
+        <p:nvSpPr>
+          <p:cNvPr id="124" name="TextBox 123"/>
           <p:cNvSpPr txBox="1"/>
           <p:nvPr/>
         </p:nvSpPr>

--- a/templates/posts/october/05-10-2026-mon-ig-teachers-day-option-2-bunting.pptx
+++ b/templates/posts/october/05-10-2026-mon-ig-teachers-day-option-2-bunting.pptx
@@ -34512,7 +34512,7 @@
         <p:spPr>
           <a:xfrm>
             <a:off x="495300" y="2190750"/>
-            <a:ext cx="3627120" cy="1813560"/>
+            <a:ext cx="4572000" cy="2286000"/>
           </a:xfrm>
           <a:prstGeom prst="rect">
             <a:avLst/>
@@ -34531,7 +34531,7 @@
               </a:lnSpc>
             </a:pPr>
             <a:r>
-              <a:rPr sz="3400" b="1" i="0">
+              <a:rPr sz="4000" b="1" i="0">
                 <a:solidFill>
                   <a:srgbClr val="31662F"/>
                 </a:solidFill>
@@ -34544,7 +34544,7 @@
       </p:sp>
       <p:pic>
         <p:nvPicPr>
-          <p:cNvPr id="70" name="Picture 69" descr="1752988849223235031.jpg"/>
+          <p:cNvPr id="70" name="Picture 69" descr="7297811591439890433.jpg"/>
           <p:cNvPicPr>
             <a:picLocks noChangeAspect="1"/>
           </p:cNvPicPr>
@@ -34558,8 +34558,8 @@
         </p:blipFill>
         <p:spPr>
           <a:xfrm>
-            <a:off x="4236720" y="2190750"/>
-            <a:ext cx="1813560" cy="1813560"/>
+            <a:off x="5181600" y="2190750"/>
+            <a:ext cx="2286000" cy="2286000"/>
           </a:xfrm>
           <a:prstGeom prst="rect">
             <a:avLst/>
@@ -34574,8 +34574,8 @@
         </p:nvSpPr>
         <p:spPr>
           <a:xfrm>
-            <a:off x="4236720" y="3661410"/>
-            <a:ext cx="1813560" cy="342900"/>
+            <a:off x="5181600" y="4133850"/>
+            <a:ext cx="2286000" cy="342900"/>
           </a:xfrm>
           <a:prstGeom prst="rect">
             <a:avLst/>
@@ -34620,8 +34620,8 @@
         </p:nvSpPr>
         <p:spPr>
           <a:xfrm>
-            <a:off x="4274820" y="3661410"/>
-            <a:ext cx="1737360" cy="342900"/>
+            <a:off x="5219700" y="4133850"/>
+            <a:ext cx="2209800" cy="342900"/>
           </a:xfrm>
           <a:prstGeom prst="rect">
             <a:avLst/>
@@ -34640,20 +34640,20 @@
               </a:lnSpc>
             </a:pPr>
             <a:r>
-              <a:rPr sz="1200" b="1" i="0">
+              <a:rPr sz="1500" b="1" i="0">
                 <a:solidFill>
                   <a:srgbClr val="31662F"/>
                 </a:solidFill>
                 <a:latin typeface="Montserrat"/>
               </a:rPr>
-              <a:t>Tommy Tepper</a:t>
+              <a:t>Tommy Tapper</a:t>
             </a:r>
           </a:p>
         </p:txBody>
       </p:sp>
       <p:pic>
         <p:nvPicPr>
-          <p:cNvPr id="73" name="Picture 72" descr="2612131318617217853.jpg"/>
+          <p:cNvPr id="73" name="Picture 72" descr="8728437986854537801.jpg"/>
           <p:cNvPicPr>
             <a:picLocks noChangeAspect="1"/>
           </p:cNvPicPr>
@@ -34667,8 +34667,8 @@
         </p:blipFill>
         <p:spPr>
           <a:xfrm>
-            <a:off x="6126480" y="2190750"/>
-            <a:ext cx="1813560" cy="1813560"/>
+            <a:off x="7543800" y="2190750"/>
+            <a:ext cx="2286000" cy="2286000"/>
           </a:xfrm>
           <a:prstGeom prst="rect">
             <a:avLst/>
@@ -34683,8 +34683,8 @@
         </p:nvSpPr>
         <p:spPr>
           <a:xfrm>
-            <a:off x="6126480" y="3661410"/>
-            <a:ext cx="1813560" cy="342900"/>
+            <a:off x="7543800" y="4133850"/>
+            <a:ext cx="2286000" cy="342900"/>
           </a:xfrm>
           <a:prstGeom prst="rect">
             <a:avLst/>
@@ -34729,8 +34729,8 @@
         </p:nvSpPr>
         <p:spPr>
           <a:xfrm>
-            <a:off x="6164580" y="3661410"/>
-            <a:ext cx="1737360" cy="342900"/>
+            <a:off x="7581900" y="4133850"/>
+            <a:ext cx="2209800" cy="342900"/>
           </a:xfrm>
           <a:prstGeom prst="rect">
             <a:avLst/>
@@ -34749,7 +34749,7 @@
               </a:lnSpc>
             </a:pPr>
             <a:r>
-              <a:rPr sz="1200" b="1" i="0">
+              <a:rPr sz="1500" b="1" i="0">
                 <a:solidFill>
                   <a:srgbClr val="31662F"/>
                 </a:solidFill>
@@ -34762,7 +34762,7 @@
       </p:sp>
       <p:pic>
         <p:nvPicPr>
-          <p:cNvPr id="76" name="Picture 75" descr="7144932367790493661.jpg"/>
+          <p:cNvPr id="76" name="Picture 75" descr="8499503155804001537.jpg"/>
           <p:cNvPicPr>
             <a:picLocks noChangeAspect="1"/>
           </p:cNvPicPr>
@@ -34776,8 +34776,8 @@
         </p:blipFill>
         <p:spPr>
           <a:xfrm>
-            <a:off x="8016240" y="2190750"/>
-            <a:ext cx="1813560" cy="1813560"/>
+            <a:off x="457200" y="4552950"/>
+            <a:ext cx="2286000" cy="2286000"/>
           </a:xfrm>
           <a:prstGeom prst="rect">
             <a:avLst/>
@@ -34792,8 +34792,8 @@
         </p:nvSpPr>
         <p:spPr>
           <a:xfrm>
-            <a:off x="8016240" y="3661410"/>
-            <a:ext cx="1813560" cy="342900"/>
+            <a:off x="457200" y="6496050"/>
+            <a:ext cx="2286000" cy="342900"/>
           </a:xfrm>
           <a:prstGeom prst="rect">
             <a:avLst/>
@@ -34838,8 +34838,8 @@
         </p:nvSpPr>
         <p:spPr>
           <a:xfrm>
-            <a:off x="8054340" y="3661410"/>
-            <a:ext cx="1737360" cy="342900"/>
+            <a:off x="495300" y="6496050"/>
+            <a:ext cx="2209800" cy="342900"/>
           </a:xfrm>
           <a:prstGeom prst="rect">
             <a:avLst/>
@@ -34858,7 +34858,7 @@
               </a:lnSpc>
             </a:pPr>
             <a:r>
-              <a:rPr sz="1200" b="1" i="0">
+              <a:rPr sz="1500" b="1" i="0">
                 <a:solidFill>
                   <a:srgbClr val="31662F"/>
                 </a:solidFill>
@@ -34871,7 +34871,7 @@
       </p:sp>
       <p:pic>
         <p:nvPicPr>
-          <p:cNvPr id="79" name="Picture 78" descr="1194488140148190033.jpg"/>
+          <p:cNvPr id="79" name="Picture 78" descr="8664505731163078658.jpg"/>
           <p:cNvPicPr>
             <a:picLocks noChangeAspect="1"/>
           </p:cNvPicPr>
@@ -34885,8 +34885,8 @@
         </p:blipFill>
         <p:spPr>
           <a:xfrm>
-            <a:off x="457200" y="4080510"/>
-            <a:ext cx="1813560" cy="1813560"/>
+            <a:off x="2819400" y="4552950"/>
+            <a:ext cx="2286000" cy="2286000"/>
           </a:xfrm>
           <a:prstGeom prst="rect">
             <a:avLst/>
@@ -34901,8 +34901,8 @@
         </p:nvSpPr>
         <p:spPr>
           <a:xfrm>
-            <a:off x="457200" y="5551170"/>
-            <a:ext cx="1813560" cy="342900"/>
+            <a:off x="2819400" y="6496050"/>
+            <a:ext cx="2286000" cy="342900"/>
           </a:xfrm>
           <a:prstGeom prst="rect">
             <a:avLst/>
@@ -34947,8 +34947,8 @@
         </p:nvSpPr>
         <p:spPr>
           <a:xfrm>
-            <a:off x="495300" y="5551170"/>
-            <a:ext cx="1737360" cy="342900"/>
+            <a:off x="2857500" y="6496050"/>
+            <a:ext cx="2209800" cy="342900"/>
           </a:xfrm>
           <a:prstGeom prst="rect">
             <a:avLst/>
@@ -34967,20 +34967,20 @@
               </a:lnSpc>
             </a:pPr>
             <a:r>
-              <a:rPr sz="1200" b="1" i="0">
+              <a:rPr sz="1500" b="1" i="0">
                 <a:solidFill>
                   <a:srgbClr val="31662F"/>
                 </a:solidFill>
                 <a:latin typeface="Montserrat"/>
               </a:rPr>
-              <a:t>Wesley Sanders</a:t>
+              <a:t>Wesley Sander</a:t>
             </a:r>
           </a:p>
         </p:txBody>
       </p:sp>
       <p:pic>
         <p:nvPicPr>
-          <p:cNvPr id="82" name="Picture 81" descr="8647953704869287552.jpg"/>
+          <p:cNvPr id="82" name="Picture 81" descr="7695145214115977211.jpg"/>
           <p:cNvPicPr>
             <a:picLocks noChangeAspect="1"/>
           </p:cNvPicPr>
@@ -34994,8 +34994,8 @@
         </p:blipFill>
         <p:spPr>
           <a:xfrm>
-            <a:off x="2346960" y="4080510"/>
-            <a:ext cx="1813560" cy="1813560"/>
+            <a:off x="5181600" y="4552950"/>
+            <a:ext cx="2286000" cy="2286000"/>
           </a:xfrm>
           <a:prstGeom prst="rect">
             <a:avLst/>
@@ -35010,8 +35010,8 @@
         </p:nvSpPr>
         <p:spPr>
           <a:xfrm>
-            <a:off x="2346960" y="5551170"/>
-            <a:ext cx="1813560" cy="342900"/>
+            <a:off x="5181600" y="6496050"/>
+            <a:ext cx="2286000" cy="342900"/>
           </a:xfrm>
           <a:prstGeom prst="rect">
             <a:avLst/>
@@ -35056,8 +35056,8 @@
         </p:nvSpPr>
         <p:spPr>
           <a:xfrm>
-            <a:off x="2385060" y="5551170"/>
-            <a:ext cx="1737360" cy="342900"/>
+            <a:off x="5219700" y="6496050"/>
+            <a:ext cx="2209800" cy="342900"/>
           </a:xfrm>
           <a:prstGeom prst="rect">
             <a:avLst/>
@@ -35076,7 +35076,7 @@
               </a:lnSpc>
             </a:pPr>
             <a:r>
-              <a:rPr sz="1200" b="1" i="0">
+              <a:rPr sz="1500" b="1" i="0">
                 <a:solidFill>
                   <a:srgbClr val="31662F"/>
                 </a:solidFill>
@@ -35089,7 +35089,7 @@
       </p:sp>
       <p:pic>
         <p:nvPicPr>
-          <p:cNvPr id="85" name="Picture 84" descr="6026637821407471426.jpg"/>
+          <p:cNvPr id="85" name="Picture 84" descr="1311806062584278399.jpg"/>
           <p:cNvPicPr>
             <a:picLocks noChangeAspect="1"/>
           </p:cNvPicPr>
@@ -35103,8 +35103,8 @@
         </p:blipFill>
         <p:spPr>
           <a:xfrm>
-            <a:off x="4236720" y="4080510"/>
-            <a:ext cx="1813560" cy="1813560"/>
+            <a:off x="7543800" y="4552950"/>
+            <a:ext cx="2286000" cy="2286000"/>
           </a:xfrm>
           <a:prstGeom prst="rect">
             <a:avLst/>
@@ -35119,8 +35119,8 @@
         </p:nvSpPr>
         <p:spPr>
           <a:xfrm>
-            <a:off x="4236720" y="5551170"/>
-            <a:ext cx="1813560" cy="342900"/>
+            <a:off x="7543800" y="6496050"/>
+            <a:ext cx="2286000" cy="342900"/>
           </a:xfrm>
           <a:prstGeom prst="rect">
             <a:avLst/>
@@ -35165,8 +35165,8 @@
         </p:nvSpPr>
         <p:spPr>
           <a:xfrm>
-            <a:off x="4274820" y="5551170"/>
-            <a:ext cx="1737360" cy="342900"/>
+            <a:off x="7581900" y="6496050"/>
+            <a:ext cx="2209800" cy="342900"/>
           </a:xfrm>
           <a:prstGeom prst="rect">
             <a:avLst/>
@@ -35185,7 +35185,7 @@
               </a:lnSpc>
             </a:pPr>
             <a:r>
-              <a:rPr sz="1200" b="1" i="0">
+              <a:rPr sz="1500" b="1" i="0">
                 <a:solidFill>
                   <a:srgbClr val="31662F"/>
                 </a:solidFill>
@@ -35198,7 +35198,7 @@
       </p:sp>
       <p:pic>
         <p:nvPicPr>
-          <p:cNvPr id="88" name="Picture 87" descr="3723017669234027646.jpg"/>
+          <p:cNvPr id="88" name="Picture 87" descr="5215010633690581301.jpg"/>
           <p:cNvPicPr>
             <a:picLocks noChangeAspect="1"/>
           </p:cNvPicPr>
@@ -35212,8 +35212,8 @@
         </p:blipFill>
         <p:spPr>
           <a:xfrm>
-            <a:off x="6126480" y="4080510"/>
-            <a:ext cx="1813560" cy="1813560"/>
+            <a:off x="457200" y="6915150"/>
+            <a:ext cx="2286000" cy="2286000"/>
           </a:xfrm>
           <a:prstGeom prst="rect">
             <a:avLst/>
@@ -35228,8 +35228,8 @@
         </p:nvSpPr>
         <p:spPr>
           <a:xfrm>
-            <a:off x="6126480" y="5551170"/>
-            <a:ext cx="1813560" cy="342900"/>
+            <a:off x="457200" y="8858250"/>
+            <a:ext cx="2286000" cy="342900"/>
           </a:xfrm>
           <a:prstGeom prst="rect">
             <a:avLst/>
@@ -35274,8 +35274,8 @@
         </p:nvSpPr>
         <p:spPr>
           <a:xfrm>
-            <a:off x="6164580" y="5551170"/>
-            <a:ext cx="1737360" cy="342900"/>
+            <a:off x="495300" y="8858250"/>
+            <a:ext cx="2209800" cy="342900"/>
           </a:xfrm>
           <a:prstGeom prst="rect">
             <a:avLst/>
@@ -35294,20 +35294,20 @@
               </a:lnSpc>
             </a:pPr>
             <a:r>
-              <a:rPr sz="1200" b="1" i="0">
+              <a:rPr sz="1500" b="1" i="0">
                 <a:solidFill>
                   <a:srgbClr val="31662F"/>
                 </a:solidFill>
                 <a:latin typeface="Montserrat"/>
               </a:rPr>
-              <a:t>Isadora Schmidt</a:t>
+              <a:t>Isadora Shmidt</a:t>
             </a:r>
           </a:p>
         </p:txBody>
       </p:sp>
       <p:pic>
         <p:nvPicPr>
-          <p:cNvPr id="91" name="Picture 90" descr="3113535558271719414.jpg"/>
+          <p:cNvPr id="91" name="Picture 90" descr="746667493973784667.jpg"/>
           <p:cNvPicPr>
             <a:picLocks noChangeAspect="1"/>
           </p:cNvPicPr>
@@ -35321,8 +35321,8 @@
         </p:blipFill>
         <p:spPr>
           <a:xfrm>
-            <a:off x="8016240" y="4080510"/>
-            <a:ext cx="1813560" cy="1813560"/>
+            <a:off x="2819400" y="6915150"/>
+            <a:ext cx="2286000" cy="2286000"/>
           </a:xfrm>
           <a:prstGeom prst="rect">
             <a:avLst/>
@@ -35337,8 +35337,8 @@
         </p:nvSpPr>
         <p:spPr>
           <a:xfrm>
-            <a:off x="8016240" y="5551170"/>
-            <a:ext cx="1813560" cy="342900"/>
+            <a:off x="2819400" y="8858250"/>
+            <a:ext cx="2286000" cy="342900"/>
           </a:xfrm>
           <a:prstGeom prst="rect">
             <a:avLst/>
@@ -35383,8 +35383,8 @@
         </p:nvSpPr>
         <p:spPr>
           <a:xfrm>
-            <a:off x="8054340" y="5551170"/>
-            <a:ext cx="1737360" cy="342900"/>
+            <a:off x="2857500" y="8858250"/>
+            <a:ext cx="2209800" cy="342900"/>
           </a:xfrm>
           <a:prstGeom prst="rect">
             <a:avLst/>
@@ -35403,7 +35403,7 @@
               </a:lnSpc>
             </a:pPr>
             <a:r>
-              <a:rPr sz="1200" b="1" i="0">
+              <a:rPr sz="1500" b="1" i="0">
                 <a:solidFill>
                   <a:srgbClr val="31662F"/>
                 </a:solidFill>
@@ -35416,7 +35416,7 @@
       </p:sp>
       <p:pic>
         <p:nvPicPr>
-          <p:cNvPr id="94" name="Picture 93" descr="5414851247296223470.jpg"/>
+          <p:cNvPr id="94" name="Picture 93" descr="4763296968275485648.jpg"/>
           <p:cNvPicPr>
             <a:picLocks noChangeAspect="1"/>
           </p:cNvPicPr>
@@ -35430,8 +35430,8 @@
         </p:blipFill>
         <p:spPr>
           <a:xfrm>
-            <a:off x="457200" y="5970270"/>
-            <a:ext cx="1813560" cy="1813560"/>
+            <a:off x="5181600" y="6915150"/>
+            <a:ext cx="2286000" cy="2286000"/>
           </a:xfrm>
           <a:prstGeom prst="rect">
             <a:avLst/>
@@ -35446,8 +35446,8 @@
         </p:nvSpPr>
         <p:spPr>
           <a:xfrm>
-            <a:off x="457200" y="7440929"/>
-            <a:ext cx="1813560" cy="342900"/>
+            <a:off x="5181600" y="8858250"/>
+            <a:ext cx="2286000" cy="342900"/>
           </a:xfrm>
           <a:prstGeom prst="rect">
             <a:avLst/>
@@ -35492,8 +35492,8 @@
         </p:nvSpPr>
         <p:spPr>
           <a:xfrm>
-            <a:off x="495300" y="7440929"/>
-            <a:ext cx="1737360" cy="342900"/>
+            <a:off x="5219700" y="8858250"/>
+            <a:ext cx="2209800" cy="342900"/>
           </a:xfrm>
           <a:prstGeom prst="rect">
             <a:avLst/>
@@ -35512,7 +35512,7 @@
               </a:lnSpc>
             </a:pPr>
             <a:r>
-              <a:rPr sz="1200" b="1" i="0">
+              <a:rPr sz="1500" b="1" i="0">
                 <a:solidFill>
                   <a:srgbClr val="31662F"/>
                 </a:solidFill>
@@ -35525,7 +35525,7 @@
       </p:sp>
       <p:pic>
         <p:nvPicPr>
-          <p:cNvPr id="97" name="Picture 96" descr="6759120478498615729.jpg"/>
+          <p:cNvPr id="97" name="Picture 96" descr="5135560565093357647.jpg"/>
           <p:cNvPicPr>
             <a:picLocks noChangeAspect="1"/>
           </p:cNvPicPr>
@@ -35539,8 +35539,8 @@
         </p:blipFill>
         <p:spPr>
           <a:xfrm>
-            <a:off x="2346960" y="5970270"/>
-            <a:ext cx="1813560" cy="1813560"/>
+            <a:off x="7543800" y="6915150"/>
+            <a:ext cx="2286000" cy="2286000"/>
           </a:xfrm>
           <a:prstGeom prst="rect">
             <a:avLst/>
@@ -35555,8 +35555,8 @@
         </p:nvSpPr>
         <p:spPr>
           <a:xfrm>
-            <a:off x="2346960" y="7440929"/>
-            <a:ext cx="1813560" cy="342900"/>
+            <a:off x="7543800" y="8858250"/>
+            <a:ext cx="2286000" cy="342900"/>
           </a:xfrm>
           <a:prstGeom prst="rect">
             <a:avLst/>
@@ -35601,8 +35601,8 @@
         </p:nvSpPr>
         <p:spPr>
           <a:xfrm>
-            <a:off x="2385060" y="7440929"/>
-            <a:ext cx="1737360" cy="342900"/>
+            <a:off x="7581900" y="8858250"/>
+            <a:ext cx="2209800" cy="342900"/>
           </a:xfrm>
           <a:prstGeom prst="rect">
             <a:avLst/>
@@ -35621,7 +35621,7 @@
               </a:lnSpc>
             </a:pPr>
             <a:r>
-              <a:rPr sz="1200" b="1" i="0">
+              <a:rPr sz="1500" b="1" i="0">
                 <a:solidFill>
                   <a:srgbClr val="31662F"/>
                 </a:solidFill>
@@ -35634,7 +35634,7 @@
       </p:sp>
       <p:pic>
         <p:nvPicPr>
-          <p:cNvPr id="100" name="Picture 99" descr="9169552863569812281.jpg"/>
+          <p:cNvPr id="100" name="Picture 99" descr="1228326016823983096.jpg"/>
           <p:cNvPicPr>
             <a:picLocks noChangeAspect="1"/>
           </p:cNvPicPr>
@@ -35648,8 +35648,8 @@
         </p:blipFill>
         <p:spPr>
           <a:xfrm>
-            <a:off x="4236720" y="5970270"/>
-            <a:ext cx="1813560" cy="1813560"/>
+            <a:off x="457200" y="9277350"/>
+            <a:ext cx="2286000" cy="2286000"/>
           </a:xfrm>
           <a:prstGeom prst="rect">
             <a:avLst/>
@@ -35664,8 +35664,8 @@
         </p:nvSpPr>
         <p:spPr>
           <a:xfrm>
-            <a:off x="4236720" y="7440929"/>
-            <a:ext cx="1813560" cy="342900"/>
+            <a:off x="457200" y="11220450"/>
+            <a:ext cx="2286000" cy="342900"/>
           </a:xfrm>
           <a:prstGeom prst="rect">
             <a:avLst/>
@@ -35710,8 +35710,8 @@
         </p:nvSpPr>
         <p:spPr>
           <a:xfrm>
-            <a:off x="4274820" y="7440929"/>
-            <a:ext cx="1737360" cy="342900"/>
+            <a:off x="495300" y="11220450"/>
+            <a:ext cx="2209800" cy="342900"/>
           </a:xfrm>
           <a:prstGeom prst="rect">
             <a:avLst/>
@@ -35730,7 +35730,7 @@
               </a:lnSpc>
             </a:pPr>
             <a:r>
-              <a:rPr sz="1200" b="1" i="0">
+              <a:rPr sz="1500" b="1" i="0">
                 <a:solidFill>
                   <a:srgbClr val="31662F"/>
                 </a:solidFill>
@@ -35743,7 +35743,7 @@
       </p:sp>
       <p:pic>
         <p:nvPicPr>
-          <p:cNvPr id="103" name="Picture 102" descr="6225129540398821112.jpg"/>
+          <p:cNvPr id="103" name="Picture 102" descr="2663829795774334274.jpg"/>
           <p:cNvPicPr>
             <a:picLocks noChangeAspect="1"/>
           </p:cNvPicPr>
@@ -35757,8 +35757,8 @@
         </p:blipFill>
         <p:spPr>
           <a:xfrm>
-            <a:off x="6126480" y="5970270"/>
-            <a:ext cx="1813560" cy="1813560"/>
+            <a:off x="2819400" y="9277350"/>
+            <a:ext cx="2286000" cy="2286000"/>
           </a:xfrm>
           <a:prstGeom prst="rect">
             <a:avLst/>
@@ -35773,8 +35773,8 @@
         </p:nvSpPr>
         <p:spPr>
           <a:xfrm>
-            <a:off x="6126480" y="7440929"/>
-            <a:ext cx="1813560" cy="342900"/>
+            <a:off x="2819400" y="11220450"/>
+            <a:ext cx="2286000" cy="342900"/>
           </a:xfrm>
           <a:prstGeom prst="rect">
             <a:avLst/>
@@ -35819,8 +35819,8 @@
         </p:nvSpPr>
         <p:spPr>
           <a:xfrm>
-            <a:off x="6164580" y="7440929"/>
-            <a:ext cx="1737360" cy="342900"/>
+            <a:off x="2857500" y="11220450"/>
+            <a:ext cx="2209800" cy="342900"/>
           </a:xfrm>
           <a:prstGeom prst="rect">
             <a:avLst/>
@@ -35839,7 +35839,7 @@
               </a:lnSpc>
             </a:pPr>
             <a:r>
-              <a:rPr sz="1200" b="1" i="0">
+              <a:rPr sz="1500" b="1" i="0">
                 <a:solidFill>
                   <a:srgbClr val="31662F"/>
                 </a:solidFill>
@@ -35852,7 +35852,7 @@
       </p:sp>
       <p:pic>
         <p:nvPicPr>
-          <p:cNvPr id="106" name="Picture 105" descr="6957233813328317874.jpg"/>
+          <p:cNvPr id="106" name="Picture 105" descr="8496695976596084521.jpg"/>
           <p:cNvPicPr>
             <a:picLocks noChangeAspect="1"/>
           </p:cNvPicPr>
@@ -35866,8 +35866,8 @@
         </p:blipFill>
         <p:spPr>
           <a:xfrm>
-            <a:off x="8016240" y="5970270"/>
-            <a:ext cx="1813560" cy="1813560"/>
+            <a:off x="5181600" y="9277350"/>
+            <a:ext cx="2286000" cy="2286000"/>
           </a:xfrm>
           <a:prstGeom prst="rect">
             <a:avLst/>
@@ -35882,8 +35882,8 @@
         </p:nvSpPr>
         <p:spPr>
           <a:xfrm>
-            <a:off x="8016240" y="7440929"/>
-            <a:ext cx="1813560" cy="342900"/>
+            <a:off x="5181600" y="11220450"/>
+            <a:ext cx="2286000" cy="342900"/>
           </a:xfrm>
           <a:prstGeom prst="rect">
             <a:avLst/>
@@ -35928,8 +35928,8 @@
         </p:nvSpPr>
         <p:spPr>
           <a:xfrm>
-            <a:off x="8054340" y="7440929"/>
-            <a:ext cx="1737360" cy="342900"/>
+            <a:off x="5219700" y="11220450"/>
+            <a:ext cx="2209800" cy="342900"/>
           </a:xfrm>
           <a:prstGeom prst="rect">
             <a:avLst/>
@@ -35948,7 +35948,7 @@
               </a:lnSpc>
             </a:pPr>
             <a:r>
-              <a:rPr sz="1200" b="1" i="0">
+              <a:rPr sz="1500" b="1" i="0">
                 <a:solidFill>
                   <a:srgbClr val="31662F"/>
                 </a:solidFill>
@@ -35961,7 +35961,7 @@
       </p:sp>
       <p:pic>
         <p:nvPicPr>
-          <p:cNvPr id="109" name="Picture 108" descr="6998284926264825370.jpg"/>
+          <p:cNvPr id="109" name="Picture 108" descr="8052758747183003055.jpg"/>
           <p:cNvPicPr>
             <a:picLocks noChangeAspect="1"/>
           </p:cNvPicPr>
@@ -35975,8 +35975,8 @@
         </p:blipFill>
         <p:spPr>
           <a:xfrm>
-            <a:off x="457200" y="7860030"/>
-            <a:ext cx="1813560" cy="1813560"/>
+            <a:off x="7543800" y="9277350"/>
+            <a:ext cx="2286000" cy="2286000"/>
           </a:xfrm>
           <a:prstGeom prst="rect">
             <a:avLst/>
@@ -35991,8 +35991,8 @@
         </p:nvSpPr>
         <p:spPr>
           <a:xfrm>
-            <a:off x="457200" y="9330690"/>
-            <a:ext cx="1813560" cy="342900"/>
+            <a:off x="7543800" y="11220450"/>
+            <a:ext cx="2286000" cy="342900"/>
           </a:xfrm>
           <a:prstGeom prst="rect">
             <a:avLst/>
@@ -36037,8 +36037,8 @@
         </p:nvSpPr>
         <p:spPr>
           <a:xfrm>
-            <a:off x="495300" y="9330690"/>
-            <a:ext cx="1737360" cy="342900"/>
+            <a:off x="7581900" y="11220450"/>
+            <a:ext cx="2209800" cy="342900"/>
           </a:xfrm>
           <a:prstGeom prst="rect">
             <a:avLst/>
@@ -36057,7 +36057,7 @@
               </a:lnSpc>
             </a:pPr>
             <a:r>
-              <a:rPr sz="1200" b="1" i="0">
+              <a:rPr sz="1500" b="1" i="0">
                 <a:solidFill>
                   <a:srgbClr val="31662F"/>
                 </a:solidFill>
@@ -36068,445 +36068,9 @@
           </a:p>
         </p:txBody>
       </p:sp>
-      <p:pic>
-        <p:nvPicPr>
-          <p:cNvPr id="112" name="Picture 111" descr="2904139003338272881.jpg"/>
-          <p:cNvPicPr>
-            <a:picLocks noChangeAspect="1"/>
-          </p:cNvPicPr>
-          <p:nvPr/>
-        </p:nvPicPr>
-        <p:blipFill>
-          <a:blip r:embed="rId17"/>
-          <a:stretch>
-            <a:fillRect/>
-          </a:stretch>
-        </p:blipFill>
-        <p:spPr>
-          <a:xfrm>
-            <a:off x="2346960" y="7860030"/>
-            <a:ext cx="1813560" cy="1813560"/>
-          </a:xfrm>
-          <a:prstGeom prst="rect">
-            <a:avLst/>
-          </a:prstGeom>
-        </p:spPr>
-      </p:pic>
-      <p:sp>
-        <p:nvSpPr>
-          <p:cNvPr id="113" name="Rectangle 112"/>
-          <p:cNvSpPr/>
-          <p:nvPr/>
-        </p:nvSpPr>
-        <p:spPr>
-          <a:xfrm>
-            <a:off x="2346960" y="9330690"/>
-            <a:ext cx="1813560" cy="342900"/>
-          </a:xfrm>
-          <a:prstGeom prst="rect">
-            <a:avLst/>
-          </a:prstGeom>
-          <a:solidFill>
-            <a:srgbClr val="F3F1EA">
-              <a:alpha val="88000"/>
-            </a:srgbClr>
-          </a:solidFill>
-          <a:ln>
-            <a:noFill/>
-          </a:ln>
-          <a:effectLst/>
-        </p:spPr>
-        <p:style>
-          <a:lnRef idx="1">
-            <a:schemeClr val="accent1"/>
-          </a:lnRef>
-          <a:fillRef idx="3">
-            <a:schemeClr val="accent1"/>
-          </a:fillRef>
-          <a:effectRef idx="2">
-            <a:schemeClr val="accent1"/>
-          </a:effectRef>
-          <a:fontRef idx="minor">
-            <a:schemeClr val="lt1"/>
-          </a:fontRef>
-        </p:style>
-        <p:txBody>
-          <a:bodyPr rtlCol="0" anchor="ctr"/>
-          <a:lstStyle/>
-          <a:p>
-            <a:pPr algn="ctr"/>
-          </a:p>
-        </p:txBody>
-      </p:sp>
-      <p:sp>
-        <p:nvSpPr>
-          <p:cNvPr id="114" name="TextBox 113"/>
-          <p:cNvSpPr txBox="1"/>
-          <p:nvPr/>
-        </p:nvSpPr>
-        <p:spPr>
-          <a:xfrm>
-            <a:off x="2385060" y="9330690"/>
-            <a:ext cx="1737360" cy="342900"/>
-          </a:xfrm>
-          <a:prstGeom prst="rect">
-            <a:avLst/>
-          </a:prstGeom>
-          <a:noFill/>
-        </p:spPr>
-        <p:txBody>
-          <a:bodyPr wrap="square" lIns="0" rIns="0" tIns="0" bIns="0" anchor="ctr">
-            <a:spAutoFit/>
-          </a:bodyPr>
-          <a:lstStyle/>
-          <a:p>
-            <a:pPr algn="ctr">
-              <a:lnSpc>
-                <a:spcPct val="120000"/>
-              </a:lnSpc>
-            </a:pPr>
-            <a:r>
-              <a:rPr sz="1200" b="1" i="0">
-                <a:solidFill>
-                  <a:srgbClr val="31662F"/>
-                </a:solidFill>
-                <a:latin typeface="Montserrat"/>
-              </a:rPr>
-              <a:t>Elina Psara</a:t>
-            </a:r>
-          </a:p>
-        </p:txBody>
-      </p:sp>
-      <p:pic>
-        <p:nvPicPr>
-          <p:cNvPr id="115" name="Picture 114" descr="7454114753255690645.jpg"/>
-          <p:cNvPicPr>
-            <a:picLocks noChangeAspect="1"/>
-          </p:cNvPicPr>
-          <p:nvPr/>
-        </p:nvPicPr>
-        <p:blipFill>
-          <a:blip r:embed="rId18"/>
-          <a:stretch>
-            <a:fillRect/>
-          </a:stretch>
-        </p:blipFill>
-        <p:spPr>
-          <a:xfrm>
-            <a:off x="4236720" y="7860030"/>
-            <a:ext cx="1813560" cy="1813560"/>
-          </a:xfrm>
-          <a:prstGeom prst="rect">
-            <a:avLst/>
-          </a:prstGeom>
-        </p:spPr>
-      </p:pic>
-      <p:sp>
-        <p:nvSpPr>
-          <p:cNvPr id="116" name="Rectangle 115"/>
-          <p:cNvSpPr/>
-          <p:nvPr/>
-        </p:nvSpPr>
-        <p:spPr>
-          <a:xfrm>
-            <a:off x="4236720" y="9330690"/>
-            <a:ext cx="1813560" cy="342900"/>
-          </a:xfrm>
-          <a:prstGeom prst="rect">
-            <a:avLst/>
-          </a:prstGeom>
-          <a:solidFill>
-            <a:srgbClr val="F3F1EA">
-              <a:alpha val="88000"/>
-            </a:srgbClr>
-          </a:solidFill>
-          <a:ln>
-            <a:noFill/>
-          </a:ln>
-          <a:effectLst/>
-        </p:spPr>
-        <p:style>
-          <a:lnRef idx="1">
-            <a:schemeClr val="accent1"/>
-          </a:lnRef>
-          <a:fillRef idx="3">
-            <a:schemeClr val="accent1"/>
-          </a:fillRef>
-          <a:effectRef idx="2">
-            <a:schemeClr val="accent1"/>
-          </a:effectRef>
-          <a:fontRef idx="minor">
-            <a:schemeClr val="lt1"/>
-          </a:fontRef>
-        </p:style>
-        <p:txBody>
-          <a:bodyPr rtlCol="0" anchor="ctr"/>
-          <a:lstStyle/>
-          <a:p>
-            <a:pPr algn="ctr"/>
-          </a:p>
-        </p:txBody>
-      </p:sp>
-      <p:sp>
-        <p:nvSpPr>
-          <p:cNvPr id="117" name="TextBox 116"/>
-          <p:cNvSpPr txBox="1"/>
-          <p:nvPr/>
-        </p:nvSpPr>
-        <p:spPr>
-          <a:xfrm>
-            <a:off x="4274820" y="9330690"/>
-            <a:ext cx="1737360" cy="342900"/>
-          </a:xfrm>
-          <a:prstGeom prst="rect">
-            <a:avLst/>
-          </a:prstGeom>
-          <a:noFill/>
-        </p:spPr>
-        <p:txBody>
-          <a:bodyPr wrap="square" lIns="0" rIns="0" tIns="0" bIns="0" anchor="ctr">
-            <a:spAutoFit/>
-          </a:bodyPr>
-          <a:lstStyle/>
-          <a:p>
-            <a:pPr algn="ctr">
-              <a:lnSpc>
-                <a:spcPct val="120000"/>
-              </a:lnSpc>
-            </a:pPr>
-            <a:r>
-              <a:rPr sz="1200" b="1" i="0">
-                <a:solidFill>
-                  <a:srgbClr val="31662F"/>
-                </a:solidFill>
-                <a:latin typeface="Montserrat"/>
-              </a:rPr>
-              <a:t>Caterina Capri</a:t>
-            </a:r>
-          </a:p>
-        </p:txBody>
-      </p:sp>
-      <p:pic>
-        <p:nvPicPr>
-          <p:cNvPr id="118" name="Picture 117" descr="8055802890071954999.jpg"/>
-          <p:cNvPicPr>
-            <a:picLocks noChangeAspect="1"/>
-          </p:cNvPicPr>
-          <p:nvPr/>
-        </p:nvPicPr>
-        <p:blipFill>
-          <a:blip r:embed="rId19"/>
-          <a:stretch>
-            <a:fillRect/>
-          </a:stretch>
-        </p:blipFill>
-        <p:spPr>
-          <a:xfrm>
-            <a:off x="6126480" y="7860030"/>
-            <a:ext cx="1813560" cy="1813560"/>
-          </a:xfrm>
-          <a:prstGeom prst="rect">
-            <a:avLst/>
-          </a:prstGeom>
-        </p:spPr>
-      </p:pic>
-      <p:sp>
-        <p:nvSpPr>
-          <p:cNvPr id="119" name="Rectangle 118"/>
-          <p:cNvSpPr/>
-          <p:nvPr/>
-        </p:nvSpPr>
-        <p:spPr>
-          <a:xfrm>
-            <a:off x="6126480" y="9330690"/>
-            <a:ext cx="1813560" cy="342900"/>
-          </a:xfrm>
-          <a:prstGeom prst="rect">
-            <a:avLst/>
-          </a:prstGeom>
-          <a:solidFill>
-            <a:srgbClr val="F3F1EA">
-              <a:alpha val="88000"/>
-            </a:srgbClr>
-          </a:solidFill>
-          <a:ln>
-            <a:noFill/>
-          </a:ln>
-          <a:effectLst/>
-        </p:spPr>
-        <p:style>
-          <a:lnRef idx="1">
-            <a:schemeClr val="accent1"/>
-          </a:lnRef>
-          <a:fillRef idx="3">
-            <a:schemeClr val="accent1"/>
-          </a:fillRef>
-          <a:effectRef idx="2">
-            <a:schemeClr val="accent1"/>
-          </a:effectRef>
-          <a:fontRef idx="minor">
-            <a:schemeClr val="lt1"/>
-          </a:fontRef>
-        </p:style>
-        <p:txBody>
-          <a:bodyPr rtlCol="0" anchor="ctr"/>
-          <a:lstStyle/>
-          <a:p>
-            <a:pPr algn="ctr"/>
-          </a:p>
-        </p:txBody>
-      </p:sp>
-      <p:sp>
-        <p:nvSpPr>
-          <p:cNvPr id="120" name="TextBox 119"/>
-          <p:cNvSpPr txBox="1"/>
-          <p:nvPr/>
-        </p:nvSpPr>
-        <p:spPr>
-          <a:xfrm>
-            <a:off x="6164580" y="9330690"/>
-            <a:ext cx="1737360" cy="342900"/>
-          </a:xfrm>
-          <a:prstGeom prst="rect">
-            <a:avLst/>
-          </a:prstGeom>
-          <a:noFill/>
-        </p:spPr>
-        <p:txBody>
-          <a:bodyPr wrap="square" lIns="0" rIns="0" tIns="0" bIns="0" anchor="ctr">
-            <a:spAutoFit/>
-          </a:bodyPr>
-          <a:lstStyle/>
-          <a:p>
-            <a:pPr algn="ctr">
-              <a:lnSpc>
-                <a:spcPct val="120000"/>
-              </a:lnSpc>
-            </a:pPr>
-            <a:r>
-              <a:rPr sz="1200" b="1" i="0">
-                <a:solidFill>
-                  <a:srgbClr val="31662F"/>
-                </a:solidFill>
-                <a:latin typeface="Montserrat"/>
-              </a:rPr>
-              <a:t>Laura Campos</a:t>
-            </a:r>
-          </a:p>
-        </p:txBody>
-      </p:sp>
-      <p:pic>
-        <p:nvPicPr>
-          <p:cNvPr id="121" name="Picture 120" descr="6327792871960472773.jpg"/>
-          <p:cNvPicPr>
-            <a:picLocks noChangeAspect="1"/>
-          </p:cNvPicPr>
-          <p:nvPr/>
-        </p:nvPicPr>
-        <p:blipFill>
-          <a:blip r:embed="rId20"/>
-          <a:stretch>
-            <a:fillRect/>
-          </a:stretch>
-        </p:blipFill>
-        <p:spPr>
-          <a:xfrm>
-            <a:off x="8016240" y="7860030"/>
-            <a:ext cx="1813560" cy="1813560"/>
-          </a:xfrm>
-          <a:prstGeom prst="rect">
-            <a:avLst/>
-          </a:prstGeom>
-        </p:spPr>
-      </p:pic>
-      <p:sp>
-        <p:nvSpPr>
-          <p:cNvPr id="122" name="Rectangle 121"/>
-          <p:cNvSpPr/>
-          <p:nvPr/>
-        </p:nvSpPr>
-        <p:spPr>
-          <a:xfrm>
-            <a:off x="8016240" y="9330690"/>
-            <a:ext cx="1813560" cy="342900"/>
-          </a:xfrm>
-          <a:prstGeom prst="rect">
-            <a:avLst/>
-          </a:prstGeom>
-          <a:solidFill>
-            <a:srgbClr val="F3F1EA">
-              <a:alpha val="88000"/>
-            </a:srgbClr>
-          </a:solidFill>
-          <a:ln>
-            <a:noFill/>
-          </a:ln>
-          <a:effectLst/>
-        </p:spPr>
-        <p:style>
-          <a:lnRef idx="1">
-            <a:schemeClr val="accent1"/>
-          </a:lnRef>
-          <a:fillRef idx="3">
-            <a:schemeClr val="accent1"/>
-          </a:fillRef>
-          <a:effectRef idx="2">
-            <a:schemeClr val="accent1"/>
-          </a:effectRef>
-          <a:fontRef idx="minor">
-            <a:schemeClr val="lt1"/>
-          </a:fontRef>
-        </p:style>
-        <p:txBody>
-          <a:bodyPr rtlCol="0" anchor="ctr"/>
-          <a:lstStyle/>
-          <a:p>
-            <a:pPr algn="ctr"/>
-          </a:p>
-        </p:txBody>
-      </p:sp>
-      <p:sp>
-        <p:nvSpPr>
-          <p:cNvPr id="123" name="TextBox 122"/>
-          <p:cNvSpPr txBox="1"/>
-          <p:nvPr/>
-        </p:nvSpPr>
-        <p:spPr>
-          <a:xfrm>
-            <a:off x="8054340" y="9330690"/>
-            <a:ext cx="1737360" cy="342900"/>
-          </a:xfrm>
-          <a:prstGeom prst="rect">
-            <a:avLst/>
-          </a:prstGeom>
-          <a:noFill/>
-        </p:spPr>
-        <p:txBody>
-          <a:bodyPr wrap="square" lIns="0" rIns="0" tIns="0" bIns="0" anchor="ctr">
-            <a:spAutoFit/>
-          </a:bodyPr>
-          <a:lstStyle/>
-          <a:p>
-            <a:pPr algn="ctr">
-              <a:lnSpc>
-                <a:spcPct val="120000"/>
-              </a:lnSpc>
-            </a:pPr>
-            <a:r>
-              <a:rPr sz="1200" b="1" i="0">
-                <a:solidFill>
-                  <a:srgbClr val="31662F"/>
-                </a:solidFill>
-                <a:latin typeface="Montserrat"/>
-              </a:rPr>
-              <a:t>Nora Levay</a:t>
-            </a:r>
-          </a:p>
-        </p:txBody>
-      </p:sp>
-      <p:sp>
-        <p:nvSpPr>
-          <p:cNvPr id="124" name="TextBox 123"/>
+      <p:sp>
+        <p:nvSpPr>
+          <p:cNvPr id="112" name="TextBox 111"/>
           <p:cNvSpPr txBox="1"/>
           <p:nvPr/>
         </p:nvSpPr>

--- a/templates/posts/october/05-10-2026-mon-ig-teachers-day-option-2-bunting.pptx
+++ b/templates/posts/october/05-10-2026-mon-ig-teachers-day-option-2-bunting.pptx
@@ -34544,7 +34544,7 @@
       </p:sp>
       <p:pic>
         <p:nvPicPr>
-          <p:cNvPr id="70" name="Picture 69" descr="7297811591439890433.jpg"/>
+          <p:cNvPr id="70" name="Picture 69" descr="4325354522426781560.jpg"/>
           <p:cNvPicPr>
             <a:picLocks noChangeAspect="1"/>
           </p:cNvPicPr>
@@ -34653,7 +34653,7 @@
       </p:sp>
       <p:pic>
         <p:nvPicPr>
-          <p:cNvPr id="73" name="Picture 72" descr="8728437986854537801.jpg"/>
+          <p:cNvPr id="73" name="Picture 72" descr="1732553050818676790.jpg"/>
           <p:cNvPicPr>
             <a:picLocks noChangeAspect="1"/>
           </p:cNvPicPr>
@@ -34762,7 +34762,7 @@
       </p:sp>
       <p:pic>
         <p:nvPicPr>
-          <p:cNvPr id="76" name="Picture 75" descr="8499503155804001537.jpg"/>
+          <p:cNvPr id="76" name="Picture 75" descr="6558719580005473315.jpg"/>
           <p:cNvPicPr>
             <a:picLocks noChangeAspect="1"/>
           </p:cNvPicPr>
@@ -34871,7 +34871,7 @@
       </p:sp>
       <p:pic>
         <p:nvPicPr>
-          <p:cNvPr id="79" name="Picture 78" descr="8664505731163078658.jpg"/>
+          <p:cNvPr id="79" name="Picture 78" descr="1213630668745913466.jpg"/>
           <p:cNvPicPr>
             <a:picLocks noChangeAspect="1"/>
           </p:cNvPicPr>
@@ -34980,7 +34980,7 @@
       </p:sp>
       <p:pic>
         <p:nvPicPr>
-          <p:cNvPr id="82" name="Picture 81" descr="7695145214115977211.jpg"/>
+          <p:cNvPr id="82" name="Picture 81" descr="7687647477321729715.jpg"/>
           <p:cNvPicPr>
             <a:picLocks noChangeAspect="1"/>
           </p:cNvPicPr>
@@ -35089,7 +35089,7 @@
       </p:sp>
       <p:pic>
         <p:nvPicPr>
-          <p:cNvPr id="85" name="Picture 84" descr="1311806062584278399.jpg"/>
+          <p:cNvPr id="85" name="Picture 84" descr="5031212317594417618.jpg"/>
           <p:cNvPicPr>
             <a:picLocks noChangeAspect="1"/>
           </p:cNvPicPr>
@@ -35198,7 +35198,7 @@
       </p:sp>
       <p:pic>
         <p:nvPicPr>
-          <p:cNvPr id="88" name="Picture 87" descr="5215010633690581301.jpg"/>
+          <p:cNvPr id="88" name="Picture 87" descr="5273411908651455532.jpg"/>
           <p:cNvPicPr>
             <a:picLocks noChangeAspect="1"/>
           </p:cNvPicPr>
@@ -35307,7 +35307,7 @@
       </p:sp>
       <p:pic>
         <p:nvPicPr>
-          <p:cNvPr id="91" name="Picture 90" descr="746667493973784667.jpg"/>
+          <p:cNvPr id="91" name="Picture 90" descr="5332898434888599316.jpg"/>
           <p:cNvPicPr>
             <a:picLocks noChangeAspect="1"/>
           </p:cNvPicPr>
@@ -35416,7 +35416,7 @@
       </p:sp>
       <p:pic>
         <p:nvPicPr>
-          <p:cNvPr id="94" name="Picture 93" descr="4763296968275485648.jpg"/>
+          <p:cNvPr id="94" name="Picture 93" descr="6311296678588155617.jpg"/>
           <p:cNvPicPr>
             <a:picLocks noChangeAspect="1"/>
           </p:cNvPicPr>
@@ -35525,7 +35525,7 @@
       </p:sp>
       <p:pic>
         <p:nvPicPr>
-          <p:cNvPr id="97" name="Picture 96" descr="5135560565093357647.jpg"/>
+          <p:cNvPr id="97" name="Picture 96" descr="7523051663126606764.jpg"/>
           <p:cNvPicPr>
             <a:picLocks noChangeAspect="1"/>
           </p:cNvPicPr>
@@ -35634,7 +35634,7 @@
       </p:sp>
       <p:pic>
         <p:nvPicPr>
-          <p:cNvPr id="100" name="Picture 99" descr="1228326016823983096.jpg"/>
+          <p:cNvPr id="100" name="Picture 99" descr="5837706495651502879.jpg"/>
           <p:cNvPicPr>
             <a:picLocks noChangeAspect="1"/>
           </p:cNvPicPr>
@@ -35743,7 +35743,7 @@
       </p:sp>
       <p:pic>
         <p:nvPicPr>
-          <p:cNvPr id="103" name="Picture 102" descr="2663829795774334274.jpg"/>
+          <p:cNvPr id="103" name="Picture 102" descr="7992983515775991812.jpg"/>
           <p:cNvPicPr>
             <a:picLocks noChangeAspect="1"/>
           </p:cNvPicPr>
@@ -35852,7 +35852,7 @@
       </p:sp>
       <p:pic>
         <p:nvPicPr>
-          <p:cNvPr id="106" name="Picture 105" descr="8496695976596084521.jpg"/>
+          <p:cNvPr id="106" name="Picture 105" descr="6299019462365137944.jpg"/>
           <p:cNvPicPr>
             <a:picLocks noChangeAspect="1"/>
           </p:cNvPicPr>
@@ -35961,7 +35961,7 @@
       </p:sp>
       <p:pic>
         <p:nvPicPr>
-          <p:cNvPr id="109" name="Picture 108" descr="8052758747183003055.jpg"/>
+          <p:cNvPr id="109" name="Picture 108" descr="9166712994638490770.jpg"/>
           <p:cNvPicPr>
             <a:picLocks noChangeAspect="1"/>
           </p:cNvPicPr>

--- a/templates/posts/october/05-10-2026-mon-ig-teachers-day-option-2-bunting.pptx
+++ b/templates/posts/october/05-10-2026-mon-ig-teachers-day-option-2-bunting.pptx
@@ -34544,7 +34544,7 @@
       </p:sp>
       <p:pic>
         <p:nvPicPr>
-          <p:cNvPr id="70" name="Picture 69" descr="4325354522426781560.jpg"/>
+          <p:cNvPr id="70" name="Picture 69" descr="7767655283041233060.jpg"/>
           <p:cNvPicPr>
             <a:picLocks noChangeAspect="1"/>
           </p:cNvPicPr>
@@ -34653,7 +34653,7 @@
       </p:sp>
       <p:pic>
         <p:nvPicPr>
-          <p:cNvPr id="73" name="Picture 72" descr="1732553050818676790.jpg"/>
+          <p:cNvPr id="73" name="Picture 72" descr="2855909617508751556.jpg"/>
           <p:cNvPicPr>
             <a:picLocks noChangeAspect="1"/>
           </p:cNvPicPr>
@@ -34762,7 +34762,7 @@
       </p:sp>
       <p:pic>
         <p:nvPicPr>
-          <p:cNvPr id="76" name="Picture 75" descr="6558719580005473315.jpg"/>
+          <p:cNvPr id="76" name="Picture 75" descr="3779064170636143037.jpg"/>
           <p:cNvPicPr>
             <a:picLocks noChangeAspect="1"/>
           </p:cNvPicPr>
@@ -34871,7 +34871,7 @@
       </p:sp>
       <p:pic>
         <p:nvPicPr>
-          <p:cNvPr id="79" name="Picture 78" descr="1213630668745913466.jpg"/>
+          <p:cNvPr id="79" name="Picture 78" descr="6194691986289224762.jpg"/>
           <p:cNvPicPr>
             <a:picLocks noChangeAspect="1"/>
           </p:cNvPicPr>
@@ -34980,7 +34980,7 @@
       </p:sp>
       <p:pic>
         <p:nvPicPr>
-          <p:cNvPr id="82" name="Picture 81" descr="7687647477321729715.jpg"/>
+          <p:cNvPr id="82" name="Picture 81" descr="1913719621523367371.jpg"/>
           <p:cNvPicPr>
             <a:picLocks noChangeAspect="1"/>
           </p:cNvPicPr>
@@ -35089,7 +35089,7 @@
       </p:sp>
       <p:pic>
         <p:nvPicPr>
-          <p:cNvPr id="85" name="Picture 84" descr="5031212317594417618.jpg"/>
+          <p:cNvPr id="85" name="Picture 84" descr="1665765394624969327.jpg"/>
           <p:cNvPicPr>
             <a:picLocks noChangeAspect="1"/>
           </p:cNvPicPr>
@@ -35198,7 +35198,7 @@
       </p:sp>
       <p:pic>
         <p:nvPicPr>
-          <p:cNvPr id="88" name="Picture 87" descr="5273411908651455532.jpg"/>
+          <p:cNvPr id="88" name="Picture 87" descr="3518042680015161469.jpg"/>
           <p:cNvPicPr>
             <a:picLocks noChangeAspect="1"/>
           </p:cNvPicPr>
@@ -35307,7 +35307,7 @@
       </p:sp>
       <p:pic>
         <p:nvPicPr>
-          <p:cNvPr id="91" name="Picture 90" descr="5332898434888599316.jpg"/>
+          <p:cNvPr id="91" name="Picture 90" descr="3970960260678623010.jpg"/>
           <p:cNvPicPr>
             <a:picLocks noChangeAspect="1"/>
           </p:cNvPicPr>
@@ -35416,7 +35416,7 @@
       </p:sp>
       <p:pic>
         <p:nvPicPr>
-          <p:cNvPr id="94" name="Picture 93" descr="6311296678588155617.jpg"/>
+          <p:cNvPr id="94" name="Picture 93" descr="8302949435964405591.jpg"/>
           <p:cNvPicPr>
             <a:picLocks noChangeAspect="1"/>
           </p:cNvPicPr>
@@ -35525,7 +35525,7 @@
       </p:sp>
       <p:pic>
         <p:nvPicPr>
-          <p:cNvPr id="97" name="Picture 96" descr="7523051663126606764.jpg"/>
+          <p:cNvPr id="97" name="Picture 96" descr="5449205996364737380.jpg"/>
           <p:cNvPicPr>
             <a:picLocks noChangeAspect="1"/>
           </p:cNvPicPr>
@@ -35634,7 +35634,7 @@
       </p:sp>
       <p:pic>
         <p:nvPicPr>
-          <p:cNvPr id="100" name="Picture 99" descr="5837706495651502879.jpg"/>
+          <p:cNvPr id="100" name="Picture 99" descr="1356165162909352538.jpg"/>
           <p:cNvPicPr>
             <a:picLocks noChangeAspect="1"/>
           </p:cNvPicPr>
@@ -35743,7 +35743,7 @@
       </p:sp>
       <p:pic>
         <p:nvPicPr>
-          <p:cNvPr id="103" name="Picture 102" descr="7992983515775991812.jpg"/>
+          <p:cNvPr id="103" name="Picture 102" descr="304168690878683566.jpg"/>
           <p:cNvPicPr>
             <a:picLocks noChangeAspect="1"/>
           </p:cNvPicPr>
@@ -35852,7 +35852,7 @@
       </p:sp>
       <p:pic>
         <p:nvPicPr>
-          <p:cNvPr id="106" name="Picture 105" descr="6299019462365137944.jpg"/>
+          <p:cNvPr id="106" name="Picture 105" descr="8800070933331447382.jpg"/>
           <p:cNvPicPr>
             <a:picLocks noChangeAspect="1"/>
           </p:cNvPicPr>
@@ -35961,7 +35961,7 @@
       </p:sp>
       <p:pic>
         <p:nvPicPr>
-          <p:cNvPr id="109" name="Picture 108" descr="9166712994638490770.jpg"/>
+          <p:cNvPr id="109" name="Picture 108" descr="882755308084976196.jpg"/>
           <p:cNvPicPr>
             <a:picLocks noChangeAspect="1"/>
           </p:cNvPicPr>

--- a/templates/posts/october/05-10-2026-mon-ig-teachers-day-option-2-bunting.pptx
+++ b/templates/posts/october/05-10-2026-mon-ig-teachers-day-option-2-bunting.pptx
@@ -34544,7 +34544,7 @@
       </p:sp>
       <p:pic>
         <p:nvPicPr>
-          <p:cNvPr id="70" name="Picture 69" descr="7767655283041233060.jpg"/>
+          <p:cNvPr id="70" name="Picture 69" descr="5603317114199949942.jpg"/>
           <p:cNvPicPr>
             <a:picLocks noChangeAspect="1"/>
           </p:cNvPicPr>
@@ -34653,7 +34653,7 @@
       </p:sp>
       <p:pic>
         <p:nvPicPr>
-          <p:cNvPr id="73" name="Picture 72" descr="2855909617508751556.jpg"/>
+          <p:cNvPr id="73" name="Picture 72" descr="7830199770994796711.jpg"/>
           <p:cNvPicPr>
             <a:picLocks noChangeAspect="1"/>
           </p:cNvPicPr>
@@ -34762,7 +34762,7 @@
       </p:sp>
       <p:pic>
         <p:nvPicPr>
-          <p:cNvPr id="76" name="Picture 75" descr="3779064170636143037.jpg"/>
+          <p:cNvPr id="76" name="Picture 75" descr="4571667486435294808.jpg"/>
           <p:cNvPicPr>
             <a:picLocks noChangeAspect="1"/>
           </p:cNvPicPr>
@@ -34871,7 +34871,7 @@
       </p:sp>
       <p:pic>
         <p:nvPicPr>
-          <p:cNvPr id="79" name="Picture 78" descr="6194691986289224762.jpg"/>
+          <p:cNvPr id="79" name="Picture 78" descr="9088374418818931136.jpg"/>
           <p:cNvPicPr>
             <a:picLocks noChangeAspect="1"/>
           </p:cNvPicPr>
@@ -34980,7 +34980,7 @@
       </p:sp>
       <p:pic>
         <p:nvPicPr>
-          <p:cNvPr id="82" name="Picture 81" descr="1913719621523367371.jpg"/>
+          <p:cNvPr id="82" name="Picture 81" descr="6594270107413876614.jpg"/>
           <p:cNvPicPr>
             <a:picLocks noChangeAspect="1"/>
           </p:cNvPicPr>
@@ -35089,7 +35089,7 @@
       </p:sp>
       <p:pic>
         <p:nvPicPr>
-          <p:cNvPr id="85" name="Picture 84" descr="1665765394624969327.jpg"/>
+          <p:cNvPr id="85" name="Picture 84" descr="8713409569344051093.jpg"/>
           <p:cNvPicPr>
             <a:picLocks noChangeAspect="1"/>
           </p:cNvPicPr>
@@ -35198,7 +35198,7 @@
       </p:sp>
       <p:pic>
         <p:nvPicPr>
-          <p:cNvPr id="88" name="Picture 87" descr="3518042680015161469.jpg"/>
+          <p:cNvPr id="88" name="Picture 87" descr="55297487836981199.jpg"/>
           <p:cNvPicPr>
             <a:picLocks noChangeAspect="1"/>
           </p:cNvPicPr>
@@ -35307,7 +35307,7 @@
       </p:sp>
       <p:pic>
         <p:nvPicPr>
-          <p:cNvPr id="91" name="Picture 90" descr="3970960260678623010.jpg"/>
+          <p:cNvPr id="91" name="Picture 90" descr="7725558612807332116.jpg"/>
           <p:cNvPicPr>
             <a:picLocks noChangeAspect="1"/>
           </p:cNvPicPr>
@@ -35416,7 +35416,7 @@
       </p:sp>
       <p:pic>
         <p:nvPicPr>
-          <p:cNvPr id="94" name="Picture 93" descr="8302949435964405591.jpg"/>
+          <p:cNvPr id="94" name="Picture 93" descr="891395382056755913.jpg"/>
           <p:cNvPicPr>
             <a:picLocks noChangeAspect="1"/>
           </p:cNvPicPr>
@@ -35525,7 +35525,7 @@
       </p:sp>
       <p:pic>
         <p:nvPicPr>
-          <p:cNvPr id="97" name="Picture 96" descr="5449205996364737380.jpg"/>
+          <p:cNvPr id="97" name="Picture 96" descr="4291221487964845528.jpg"/>
           <p:cNvPicPr>
             <a:picLocks noChangeAspect="1"/>
           </p:cNvPicPr>
@@ -35634,7 +35634,7 @@
       </p:sp>
       <p:pic>
         <p:nvPicPr>
-          <p:cNvPr id="100" name="Picture 99" descr="1356165162909352538.jpg"/>
+          <p:cNvPr id="100" name="Picture 99" descr="6542959424271258557.jpg"/>
           <p:cNvPicPr>
             <a:picLocks noChangeAspect="1"/>
           </p:cNvPicPr>
@@ -35743,7 +35743,7 @@
       </p:sp>
       <p:pic>
         <p:nvPicPr>
-          <p:cNvPr id="103" name="Picture 102" descr="304168690878683566.jpg"/>
+          <p:cNvPr id="103" name="Picture 102" descr="4785911602451428486.jpg"/>
           <p:cNvPicPr>
             <a:picLocks noChangeAspect="1"/>
           </p:cNvPicPr>
@@ -35852,7 +35852,7 @@
       </p:sp>
       <p:pic>
         <p:nvPicPr>
-          <p:cNvPr id="106" name="Picture 105" descr="8800070933331447382.jpg"/>
+          <p:cNvPr id="106" name="Picture 105" descr="2749247239648488048.jpg"/>
           <p:cNvPicPr>
             <a:picLocks noChangeAspect="1"/>
           </p:cNvPicPr>
@@ -35961,7 +35961,7 @@
       </p:sp>
       <p:pic>
         <p:nvPicPr>
-          <p:cNvPr id="109" name="Picture 108" descr="882755308084976196.jpg"/>
+          <p:cNvPr id="109" name="Picture 108" descr="7116535034098222264.jpg"/>
           <p:cNvPicPr>
             <a:picLocks noChangeAspect="1"/>
           </p:cNvPicPr>

--- a/templates/posts/october/05-10-2026-mon-ig-teachers-day-option-2-bunting.pptx
+++ b/templates/posts/october/05-10-2026-mon-ig-teachers-day-option-2-bunting.pptx
@@ -34544,7 +34544,7 @@
       </p:sp>
       <p:pic>
         <p:nvPicPr>
-          <p:cNvPr id="70" name="Picture 69" descr="5603317114199949942.jpg"/>
+          <p:cNvPr id="70" name="Picture 69" descr="8994635771278737361.jpg"/>
           <p:cNvPicPr>
             <a:picLocks noChangeAspect="1"/>
           </p:cNvPicPr>
@@ -34653,7 +34653,7 @@
       </p:sp>
       <p:pic>
         <p:nvPicPr>
-          <p:cNvPr id="73" name="Picture 72" descr="7830199770994796711.jpg"/>
+          <p:cNvPr id="73" name="Picture 72" descr="3064864148393557809.jpg"/>
           <p:cNvPicPr>
             <a:picLocks noChangeAspect="1"/>
           </p:cNvPicPr>
@@ -34762,7 +34762,7 @@
       </p:sp>
       <p:pic>
         <p:nvPicPr>
-          <p:cNvPr id="76" name="Picture 75" descr="4571667486435294808.jpg"/>
+          <p:cNvPr id="76" name="Picture 75" descr="7815650767561644754.jpg"/>
           <p:cNvPicPr>
             <a:picLocks noChangeAspect="1"/>
           </p:cNvPicPr>
@@ -34871,7 +34871,7 @@
       </p:sp>
       <p:pic>
         <p:nvPicPr>
-          <p:cNvPr id="79" name="Picture 78" descr="9088374418818931136.jpg"/>
+          <p:cNvPr id="79" name="Picture 78" descr="3589319268339702705.jpg"/>
           <p:cNvPicPr>
             <a:picLocks noChangeAspect="1"/>
           </p:cNvPicPr>
@@ -34980,7 +34980,7 @@
       </p:sp>
       <p:pic>
         <p:nvPicPr>
-          <p:cNvPr id="82" name="Picture 81" descr="6594270107413876614.jpg"/>
+          <p:cNvPr id="82" name="Picture 81" descr="3815175066278969693.jpg"/>
           <p:cNvPicPr>
             <a:picLocks noChangeAspect="1"/>
           </p:cNvPicPr>
@@ -35089,7 +35089,7 @@
       </p:sp>
       <p:pic>
         <p:nvPicPr>
-          <p:cNvPr id="85" name="Picture 84" descr="8713409569344051093.jpg"/>
+          <p:cNvPr id="85" name="Picture 84" descr="4614445495298174257.jpg"/>
           <p:cNvPicPr>
             <a:picLocks noChangeAspect="1"/>
           </p:cNvPicPr>
@@ -35198,7 +35198,7 @@
       </p:sp>
       <p:pic>
         <p:nvPicPr>
-          <p:cNvPr id="88" name="Picture 87" descr="55297487836981199.jpg"/>
+          <p:cNvPr id="88" name="Picture 87" descr="8487436485798559110.jpg"/>
           <p:cNvPicPr>
             <a:picLocks noChangeAspect="1"/>
           </p:cNvPicPr>
@@ -35307,7 +35307,7 @@
       </p:sp>
       <p:pic>
         <p:nvPicPr>
-          <p:cNvPr id="91" name="Picture 90" descr="7725558612807332116.jpg"/>
+          <p:cNvPr id="91" name="Picture 90" descr="2456545260107240446.jpg"/>
           <p:cNvPicPr>
             <a:picLocks noChangeAspect="1"/>
           </p:cNvPicPr>
@@ -35416,7 +35416,7 @@
       </p:sp>
       <p:pic>
         <p:nvPicPr>
-          <p:cNvPr id="94" name="Picture 93" descr="891395382056755913.jpg"/>
+          <p:cNvPr id="94" name="Picture 93" descr="9164031694924200788.jpg"/>
           <p:cNvPicPr>
             <a:picLocks noChangeAspect="1"/>
           </p:cNvPicPr>
@@ -35525,7 +35525,7 @@
       </p:sp>
       <p:pic>
         <p:nvPicPr>
-          <p:cNvPr id="97" name="Picture 96" descr="4291221487964845528.jpg"/>
+          <p:cNvPr id="97" name="Picture 96" descr="245352837941254467.jpg"/>
           <p:cNvPicPr>
             <a:picLocks noChangeAspect="1"/>
           </p:cNvPicPr>
@@ -35634,7 +35634,7 @@
       </p:sp>
       <p:pic>
         <p:nvPicPr>
-          <p:cNvPr id="100" name="Picture 99" descr="6542959424271258557.jpg"/>
+          <p:cNvPr id="100" name="Picture 99" descr="7522010873324386665.jpg"/>
           <p:cNvPicPr>
             <a:picLocks noChangeAspect="1"/>
           </p:cNvPicPr>
@@ -35743,7 +35743,7 @@
       </p:sp>
       <p:pic>
         <p:nvPicPr>
-          <p:cNvPr id="103" name="Picture 102" descr="4785911602451428486.jpg"/>
+          <p:cNvPr id="103" name="Picture 102" descr="5925411254870724140.jpg"/>
           <p:cNvPicPr>
             <a:picLocks noChangeAspect="1"/>
           </p:cNvPicPr>
@@ -35852,7 +35852,7 @@
       </p:sp>
       <p:pic>
         <p:nvPicPr>
-          <p:cNvPr id="106" name="Picture 105" descr="2749247239648488048.jpg"/>
+          <p:cNvPr id="106" name="Picture 105" descr="6679412281472379077.jpg"/>
           <p:cNvPicPr>
             <a:picLocks noChangeAspect="1"/>
           </p:cNvPicPr>
@@ -35961,7 +35961,7 @@
       </p:sp>
       <p:pic>
         <p:nvPicPr>
-          <p:cNvPr id="109" name="Picture 108" descr="7116535034098222264.jpg"/>
+          <p:cNvPr id="109" name="Picture 108" descr="3104826297245477543.jpg"/>
           <p:cNvPicPr>
             <a:picLocks noChangeAspect="1"/>
           </p:cNvPicPr>
